--- a/case-study-2-ao-offering-executive.pptx
+++ b/case-study-2-ao-offering-executive.pptx
@@ -946,6 +946,12 @@
           <a:p>
             <a:r>
               <a:t>• Pass-gate = explicit go/no-go criteria before expanding scope or geography</a:t>
+            </a:r>
+          </a:p>
+          <a:p/>
+          <a:p>
+            <a:r>
+              <a:t>PHASED ROLLOUT (UPDATED): M0–M3 train · M3–M6 forward shadow · M6–M9 reverse shadow / HITL / region kit · M12–M15 auto classes expand / Nth-logo / reuse proof. M9–M12 is HITL stabilize before auto expand.</a:t>
             </a:r>
           </a:p>
         </p:txBody>
@@ -7069,7 +7075,7 @@
                 </a:solidFill>
                 <a:latin typeface="Calibri"/>
               </a:rPr>
-              <a:t>•  Executive quality gates at month 3 / 12 / 18</a:t>
+              <a:t>•  Executive quality gates at month 3 / 12 / 15</a:t>
             </a:r>
           </a:p>
         </p:txBody>

--- a/case-study-2-ao-offering-executive.pptx
+++ b/case-study-2-ao-offering-executive.pptx
@@ -534,6 +534,12 @@
               <a:t>GLOSSARY: KPI · OKR · TCO · SLA · CPI · NPS · 3PP / third-party products.</a:t>
             </a:r>
           </a:p>
+          <a:p/>
+          <a:p>
+            <a:r>
+              <a:t>ON-SLIDE TIMER: Budget 1:15 for this slide. Gold bar counts down when Slideshow opens (does not auto-advance). By end of this slide you should be at ~1:15 of 10:00 (~8:45 remaining).</a:t>
+            </a:r>
+          </a:p>
         </p:txBody>
       </p:sp>
       <p:sp>
@@ -626,6 +632,12 @@
               <a:t>GLOSSARY: MTTR = mean time to restore · SDM = Service Delivery Manager · TCO = total cost of ownership.</a:t>
             </a:r>
           </a:p>
+          <a:p/>
+          <a:p>
+            <a:r>
+              <a:t>ON-SLIDE TIMER: Budget 1:15 for this slide. Gold bar counts down when Slideshow opens (does not auto-advance). By end of this slide you should be at ~2:30 of 10:00 (~7:30 remaining).</a:t>
+            </a:r>
+          </a:p>
         </p:txBody>
       </p:sp>
       <p:sp>
@@ -707,6 +719,12 @@
               <a:t>GLOSSARY: SPOG = single pane of glass · HITL = human-in-the-loop · Shadow mode · Known error.</a:t>
             </a:r>
           </a:p>
+          <a:p/>
+          <a:p>
+            <a:r>
+              <a:t>ON-SLIDE TIMER: Budget 1:15 for this slide. Gold bar counts down when Slideshow opens (does not auto-advance). By end of this slide you should be at ~3:45 of 10:00 (~6:15 remaining).</a:t>
+            </a:r>
+          </a:p>
         </p:txBody>
       </p:sp>
       <p:sp>
@@ -788,6 +806,12 @@
               <a:t>GLOSSARY: CPI · Soft-ramp · Top offender · P0/P1 · Credit.</a:t>
             </a:r>
           </a:p>
+          <a:p/>
+          <a:p>
+            <a:r>
+              <a:t>ON-SLIDE TIMER: Budget 1:15 for this slide. Gold bar counts down when Slideshow opens (does not auto-advance). By end of this slide you should be at ~5:00 of 10:00 (~5:00 remaining).</a:t>
+            </a:r>
+          </a:p>
         </p:txBody>
       </p:sp>
       <p:sp>
@@ -869,6 +893,12 @@
               <a:t>GLOSSARY: Adapter · Reuse library · IP = intellectual property.</a:t>
             </a:r>
           </a:p>
+          <a:p/>
+          <a:p>
+            <a:r>
+              <a:t>ON-SLIDE TIMER: Budget 1:00 for this slide. Gold bar counts down when Slideshow opens (does not auto-advance). By end of this slide you should be at ~6:00 of 10:00 (~4:00 remaining).</a:t>
+            </a:r>
+          </a:p>
         </p:txBody>
       </p:sp>
       <p:sp>
@@ -960,6 +990,12 @@
               <a:t>GLOSSARY: Forward/Reverse shadow · HITL · Pass-gate · Nth logo.</a:t>
             </a:r>
           </a:p>
+          <a:p/>
+          <a:p>
+            <a:r>
+              <a:t>ON-SLIDE TIMER: Budget 1:15 for this slide. Gold bar counts down when Slideshow opens (does not auto-advance). By end of this slide you should be at ~7:15 of 10:00 (~2:45 remaining).</a:t>
+            </a:r>
+          </a:p>
         </p:txBody>
       </p:sp>
       <p:sp>
@@ -1041,6 +1077,12 @@
               <a:t>GLOSSARY: FTE · B · X · EBIT · Site-mix · Penalty lot · Earn-back.</a:t>
             </a:r>
           </a:p>
+          <a:p/>
+          <a:p>
+            <a:r>
+              <a:t>ON-SLIDE TIMER: Budget 1:30 for this slide. Gold bar counts down when Slideshow opens (does not auto-advance). By end of this slide you should be at ~8:45 of 10:00 (~1:15 remaining).</a:t>
+            </a:r>
+          </a:p>
         </p:txBody>
       </p:sp>
       <p:sp>
@@ -1141,6 +1183,12 @@
           <a:p>
             <a:r>
               <a:t>• Pilot fails a gate? Do not scale.</a:t>
+            </a:r>
+          </a:p>
+          <a:p/>
+          <a:p>
+            <a:r>
+              <a:t>ON-SLIDE TIMER: Budget 1:15 for this slide. Gold bar counts down when Slideshow opens (does not auto-advance). By end of this slide you should be at ~10:00 of 10:00 (~0:00 remaining).</a:t>
             </a:r>
           </a:p>
         </p:txBody>
@@ -4237,7 +4285,7 @@
         <p:spPr>
           <a:xfrm>
             <a:off x="502920" y="438912"/>
-            <a:ext cx="11155680" cy="594360"/>
+            <a:ext cx="8869680" cy="594360"/>
           </a:xfrm>
           <a:prstGeom prst="rect">
             <a:avLst/>
@@ -4762,17 +4810,33 @@
           <a:p>
             <a:pPr algn="l">
               <a:spcAft>
+                <a:spcPts val="600"/>
+              </a:spcAft>
+            </a:pPr>
+            <a:r>
+              <a:rPr sz="1400" b="1">
+                <a:solidFill>
+                  <a:srgbClr val="E6EDF3"/>
+                </a:solidFill>
+                <a:latin typeface="Calibri"/>
+              </a:rPr>
+              <a:t>4  Reuse library   →   5  Enablement cadence   →   6  Five-year profit-and-loss   →   7  Proof &amp; ask</a:t>
+            </a:r>
+          </a:p>
+          <a:p>
+            <a:pPr algn="l">
+              <a:spcAft>
                 <a:spcPts val="0"/>
               </a:spcAft>
             </a:pPr>
             <a:r>
-              <a:rPr sz="1400" b="1">
-                <a:solidFill>
-                  <a:srgbClr val="E6EDF3"/>
-                </a:solidFill>
-                <a:latin typeface="Calibri"/>
-              </a:rPr>
-              <a:t>4  Reuse library   →   5  Enablement cadence   →   6  Five-year profit-and-loss   →   7  Proof &amp; ask</a:t>
+              <a:rPr sz="1200" b="0">
+                <a:solidFill>
+                  <a:srgbClr val="8B9CB3"/>
+                </a:solidFill>
+                <a:latin typeface="Calibri"/>
+              </a:rPr>
+              <a:t>Top-right SLIDE BUDGET + gold bar = live countdown in Slideshow (does not auto-advance).</a:t>
             </a:r>
           </a:p>
         </p:txBody>
@@ -4851,6 +4915,294 @@
                 <a:latin typeface="Calibri"/>
               </a:rPr>
               <a:t>1 / 8</a:t>
+            </a:r>
+          </a:p>
+        </p:txBody>
+      </p:sp>
+      <p:sp>
+        <p:nvSpPr>
+          <p:cNvPr id="17" name="Rounded Rectangle 16"/>
+          <p:cNvSpPr/>
+          <p:nvPr/>
+        </p:nvSpPr>
+        <p:spPr>
+          <a:xfrm>
+            <a:off x="9646920" y="164592"/>
+            <a:ext cx="2331720" cy="868680"/>
+          </a:xfrm>
+          <a:prstGeom prst="roundRect">
+            <a:avLst>
+              <a:gd name="adj" fmla="val 12000"/>
+            </a:avLst>
+          </a:prstGeom>
+          <a:solidFill>
+            <a:srgbClr val="1A2332"/>
+          </a:solidFill>
+          <a:ln>
+            <a:noFill/>
+          </a:ln>
+        </p:spPr>
+        <p:style>
+          <a:lnRef idx="1">
+            <a:schemeClr val="accent1"/>
+          </a:lnRef>
+          <a:fillRef idx="3">
+            <a:schemeClr val="accent1"/>
+          </a:fillRef>
+          <a:effectRef idx="2">
+            <a:schemeClr val="accent1"/>
+          </a:effectRef>
+          <a:fontRef idx="minor">
+            <a:schemeClr val="lt1"/>
+          </a:fontRef>
+        </p:style>
+        <p:txBody>
+          <a:bodyPr rtlCol="0" anchor="ctr"/>
+          <a:lstStyle/>
+          <a:p>
+            <a:pPr algn="ctr"/>
+          </a:p>
+        </p:txBody>
+      </p:sp>
+      <p:sp>
+        <p:nvSpPr>
+          <p:cNvPr id="18" name="Rectangle 17"/>
+          <p:cNvSpPr/>
+          <p:nvPr/>
+        </p:nvSpPr>
+        <p:spPr>
+          <a:xfrm>
+            <a:off x="9646920" y="164592"/>
+            <a:ext cx="73152" cy="868680"/>
+          </a:xfrm>
+          <a:prstGeom prst="rect">
+            <a:avLst/>
+          </a:prstGeom>
+          <a:solidFill>
+            <a:srgbClr val="D4A853"/>
+          </a:solidFill>
+          <a:ln>
+            <a:noFill/>
+          </a:ln>
+        </p:spPr>
+        <p:style>
+          <a:lnRef idx="1">
+            <a:schemeClr val="accent1"/>
+          </a:lnRef>
+          <a:fillRef idx="3">
+            <a:schemeClr val="accent1"/>
+          </a:fillRef>
+          <a:effectRef idx="2">
+            <a:schemeClr val="accent1"/>
+          </a:effectRef>
+          <a:fontRef idx="minor">
+            <a:schemeClr val="lt1"/>
+          </a:fontRef>
+        </p:style>
+        <p:txBody>
+          <a:bodyPr rtlCol="0" anchor="ctr"/>
+          <a:lstStyle/>
+          <a:p>
+            <a:pPr algn="ctr"/>
+          </a:p>
+        </p:txBody>
+      </p:sp>
+      <p:sp>
+        <p:nvSpPr>
+          <p:cNvPr id="19" name="TextBox 18"/>
+          <p:cNvSpPr txBox="1"/>
+          <p:nvPr/>
+        </p:nvSpPr>
+        <p:spPr>
+          <a:xfrm>
+            <a:off x="9811512" y="219456"/>
+            <a:ext cx="2075688" cy="777240"/>
+          </a:xfrm>
+          <a:prstGeom prst="rect">
+            <a:avLst/>
+          </a:prstGeom>
+          <a:noFill/>
+        </p:spPr>
+        <p:txBody>
+          <a:bodyPr wrap="square">
+            <a:spAutoFit/>
+          </a:bodyPr>
+          <a:lstStyle/>
+          <a:p>
+            <a:pPr algn="l">
+              <a:spcAft>
+                <a:spcPts val="0"/>
+              </a:spcAft>
+            </a:pPr>
+            <a:r>
+              <a:rPr sz="900" b="1">
+                <a:solidFill>
+                  <a:srgbClr val="8B9CB3"/>
+                </a:solidFill>
+                <a:latin typeface="Calibri"/>
+              </a:rPr>
+              <a:t>SLIDE BUDGET</a:t>
+            </a:r>
+          </a:p>
+          <a:p>
+            <a:pPr algn="l">
+              <a:spcAft>
+                <a:spcPts val="0"/>
+              </a:spcAft>
+            </a:pPr>
+            <a:r>
+              <a:rPr sz="2600" b="1">
+                <a:solidFill>
+                  <a:srgbClr val="D4A853"/>
+                </a:solidFill>
+                <a:latin typeface="Calibri"/>
+              </a:rPr>
+              <a:t>1:15</a:t>
+            </a:r>
+          </a:p>
+          <a:p>
+            <a:pPr algn="l">
+              <a:spcAft>
+                <a:spcPts val="0"/>
+              </a:spcAft>
+            </a:pPr>
+            <a:r>
+              <a:rPr sz="900" b="0">
+                <a:solidFill>
+                  <a:srgbClr val="8B9CB3"/>
+                </a:solidFill>
+                <a:latin typeface="Calibri"/>
+              </a:rPr>
+              <a:t>by end 1:15 · left 8:45</a:t>
+            </a:r>
+          </a:p>
+        </p:txBody>
+      </p:sp>
+      <p:sp>
+        <p:nvSpPr>
+          <p:cNvPr id="20" name="Rounded Rectangle 19"/>
+          <p:cNvSpPr/>
+          <p:nvPr/>
+        </p:nvSpPr>
+        <p:spPr>
+          <a:xfrm>
+            <a:off x="502920" y="5961888"/>
+            <a:ext cx="11155680" cy="109728"/>
+          </a:xfrm>
+          <a:prstGeom prst="roundRect">
+            <a:avLst>
+              <a:gd name="adj" fmla="val 50000"/>
+            </a:avLst>
+          </a:prstGeom>
+          <a:solidFill>
+            <a:srgbClr val="243044"/>
+          </a:solidFill>
+          <a:ln>
+            <a:noFill/>
+          </a:ln>
+        </p:spPr>
+        <p:style>
+          <a:lnRef idx="1">
+            <a:schemeClr val="accent1"/>
+          </a:lnRef>
+          <a:fillRef idx="3">
+            <a:schemeClr val="accent1"/>
+          </a:fillRef>
+          <a:effectRef idx="2">
+            <a:schemeClr val="accent1"/>
+          </a:effectRef>
+          <a:fontRef idx="minor">
+            <a:schemeClr val="lt1"/>
+          </a:fontRef>
+        </p:style>
+        <p:txBody>
+          <a:bodyPr rtlCol="0" anchor="ctr"/>
+          <a:lstStyle/>
+          <a:p>
+            <a:pPr algn="ctr"/>
+          </a:p>
+        </p:txBody>
+      </p:sp>
+      <p:sp>
+        <p:nvSpPr>
+          <p:cNvPr id="21" name="Rounded Rectangle 20"/>
+          <p:cNvSpPr/>
+          <p:nvPr/>
+        </p:nvSpPr>
+        <p:spPr>
+          <a:xfrm>
+            <a:off x="502920" y="5961888"/>
+            <a:ext cx="11155680" cy="109728"/>
+          </a:xfrm>
+          <a:prstGeom prst="roundRect">
+            <a:avLst>
+              <a:gd name="adj" fmla="val 50000"/>
+            </a:avLst>
+          </a:prstGeom>
+          <a:solidFill>
+            <a:srgbClr val="D4A853"/>
+          </a:solidFill>
+          <a:ln>
+            <a:noFill/>
+          </a:ln>
+        </p:spPr>
+        <p:style>
+          <a:lnRef idx="1">
+            <a:schemeClr val="accent1"/>
+          </a:lnRef>
+          <a:fillRef idx="3">
+            <a:schemeClr val="accent1"/>
+          </a:fillRef>
+          <a:effectRef idx="2">
+            <a:schemeClr val="accent1"/>
+          </a:effectRef>
+          <a:fontRef idx="minor">
+            <a:schemeClr val="lt1"/>
+          </a:fontRef>
+        </p:style>
+        <p:txBody>
+          <a:bodyPr rtlCol="0" anchor="ctr"/>
+          <a:lstStyle/>
+          <a:p>
+            <a:pPr algn="ctr"/>
+          </a:p>
+        </p:txBody>
+      </p:sp>
+      <p:sp>
+        <p:nvSpPr>
+          <p:cNvPr id="22" name="TextBox 21"/>
+          <p:cNvSpPr txBox="1"/>
+          <p:nvPr/>
+        </p:nvSpPr>
+        <p:spPr>
+          <a:xfrm>
+            <a:off x="502920" y="5760720"/>
+            <a:ext cx="5029200" cy="201168"/>
+          </a:xfrm>
+          <a:prstGeom prst="rect">
+            <a:avLst/>
+          </a:prstGeom>
+          <a:noFill/>
+        </p:spPr>
+        <p:txBody>
+          <a:bodyPr wrap="none">
+            <a:spAutoFit/>
+          </a:bodyPr>
+          <a:lstStyle/>
+          <a:p>
+            <a:pPr algn="l">
+              <a:spcAft>
+                <a:spcPts val="0"/>
+              </a:spcAft>
+            </a:pPr>
+            <a:r>
+              <a:rPr sz="800" b="0">
+                <a:solidFill>
+                  <a:srgbClr val="8B9CB3"/>
+                </a:solidFill>
+                <a:latin typeface="Calibri"/>
+              </a:rPr>
+              <a:t>Countdown bar starts in Slideshow · does not auto-advance — you click when ready</a:t>
             </a:r>
           </a:p>
         </p:txBody>
@@ -4860,6 +5212,62 @@
   <p:clrMapOvr>
     <a:masterClrMapping/>
   </p:clrMapOvr>
+  <p:timing>
+    <p:tnLst>
+      <p:par>
+        <p:cTn id="1" dur="indefinite" restart="never" nodeType="tmRoot">
+          <p:childTnLst>
+            <p:seq concurrent="1" nextAc="seek">
+              <p:cTn id="2" dur="indefinite" nodeType="mainSeq">
+                <p:childTnLst>
+                  <p:par>
+                    <p:cTn id="3" fill="hold">
+                      <p:stCondLst>
+                        <p:cond delay="0"/>
+                      </p:stCondLst>
+                      <p:childTnLst>
+                        <p:par>
+                          <p:cTn id="4" fill="hold">
+                            <p:stCondLst>
+                              <p:cond delay="0"/>
+                            </p:stCondLst>
+                            <p:childTnLst>
+                              <p:animEffect transition="out" filter="wipe(left)">
+                                <p:cBhvr>
+                                  <p:cTn id="5" dur="75000" fill="hold"/>
+                                  <p:tgtEl>
+                                    <p:spTgt spid="21"/>
+                                  </p:tgtEl>
+                                </p:cBhvr>
+                              </p:animEffect>
+                            </p:childTnLst>
+                          </p:cTn>
+                        </p:par>
+                      </p:childTnLst>
+                    </p:cTn>
+                  </p:par>
+                </p:childTnLst>
+              </p:cTn>
+              <p:prevCondLst>
+                <p:cond evt="onPrev" delay="0">
+                  <p:tgtEl>
+                    <p:sldTgt/>
+                  </p:tgtEl>
+                </p:cond>
+              </p:prevCondLst>
+              <p:nextCondLst>
+                <p:cond evt="onNext" delay="0">
+                  <p:tgtEl>
+                    <p:sldTgt/>
+                  </p:tgtEl>
+                </p:cond>
+              </p:nextCondLst>
+            </p:seq>
+          </p:childTnLst>
+        </p:cTn>
+      </p:par>
+    </p:tnLst>
+  </p:timing>
 </p:sld>
 </file>
 
@@ -4964,7 +5372,7 @@
         <p:spPr>
           <a:xfrm>
             <a:off x="502920" y="438912"/>
-            <a:ext cx="11155680" cy="594360"/>
+            <a:ext cx="8869680" cy="594360"/>
           </a:xfrm>
           <a:prstGeom prst="rect">
             <a:avLst/>
@@ -6041,7 +6449,7 @@
         </p:nvSpPr>
         <p:spPr>
           <a:xfrm>
-            <a:off x="502920" y="6144768"/>
+            <a:off x="502920" y="6199632"/>
             <a:ext cx="1508760" cy="292608"/>
           </a:xfrm>
           <a:prstGeom prst="roundRect">
@@ -6086,7 +6494,7 @@
         </p:nvSpPr>
         <p:spPr>
           <a:xfrm>
-            <a:off x="502920" y="6144768"/>
+            <a:off x="502920" y="6199632"/>
             <a:ext cx="1508760" cy="45720"/>
           </a:xfrm>
           <a:prstGeom prst="rect">
@@ -6129,7 +6537,7 @@
         </p:nvSpPr>
         <p:spPr>
           <a:xfrm>
-            <a:off x="502920" y="6163056"/>
+            <a:off x="502920" y="6217920"/>
             <a:ext cx="1508760" cy="256032"/>
           </a:xfrm>
           <a:prstGeom prst="rect">
@@ -6168,7 +6576,7 @@
         </p:nvSpPr>
         <p:spPr>
           <a:xfrm>
-            <a:off x="2121408" y="6144768"/>
+            <a:off x="2121408" y="6199632"/>
             <a:ext cx="1508760" cy="292608"/>
           </a:xfrm>
           <a:prstGeom prst="roundRect">
@@ -6213,7 +6621,7 @@
         </p:nvSpPr>
         <p:spPr>
           <a:xfrm>
-            <a:off x="2121408" y="6163056"/>
+            <a:off x="2121408" y="6217920"/>
             <a:ext cx="1508760" cy="256032"/>
           </a:xfrm>
           <a:prstGeom prst="rect">
@@ -6252,7 +6660,7 @@
         </p:nvSpPr>
         <p:spPr>
           <a:xfrm>
-            <a:off x="3739896" y="6144768"/>
+            <a:off x="3739896" y="6199632"/>
             <a:ext cx="1508760" cy="292608"/>
           </a:xfrm>
           <a:prstGeom prst="roundRect">
@@ -6297,7 +6705,7 @@
         </p:nvSpPr>
         <p:spPr>
           <a:xfrm>
-            <a:off x="3739896" y="6163056"/>
+            <a:off x="3739896" y="6217920"/>
             <a:ext cx="1508760" cy="256032"/>
           </a:xfrm>
           <a:prstGeom prst="rect">
@@ -6336,7 +6744,7 @@
         </p:nvSpPr>
         <p:spPr>
           <a:xfrm>
-            <a:off x="5358384" y="6144768"/>
+            <a:off x="5358384" y="6199632"/>
             <a:ext cx="1508760" cy="292608"/>
           </a:xfrm>
           <a:prstGeom prst="roundRect">
@@ -6381,7 +6789,7 @@
         </p:nvSpPr>
         <p:spPr>
           <a:xfrm>
-            <a:off x="5358384" y="6163056"/>
+            <a:off x="5358384" y="6217920"/>
             <a:ext cx="1508760" cy="256032"/>
           </a:xfrm>
           <a:prstGeom prst="rect">
@@ -6420,7 +6828,7 @@
         </p:nvSpPr>
         <p:spPr>
           <a:xfrm>
-            <a:off x="6976872" y="6144768"/>
+            <a:off x="6976872" y="6199632"/>
             <a:ext cx="1508760" cy="292608"/>
           </a:xfrm>
           <a:prstGeom prst="roundRect">
@@ -6465,7 +6873,7 @@
         </p:nvSpPr>
         <p:spPr>
           <a:xfrm>
-            <a:off x="6976872" y="6163056"/>
+            <a:off x="6976872" y="6217920"/>
             <a:ext cx="1508760" cy="256032"/>
           </a:xfrm>
           <a:prstGeom prst="rect">
@@ -6504,7 +6912,7 @@
         </p:nvSpPr>
         <p:spPr>
           <a:xfrm>
-            <a:off x="8595360" y="6144768"/>
+            <a:off x="8595360" y="6199632"/>
             <a:ext cx="1508760" cy="292608"/>
           </a:xfrm>
           <a:prstGeom prst="roundRect">
@@ -6549,7 +6957,7 @@
         </p:nvSpPr>
         <p:spPr>
           <a:xfrm>
-            <a:off x="8595360" y="6163056"/>
+            <a:off x="8595360" y="6217920"/>
             <a:ext cx="1508760" cy="256032"/>
           </a:xfrm>
           <a:prstGeom prst="rect">
@@ -6588,7 +6996,7 @@
         </p:nvSpPr>
         <p:spPr>
           <a:xfrm>
-            <a:off x="10213848" y="6144768"/>
+            <a:off x="10213848" y="6199632"/>
             <a:ext cx="1508760" cy="292608"/>
           </a:xfrm>
           <a:prstGeom prst="roundRect">
@@ -6633,7 +7041,7 @@
         </p:nvSpPr>
         <p:spPr>
           <a:xfrm>
-            <a:off x="10213848" y="6163056"/>
+            <a:off x="10213848" y="6217920"/>
             <a:ext cx="1508760" cy="256032"/>
           </a:xfrm>
           <a:prstGeom prst="rect">
@@ -6738,6 +7146,294 @@
                 <a:latin typeface="Calibri"/>
               </a:rPr>
               <a:t>2 / 8</a:t>
+            </a:r>
+          </a:p>
+        </p:txBody>
+      </p:sp>
+      <p:sp>
+        <p:nvSpPr>
+          <p:cNvPr id="41" name="Rounded Rectangle 40"/>
+          <p:cNvSpPr/>
+          <p:nvPr/>
+        </p:nvSpPr>
+        <p:spPr>
+          <a:xfrm>
+            <a:off x="9646920" y="164592"/>
+            <a:ext cx="2331720" cy="868680"/>
+          </a:xfrm>
+          <a:prstGeom prst="roundRect">
+            <a:avLst>
+              <a:gd name="adj" fmla="val 12000"/>
+            </a:avLst>
+          </a:prstGeom>
+          <a:solidFill>
+            <a:srgbClr val="1A2332"/>
+          </a:solidFill>
+          <a:ln>
+            <a:noFill/>
+          </a:ln>
+        </p:spPr>
+        <p:style>
+          <a:lnRef idx="1">
+            <a:schemeClr val="accent1"/>
+          </a:lnRef>
+          <a:fillRef idx="3">
+            <a:schemeClr val="accent1"/>
+          </a:fillRef>
+          <a:effectRef idx="2">
+            <a:schemeClr val="accent1"/>
+          </a:effectRef>
+          <a:fontRef idx="minor">
+            <a:schemeClr val="lt1"/>
+          </a:fontRef>
+        </p:style>
+        <p:txBody>
+          <a:bodyPr rtlCol="0" anchor="ctr"/>
+          <a:lstStyle/>
+          <a:p>
+            <a:pPr algn="ctr"/>
+          </a:p>
+        </p:txBody>
+      </p:sp>
+      <p:sp>
+        <p:nvSpPr>
+          <p:cNvPr id="42" name="Rectangle 41"/>
+          <p:cNvSpPr/>
+          <p:nvPr/>
+        </p:nvSpPr>
+        <p:spPr>
+          <a:xfrm>
+            <a:off x="9646920" y="164592"/>
+            <a:ext cx="73152" cy="868680"/>
+          </a:xfrm>
+          <a:prstGeom prst="rect">
+            <a:avLst/>
+          </a:prstGeom>
+          <a:solidFill>
+            <a:srgbClr val="D4A853"/>
+          </a:solidFill>
+          <a:ln>
+            <a:noFill/>
+          </a:ln>
+        </p:spPr>
+        <p:style>
+          <a:lnRef idx="1">
+            <a:schemeClr val="accent1"/>
+          </a:lnRef>
+          <a:fillRef idx="3">
+            <a:schemeClr val="accent1"/>
+          </a:fillRef>
+          <a:effectRef idx="2">
+            <a:schemeClr val="accent1"/>
+          </a:effectRef>
+          <a:fontRef idx="minor">
+            <a:schemeClr val="lt1"/>
+          </a:fontRef>
+        </p:style>
+        <p:txBody>
+          <a:bodyPr rtlCol="0" anchor="ctr"/>
+          <a:lstStyle/>
+          <a:p>
+            <a:pPr algn="ctr"/>
+          </a:p>
+        </p:txBody>
+      </p:sp>
+      <p:sp>
+        <p:nvSpPr>
+          <p:cNvPr id="43" name="TextBox 42"/>
+          <p:cNvSpPr txBox="1"/>
+          <p:nvPr/>
+        </p:nvSpPr>
+        <p:spPr>
+          <a:xfrm>
+            <a:off x="9811512" y="219456"/>
+            <a:ext cx="2075688" cy="777240"/>
+          </a:xfrm>
+          <a:prstGeom prst="rect">
+            <a:avLst/>
+          </a:prstGeom>
+          <a:noFill/>
+        </p:spPr>
+        <p:txBody>
+          <a:bodyPr wrap="square">
+            <a:spAutoFit/>
+          </a:bodyPr>
+          <a:lstStyle/>
+          <a:p>
+            <a:pPr algn="l">
+              <a:spcAft>
+                <a:spcPts val="0"/>
+              </a:spcAft>
+            </a:pPr>
+            <a:r>
+              <a:rPr sz="900" b="1">
+                <a:solidFill>
+                  <a:srgbClr val="8B9CB3"/>
+                </a:solidFill>
+                <a:latin typeface="Calibri"/>
+              </a:rPr>
+              <a:t>SLIDE BUDGET</a:t>
+            </a:r>
+          </a:p>
+          <a:p>
+            <a:pPr algn="l">
+              <a:spcAft>
+                <a:spcPts val="0"/>
+              </a:spcAft>
+            </a:pPr>
+            <a:r>
+              <a:rPr sz="2600" b="1">
+                <a:solidFill>
+                  <a:srgbClr val="D4A853"/>
+                </a:solidFill>
+                <a:latin typeface="Calibri"/>
+              </a:rPr>
+              <a:t>1:15</a:t>
+            </a:r>
+          </a:p>
+          <a:p>
+            <a:pPr algn="l">
+              <a:spcAft>
+                <a:spcPts val="0"/>
+              </a:spcAft>
+            </a:pPr>
+            <a:r>
+              <a:rPr sz="900" b="0">
+                <a:solidFill>
+                  <a:srgbClr val="8B9CB3"/>
+                </a:solidFill>
+                <a:latin typeface="Calibri"/>
+              </a:rPr>
+              <a:t>by end 2:30 · left 7:30</a:t>
+            </a:r>
+          </a:p>
+        </p:txBody>
+      </p:sp>
+      <p:sp>
+        <p:nvSpPr>
+          <p:cNvPr id="44" name="Rounded Rectangle 43"/>
+          <p:cNvSpPr/>
+          <p:nvPr/>
+        </p:nvSpPr>
+        <p:spPr>
+          <a:xfrm>
+            <a:off x="502920" y="5961888"/>
+            <a:ext cx="11155680" cy="109728"/>
+          </a:xfrm>
+          <a:prstGeom prst="roundRect">
+            <a:avLst>
+              <a:gd name="adj" fmla="val 50000"/>
+            </a:avLst>
+          </a:prstGeom>
+          <a:solidFill>
+            <a:srgbClr val="243044"/>
+          </a:solidFill>
+          <a:ln>
+            <a:noFill/>
+          </a:ln>
+        </p:spPr>
+        <p:style>
+          <a:lnRef idx="1">
+            <a:schemeClr val="accent1"/>
+          </a:lnRef>
+          <a:fillRef idx="3">
+            <a:schemeClr val="accent1"/>
+          </a:fillRef>
+          <a:effectRef idx="2">
+            <a:schemeClr val="accent1"/>
+          </a:effectRef>
+          <a:fontRef idx="minor">
+            <a:schemeClr val="lt1"/>
+          </a:fontRef>
+        </p:style>
+        <p:txBody>
+          <a:bodyPr rtlCol="0" anchor="ctr"/>
+          <a:lstStyle/>
+          <a:p>
+            <a:pPr algn="ctr"/>
+          </a:p>
+        </p:txBody>
+      </p:sp>
+      <p:sp>
+        <p:nvSpPr>
+          <p:cNvPr id="45" name="Rounded Rectangle 44"/>
+          <p:cNvSpPr/>
+          <p:nvPr/>
+        </p:nvSpPr>
+        <p:spPr>
+          <a:xfrm>
+            <a:off x="502920" y="5961888"/>
+            <a:ext cx="11155680" cy="109728"/>
+          </a:xfrm>
+          <a:prstGeom prst="roundRect">
+            <a:avLst>
+              <a:gd name="adj" fmla="val 50000"/>
+            </a:avLst>
+          </a:prstGeom>
+          <a:solidFill>
+            <a:srgbClr val="D4A853"/>
+          </a:solidFill>
+          <a:ln>
+            <a:noFill/>
+          </a:ln>
+        </p:spPr>
+        <p:style>
+          <a:lnRef idx="1">
+            <a:schemeClr val="accent1"/>
+          </a:lnRef>
+          <a:fillRef idx="3">
+            <a:schemeClr val="accent1"/>
+          </a:fillRef>
+          <a:effectRef idx="2">
+            <a:schemeClr val="accent1"/>
+          </a:effectRef>
+          <a:fontRef idx="minor">
+            <a:schemeClr val="lt1"/>
+          </a:fontRef>
+        </p:style>
+        <p:txBody>
+          <a:bodyPr rtlCol="0" anchor="ctr"/>
+          <a:lstStyle/>
+          <a:p>
+            <a:pPr algn="ctr"/>
+          </a:p>
+        </p:txBody>
+      </p:sp>
+      <p:sp>
+        <p:nvSpPr>
+          <p:cNvPr id="46" name="TextBox 45"/>
+          <p:cNvSpPr txBox="1"/>
+          <p:nvPr/>
+        </p:nvSpPr>
+        <p:spPr>
+          <a:xfrm>
+            <a:off x="502920" y="5760720"/>
+            <a:ext cx="5029200" cy="201168"/>
+          </a:xfrm>
+          <a:prstGeom prst="rect">
+            <a:avLst/>
+          </a:prstGeom>
+          <a:noFill/>
+        </p:spPr>
+        <p:txBody>
+          <a:bodyPr wrap="none">
+            <a:spAutoFit/>
+          </a:bodyPr>
+          <a:lstStyle/>
+          <a:p>
+            <a:pPr algn="l">
+              <a:spcAft>
+                <a:spcPts val="0"/>
+              </a:spcAft>
+            </a:pPr>
+            <a:r>
+              <a:rPr sz="800" b="0">
+                <a:solidFill>
+                  <a:srgbClr val="8B9CB3"/>
+                </a:solidFill>
+                <a:latin typeface="Calibri"/>
+              </a:rPr>
+              <a:t>Countdown bar starts in Slideshow · does not auto-advance — you click when ready</a:t>
             </a:r>
           </a:p>
         </p:txBody>
@@ -6747,6 +7443,62 @@
   <p:clrMapOvr>
     <a:masterClrMapping/>
   </p:clrMapOvr>
+  <p:timing>
+    <p:tnLst>
+      <p:par>
+        <p:cTn id="1" dur="indefinite" restart="never" nodeType="tmRoot">
+          <p:childTnLst>
+            <p:seq concurrent="1" nextAc="seek">
+              <p:cTn id="2" dur="indefinite" nodeType="mainSeq">
+                <p:childTnLst>
+                  <p:par>
+                    <p:cTn id="3" fill="hold">
+                      <p:stCondLst>
+                        <p:cond delay="0"/>
+                      </p:stCondLst>
+                      <p:childTnLst>
+                        <p:par>
+                          <p:cTn id="4" fill="hold">
+                            <p:stCondLst>
+                              <p:cond delay="0"/>
+                            </p:stCondLst>
+                            <p:childTnLst>
+                              <p:animEffect transition="out" filter="wipe(left)">
+                                <p:cBhvr>
+                                  <p:cTn id="5" dur="75000" fill="hold"/>
+                                  <p:tgtEl>
+                                    <p:spTgt spid="45"/>
+                                  </p:tgtEl>
+                                </p:cBhvr>
+                              </p:animEffect>
+                            </p:childTnLst>
+                          </p:cTn>
+                        </p:par>
+                      </p:childTnLst>
+                    </p:cTn>
+                  </p:par>
+                </p:childTnLst>
+              </p:cTn>
+              <p:prevCondLst>
+                <p:cond evt="onPrev" delay="0">
+                  <p:tgtEl>
+                    <p:sldTgt/>
+                  </p:tgtEl>
+                </p:cond>
+              </p:prevCondLst>
+              <p:nextCondLst>
+                <p:cond evt="onNext" delay="0">
+                  <p:tgtEl>
+                    <p:sldTgt/>
+                  </p:tgtEl>
+                </p:cond>
+              </p:nextCondLst>
+            </p:seq>
+          </p:childTnLst>
+        </p:cTn>
+      </p:par>
+    </p:tnLst>
+  </p:timing>
 </p:sld>
 </file>
 
@@ -6851,7 +7603,7 @@
         <p:spPr>
           <a:xfrm>
             <a:off x="502920" y="438912"/>
-            <a:ext cx="11155680" cy="594360"/>
+            <a:ext cx="8869680" cy="594360"/>
           </a:xfrm>
           <a:prstGeom prst="rect">
             <a:avLst/>
@@ -7619,7 +8371,7 @@
         </p:nvSpPr>
         <p:spPr>
           <a:xfrm>
-            <a:off x="502920" y="6144768"/>
+            <a:off x="502920" y="6199632"/>
             <a:ext cx="1508760" cy="292608"/>
           </a:xfrm>
           <a:prstGeom prst="roundRect">
@@ -7664,7 +8416,7 @@
         </p:nvSpPr>
         <p:spPr>
           <a:xfrm>
-            <a:off x="502920" y="6163056"/>
+            <a:off x="502920" y="6217920"/>
             <a:ext cx="1508760" cy="256032"/>
           </a:xfrm>
           <a:prstGeom prst="rect">
@@ -7703,7 +8455,7 @@
         </p:nvSpPr>
         <p:spPr>
           <a:xfrm>
-            <a:off x="2121408" y="6144768"/>
+            <a:off x="2121408" y="6199632"/>
             <a:ext cx="1508760" cy="292608"/>
           </a:xfrm>
           <a:prstGeom prst="roundRect">
@@ -7748,7 +8500,7 @@
         </p:nvSpPr>
         <p:spPr>
           <a:xfrm>
-            <a:off x="2121408" y="6144768"/>
+            <a:off x="2121408" y="6199632"/>
             <a:ext cx="1508760" cy="45720"/>
           </a:xfrm>
           <a:prstGeom prst="rect">
@@ -7791,7 +8543,7 @@
         </p:nvSpPr>
         <p:spPr>
           <a:xfrm>
-            <a:off x="2121408" y="6163056"/>
+            <a:off x="2121408" y="6217920"/>
             <a:ext cx="1508760" cy="256032"/>
           </a:xfrm>
           <a:prstGeom prst="rect">
@@ -7830,7 +8582,7 @@
         </p:nvSpPr>
         <p:spPr>
           <a:xfrm>
-            <a:off x="3739896" y="6144768"/>
+            <a:off x="3739896" y="6199632"/>
             <a:ext cx="1508760" cy="292608"/>
           </a:xfrm>
           <a:prstGeom prst="roundRect">
@@ -7875,7 +8627,7 @@
         </p:nvSpPr>
         <p:spPr>
           <a:xfrm>
-            <a:off x="3739896" y="6163056"/>
+            <a:off x="3739896" y="6217920"/>
             <a:ext cx="1508760" cy="256032"/>
           </a:xfrm>
           <a:prstGeom prst="rect">
@@ -7914,7 +8666,7 @@
         </p:nvSpPr>
         <p:spPr>
           <a:xfrm>
-            <a:off x="5358384" y="6144768"/>
+            <a:off x="5358384" y="6199632"/>
             <a:ext cx="1508760" cy="292608"/>
           </a:xfrm>
           <a:prstGeom prst="roundRect">
@@ -7959,7 +8711,7 @@
         </p:nvSpPr>
         <p:spPr>
           <a:xfrm>
-            <a:off x="5358384" y="6163056"/>
+            <a:off x="5358384" y="6217920"/>
             <a:ext cx="1508760" cy="256032"/>
           </a:xfrm>
           <a:prstGeom prst="rect">
@@ -7998,7 +8750,7 @@
         </p:nvSpPr>
         <p:spPr>
           <a:xfrm>
-            <a:off x="6976872" y="6144768"/>
+            <a:off x="6976872" y="6199632"/>
             <a:ext cx="1508760" cy="292608"/>
           </a:xfrm>
           <a:prstGeom prst="roundRect">
@@ -8043,7 +8795,7 @@
         </p:nvSpPr>
         <p:spPr>
           <a:xfrm>
-            <a:off x="6976872" y="6163056"/>
+            <a:off x="6976872" y="6217920"/>
             <a:ext cx="1508760" cy="256032"/>
           </a:xfrm>
           <a:prstGeom prst="rect">
@@ -8082,7 +8834,7 @@
         </p:nvSpPr>
         <p:spPr>
           <a:xfrm>
-            <a:off x="8595360" y="6144768"/>
+            <a:off x="8595360" y="6199632"/>
             <a:ext cx="1508760" cy="292608"/>
           </a:xfrm>
           <a:prstGeom prst="roundRect">
@@ -8127,7 +8879,7 @@
         </p:nvSpPr>
         <p:spPr>
           <a:xfrm>
-            <a:off x="8595360" y="6163056"/>
+            <a:off x="8595360" y="6217920"/>
             <a:ext cx="1508760" cy="256032"/>
           </a:xfrm>
           <a:prstGeom prst="rect">
@@ -8166,7 +8918,7 @@
         </p:nvSpPr>
         <p:spPr>
           <a:xfrm>
-            <a:off x="10213848" y="6144768"/>
+            <a:off x="10213848" y="6199632"/>
             <a:ext cx="1508760" cy="292608"/>
           </a:xfrm>
           <a:prstGeom prst="roundRect">
@@ -8211,7 +8963,7 @@
         </p:nvSpPr>
         <p:spPr>
           <a:xfrm>
-            <a:off x="10213848" y="6163056"/>
+            <a:off x="10213848" y="6217920"/>
             <a:ext cx="1508760" cy="256032"/>
           </a:xfrm>
           <a:prstGeom prst="rect">
@@ -8316,6 +9068,294 @@
                 <a:latin typeface="Calibri"/>
               </a:rPr>
               <a:t>3 / 8</a:t>
+            </a:r>
+          </a:p>
+        </p:txBody>
+      </p:sp>
+      <p:sp>
+        <p:nvSpPr>
+          <p:cNvPr id="36" name="Rounded Rectangle 35"/>
+          <p:cNvSpPr/>
+          <p:nvPr/>
+        </p:nvSpPr>
+        <p:spPr>
+          <a:xfrm>
+            <a:off x="9646920" y="164592"/>
+            <a:ext cx="2331720" cy="868680"/>
+          </a:xfrm>
+          <a:prstGeom prst="roundRect">
+            <a:avLst>
+              <a:gd name="adj" fmla="val 12000"/>
+            </a:avLst>
+          </a:prstGeom>
+          <a:solidFill>
+            <a:srgbClr val="1A2332"/>
+          </a:solidFill>
+          <a:ln>
+            <a:noFill/>
+          </a:ln>
+        </p:spPr>
+        <p:style>
+          <a:lnRef idx="1">
+            <a:schemeClr val="accent1"/>
+          </a:lnRef>
+          <a:fillRef idx="3">
+            <a:schemeClr val="accent1"/>
+          </a:fillRef>
+          <a:effectRef idx="2">
+            <a:schemeClr val="accent1"/>
+          </a:effectRef>
+          <a:fontRef idx="minor">
+            <a:schemeClr val="lt1"/>
+          </a:fontRef>
+        </p:style>
+        <p:txBody>
+          <a:bodyPr rtlCol="0" anchor="ctr"/>
+          <a:lstStyle/>
+          <a:p>
+            <a:pPr algn="ctr"/>
+          </a:p>
+        </p:txBody>
+      </p:sp>
+      <p:sp>
+        <p:nvSpPr>
+          <p:cNvPr id="37" name="Rectangle 36"/>
+          <p:cNvSpPr/>
+          <p:nvPr/>
+        </p:nvSpPr>
+        <p:spPr>
+          <a:xfrm>
+            <a:off x="9646920" y="164592"/>
+            <a:ext cx="73152" cy="868680"/>
+          </a:xfrm>
+          <a:prstGeom prst="rect">
+            <a:avLst/>
+          </a:prstGeom>
+          <a:solidFill>
+            <a:srgbClr val="D4A853"/>
+          </a:solidFill>
+          <a:ln>
+            <a:noFill/>
+          </a:ln>
+        </p:spPr>
+        <p:style>
+          <a:lnRef idx="1">
+            <a:schemeClr val="accent1"/>
+          </a:lnRef>
+          <a:fillRef idx="3">
+            <a:schemeClr val="accent1"/>
+          </a:fillRef>
+          <a:effectRef idx="2">
+            <a:schemeClr val="accent1"/>
+          </a:effectRef>
+          <a:fontRef idx="minor">
+            <a:schemeClr val="lt1"/>
+          </a:fontRef>
+        </p:style>
+        <p:txBody>
+          <a:bodyPr rtlCol="0" anchor="ctr"/>
+          <a:lstStyle/>
+          <a:p>
+            <a:pPr algn="ctr"/>
+          </a:p>
+        </p:txBody>
+      </p:sp>
+      <p:sp>
+        <p:nvSpPr>
+          <p:cNvPr id="38" name="TextBox 37"/>
+          <p:cNvSpPr txBox="1"/>
+          <p:nvPr/>
+        </p:nvSpPr>
+        <p:spPr>
+          <a:xfrm>
+            <a:off x="9811512" y="219456"/>
+            <a:ext cx="2075688" cy="777240"/>
+          </a:xfrm>
+          <a:prstGeom prst="rect">
+            <a:avLst/>
+          </a:prstGeom>
+          <a:noFill/>
+        </p:spPr>
+        <p:txBody>
+          <a:bodyPr wrap="square">
+            <a:spAutoFit/>
+          </a:bodyPr>
+          <a:lstStyle/>
+          <a:p>
+            <a:pPr algn="l">
+              <a:spcAft>
+                <a:spcPts val="0"/>
+              </a:spcAft>
+            </a:pPr>
+            <a:r>
+              <a:rPr sz="900" b="1">
+                <a:solidFill>
+                  <a:srgbClr val="8B9CB3"/>
+                </a:solidFill>
+                <a:latin typeface="Calibri"/>
+              </a:rPr>
+              <a:t>SLIDE BUDGET</a:t>
+            </a:r>
+          </a:p>
+          <a:p>
+            <a:pPr algn="l">
+              <a:spcAft>
+                <a:spcPts val="0"/>
+              </a:spcAft>
+            </a:pPr>
+            <a:r>
+              <a:rPr sz="2600" b="1">
+                <a:solidFill>
+                  <a:srgbClr val="D4A853"/>
+                </a:solidFill>
+                <a:latin typeface="Calibri"/>
+              </a:rPr>
+              <a:t>1:15</a:t>
+            </a:r>
+          </a:p>
+          <a:p>
+            <a:pPr algn="l">
+              <a:spcAft>
+                <a:spcPts val="0"/>
+              </a:spcAft>
+            </a:pPr>
+            <a:r>
+              <a:rPr sz="900" b="0">
+                <a:solidFill>
+                  <a:srgbClr val="8B9CB3"/>
+                </a:solidFill>
+                <a:latin typeface="Calibri"/>
+              </a:rPr>
+              <a:t>by end 3:45 · left 6:15</a:t>
+            </a:r>
+          </a:p>
+        </p:txBody>
+      </p:sp>
+      <p:sp>
+        <p:nvSpPr>
+          <p:cNvPr id="39" name="Rounded Rectangle 38"/>
+          <p:cNvSpPr/>
+          <p:nvPr/>
+        </p:nvSpPr>
+        <p:spPr>
+          <a:xfrm>
+            <a:off x="502920" y="5961888"/>
+            <a:ext cx="11155680" cy="109728"/>
+          </a:xfrm>
+          <a:prstGeom prst="roundRect">
+            <a:avLst>
+              <a:gd name="adj" fmla="val 50000"/>
+            </a:avLst>
+          </a:prstGeom>
+          <a:solidFill>
+            <a:srgbClr val="243044"/>
+          </a:solidFill>
+          <a:ln>
+            <a:noFill/>
+          </a:ln>
+        </p:spPr>
+        <p:style>
+          <a:lnRef idx="1">
+            <a:schemeClr val="accent1"/>
+          </a:lnRef>
+          <a:fillRef idx="3">
+            <a:schemeClr val="accent1"/>
+          </a:fillRef>
+          <a:effectRef idx="2">
+            <a:schemeClr val="accent1"/>
+          </a:effectRef>
+          <a:fontRef idx="minor">
+            <a:schemeClr val="lt1"/>
+          </a:fontRef>
+        </p:style>
+        <p:txBody>
+          <a:bodyPr rtlCol="0" anchor="ctr"/>
+          <a:lstStyle/>
+          <a:p>
+            <a:pPr algn="ctr"/>
+          </a:p>
+        </p:txBody>
+      </p:sp>
+      <p:sp>
+        <p:nvSpPr>
+          <p:cNvPr id="40" name="Rounded Rectangle 39"/>
+          <p:cNvSpPr/>
+          <p:nvPr/>
+        </p:nvSpPr>
+        <p:spPr>
+          <a:xfrm>
+            <a:off x="502920" y="5961888"/>
+            <a:ext cx="11155680" cy="109728"/>
+          </a:xfrm>
+          <a:prstGeom prst="roundRect">
+            <a:avLst>
+              <a:gd name="adj" fmla="val 50000"/>
+            </a:avLst>
+          </a:prstGeom>
+          <a:solidFill>
+            <a:srgbClr val="D4A853"/>
+          </a:solidFill>
+          <a:ln>
+            <a:noFill/>
+          </a:ln>
+        </p:spPr>
+        <p:style>
+          <a:lnRef idx="1">
+            <a:schemeClr val="accent1"/>
+          </a:lnRef>
+          <a:fillRef idx="3">
+            <a:schemeClr val="accent1"/>
+          </a:fillRef>
+          <a:effectRef idx="2">
+            <a:schemeClr val="accent1"/>
+          </a:effectRef>
+          <a:fontRef idx="minor">
+            <a:schemeClr val="lt1"/>
+          </a:fontRef>
+        </p:style>
+        <p:txBody>
+          <a:bodyPr rtlCol="0" anchor="ctr"/>
+          <a:lstStyle/>
+          <a:p>
+            <a:pPr algn="ctr"/>
+          </a:p>
+        </p:txBody>
+      </p:sp>
+      <p:sp>
+        <p:nvSpPr>
+          <p:cNvPr id="41" name="TextBox 40"/>
+          <p:cNvSpPr txBox="1"/>
+          <p:nvPr/>
+        </p:nvSpPr>
+        <p:spPr>
+          <a:xfrm>
+            <a:off x="502920" y="5760720"/>
+            <a:ext cx="5029200" cy="201168"/>
+          </a:xfrm>
+          <a:prstGeom prst="rect">
+            <a:avLst/>
+          </a:prstGeom>
+          <a:noFill/>
+        </p:spPr>
+        <p:txBody>
+          <a:bodyPr wrap="none">
+            <a:spAutoFit/>
+          </a:bodyPr>
+          <a:lstStyle/>
+          <a:p>
+            <a:pPr algn="l">
+              <a:spcAft>
+                <a:spcPts val="0"/>
+              </a:spcAft>
+            </a:pPr>
+            <a:r>
+              <a:rPr sz="800" b="0">
+                <a:solidFill>
+                  <a:srgbClr val="8B9CB3"/>
+                </a:solidFill>
+                <a:latin typeface="Calibri"/>
+              </a:rPr>
+              <a:t>Countdown bar starts in Slideshow · does not auto-advance — you click when ready</a:t>
             </a:r>
           </a:p>
         </p:txBody>
@@ -8325,6 +9365,62 @@
   <p:clrMapOvr>
     <a:masterClrMapping/>
   </p:clrMapOvr>
+  <p:timing>
+    <p:tnLst>
+      <p:par>
+        <p:cTn id="1" dur="indefinite" restart="never" nodeType="tmRoot">
+          <p:childTnLst>
+            <p:seq concurrent="1" nextAc="seek">
+              <p:cTn id="2" dur="indefinite" nodeType="mainSeq">
+                <p:childTnLst>
+                  <p:par>
+                    <p:cTn id="3" fill="hold">
+                      <p:stCondLst>
+                        <p:cond delay="0"/>
+                      </p:stCondLst>
+                      <p:childTnLst>
+                        <p:par>
+                          <p:cTn id="4" fill="hold">
+                            <p:stCondLst>
+                              <p:cond delay="0"/>
+                            </p:stCondLst>
+                            <p:childTnLst>
+                              <p:animEffect transition="out" filter="wipe(left)">
+                                <p:cBhvr>
+                                  <p:cTn id="5" dur="75000" fill="hold"/>
+                                  <p:tgtEl>
+                                    <p:spTgt spid="40"/>
+                                  </p:tgtEl>
+                                </p:cBhvr>
+                              </p:animEffect>
+                            </p:childTnLst>
+                          </p:cTn>
+                        </p:par>
+                      </p:childTnLst>
+                    </p:cTn>
+                  </p:par>
+                </p:childTnLst>
+              </p:cTn>
+              <p:prevCondLst>
+                <p:cond evt="onPrev" delay="0">
+                  <p:tgtEl>
+                    <p:sldTgt/>
+                  </p:tgtEl>
+                </p:cond>
+              </p:prevCondLst>
+              <p:nextCondLst>
+                <p:cond evt="onNext" delay="0">
+                  <p:tgtEl>
+                    <p:sldTgt/>
+                  </p:tgtEl>
+                </p:cond>
+              </p:nextCondLst>
+            </p:seq>
+          </p:childTnLst>
+        </p:cTn>
+      </p:par>
+    </p:tnLst>
+  </p:timing>
 </p:sld>
 </file>
 
@@ -8429,7 +9525,7 @@
         <p:spPr>
           <a:xfrm>
             <a:off x="502920" y="438912"/>
-            <a:ext cx="11155680" cy="594360"/>
+            <a:ext cx="8869680" cy="594360"/>
           </a:xfrm>
           <a:prstGeom prst="rect">
             <a:avLst/>
@@ -8993,7 +10089,7 @@
         </p:nvSpPr>
         <p:spPr>
           <a:xfrm>
-            <a:off x="502920" y="6144768"/>
+            <a:off x="502920" y="6199632"/>
             <a:ext cx="1508760" cy="292608"/>
           </a:xfrm>
           <a:prstGeom prst="roundRect">
@@ -9038,7 +10134,7 @@
         </p:nvSpPr>
         <p:spPr>
           <a:xfrm>
-            <a:off x="502920" y="6163056"/>
+            <a:off x="502920" y="6217920"/>
             <a:ext cx="1508760" cy="256032"/>
           </a:xfrm>
           <a:prstGeom prst="rect">
@@ -9077,7 +10173,7 @@
         </p:nvSpPr>
         <p:spPr>
           <a:xfrm>
-            <a:off x="2121408" y="6144768"/>
+            <a:off x="2121408" y="6199632"/>
             <a:ext cx="1508760" cy="292608"/>
           </a:xfrm>
           <a:prstGeom prst="roundRect">
@@ -9122,7 +10218,7 @@
         </p:nvSpPr>
         <p:spPr>
           <a:xfrm>
-            <a:off x="2121408" y="6163056"/>
+            <a:off x="2121408" y="6217920"/>
             <a:ext cx="1508760" cy="256032"/>
           </a:xfrm>
           <a:prstGeom prst="rect">
@@ -9161,7 +10257,7 @@
         </p:nvSpPr>
         <p:spPr>
           <a:xfrm>
-            <a:off x="3739896" y="6144768"/>
+            <a:off x="3739896" y="6199632"/>
             <a:ext cx="1508760" cy="292608"/>
           </a:xfrm>
           <a:prstGeom prst="roundRect">
@@ -9206,7 +10302,7 @@
         </p:nvSpPr>
         <p:spPr>
           <a:xfrm>
-            <a:off x="3739896" y="6144768"/>
+            <a:off x="3739896" y="6199632"/>
             <a:ext cx="1508760" cy="45720"/>
           </a:xfrm>
           <a:prstGeom prst="rect">
@@ -9249,7 +10345,7 @@
         </p:nvSpPr>
         <p:spPr>
           <a:xfrm>
-            <a:off x="3739896" y="6163056"/>
+            <a:off x="3739896" y="6217920"/>
             <a:ext cx="1508760" cy="256032"/>
           </a:xfrm>
           <a:prstGeom prst="rect">
@@ -9288,7 +10384,7 @@
         </p:nvSpPr>
         <p:spPr>
           <a:xfrm>
-            <a:off x="5358384" y="6144768"/>
+            <a:off x="5358384" y="6199632"/>
             <a:ext cx="1508760" cy="292608"/>
           </a:xfrm>
           <a:prstGeom prst="roundRect">
@@ -9333,7 +10429,7 @@
         </p:nvSpPr>
         <p:spPr>
           <a:xfrm>
-            <a:off x="5358384" y="6163056"/>
+            <a:off x="5358384" y="6217920"/>
             <a:ext cx="1508760" cy="256032"/>
           </a:xfrm>
           <a:prstGeom prst="rect">
@@ -9372,7 +10468,7 @@
         </p:nvSpPr>
         <p:spPr>
           <a:xfrm>
-            <a:off x="6976872" y="6144768"/>
+            <a:off x="6976872" y="6199632"/>
             <a:ext cx="1508760" cy="292608"/>
           </a:xfrm>
           <a:prstGeom prst="roundRect">
@@ -9417,7 +10513,7 @@
         </p:nvSpPr>
         <p:spPr>
           <a:xfrm>
-            <a:off x="6976872" y="6163056"/>
+            <a:off x="6976872" y="6217920"/>
             <a:ext cx="1508760" cy="256032"/>
           </a:xfrm>
           <a:prstGeom prst="rect">
@@ -9456,7 +10552,7 @@
         </p:nvSpPr>
         <p:spPr>
           <a:xfrm>
-            <a:off x="8595360" y="6144768"/>
+            <a:off x="8595360" y="6199632"/>
             <a:ext cx="1508760" cy="292608"/>
           </a:xfrm>
           <a:prstGeom prst="roundRect">
@@ -9501,7 +10597,7 @@
         </p:nvSpPr>
         <p:spPr>
           <a:xfrm>
-            <a:off x="8595360" y="6163056"/>
+            <a:off x="8595360" y="6217920"/>
             <a:ext cx="1508760" cy="256032"/>
           </a:xfrm>
           <a:prstGeom prst="rect">
@@ -9540,7 +10636,7 @@
         </p:nvSpPr>
         <p:spPr>
           <a:xfrm>
-            <a:off x="10213848" y="6144768"/>
+            <a:off x="10213848" y="6199632"/>
             <a:ext cx="1508760" cy="292608"/>
           </a:xfrm>
           <a:prstGeom prst="roundRect">
@@ -9585,7 +10681,7 @@
         </p:nvSpPr>
         <p:spPr>
           <a:xfrm>
-            <a:off x="10213848" y="6163056"/>
+            <a:off x="10213848" y="6217920"/>
             <a:ext cx="1508760" cy="256032"/>
           </a:xfrm>
           <a:prstGeom prst="rect">
@@ -9690,6 +10786,294 @@
                 <a:latin typeface="Calibri"/>
               </a:rPr>
               <a:t>4 / 8</a:t>
+            </a:r>
+          </a:p>
+        </p:txBody>
+      </p:sp>
+      <p:sp>
+        <p:nvSpPr>
+          <p:cNvPr id="30" name="Rounded Rectangle 29"/>
+          <p:cNvSpPr/>
+          <p:nvPr/>
+        </p:nvSpPr>
+        <p:spPr>
+          <a:xfrm>
+            <a:off x="9646920" y="164592"/>
+            <a:ext cx="2331720" cy="868680"/>
+          </a:xfrm>
+          <a:prstGeom prst="roundRect">
+            <a:avLst>
+              <a:gd name="adj" fmla="val 12000"/>
+            </a:avLst>
+          </a:prstGeom>
+          <a:solidFill>
+            <a:srgbClr val="1A2332"/>
+          </a:solidFill>
+          <a:ln>
+            <a:noFill/>
+          </a:ln>
+        </p:spPr>
+        <p:style>
+          <a:lnRef idx="1">
+            <a:schemeClr val="accent1"/>
+          </a:lnRef>
+          <a:fillRef idx="3">
+            <a:schemeClr val="accent1"/>
+          </a:fillRef>
+          <a:effectRef idx="2">
+            <a:schemeClr val="accent1"/>
+          </a:effectRef>
+          <a:fontRef idx="minor">
+            <a:schemeClr val="lt1"/>
+          </a:fontRef>
+        </p:style>
+        <p:txBody>
+          <a:bodyPr rtlCol="0" anchor="ctr"/>
+          <a:lstStyle/>
+          <a:p>
+            <a:pPr algn="ctr"/>
+          </a:p>
+        </p:txBody>
+      </p:sp>
+      <p:sp>
+        <p:nvSpPr>
+          <p:cNvPr id="31" name="Rectangle 30"/>
+          <p:cNvSpPr/>
+          <p:nvPr/>
+        </p:nvSpPr>
+        <p:spPr>
+          <a:xfrm>
+            <a:off x="9646920" y="164592"/>
+            <a:ext cx="73152" cy="868680"/>
+          </a:xfrm>
+          <a:prstGeom prst="rect">
+            <a:avLst/>
+          </a:prstGeom>
+          <a:solidFill>
+            <a:srgbClr val="D4A853"/>
+          </a:solidFill>
+          <a:ln>
+            <a:noFill/>
+          </a:ln>
+        </p:spPr>
+        <p:style>
+          <a:lnRef idx="1">
+            <a:schemeClr val="accent1"/>
+          </a:lnRef>
+          <a:fillRef idx="3">
+            <a:schemeClr val="accent1"/>
+          </a:fillRef>
+          <a:effectRef idx="2">
+            <a:schemeClr val="accent1"/>
+          </a:effectRef>
+          <a:fontRef idx="minor">
+            <a:schemeClr val="lt1"/>
+          </a:fontRef>
+        </p:style>
+        <p:txBody>
+          <a:bodyPr rtlCol="0" anchor="ctr"/>
+          <a:lstStyle/>
+          <a:p>
+            <a:pPr algn="ctr"/>
+          </a:p>
+        </p:txBody>
+      </p:sp>
+      <p:sp>
+        <p:nvSpPr>
+          <p:cNvPr id="32" name="TextBox 31"/>
+          <p:cNvSpPr txBox="1"/>
+          <p:nvPr/>
+        </p:nvSpPr>
+        <p:spPr>
+          <a:xfrm>
+            <a:off x="9811512" y="219456"/>
+            <a:ext cx="2075688" cy="777240"/>
+          </a:xfrm>
+          <a:prstGeom prst="rect">
+            <a:avLst/>
+          </a:prstGeom>
+          <a:noFill/>
+        </p:spPr>
+        <p:txBody>
+          <a:bodyPr wrap="square">
+            <a:spAutoFit/>
+          </a:bodyPr>
+          <a:lstStyle/>
+          <a:p>
+            <a:pPr algn="l">
+              <a:spcAft>
+                <a:spcPts val="0"/>
+              </a:spcAft>
+            </a:pPr>
+            <a:r>
+              <a:rPr sz="900" b="1">
+                <a:solidFill>
+                  <a:srgbClr val="8B9CB3"/>
+                </a:solidFill>
+                <a:latin typeface="Calibri"/>
+              </a:rPr>
+              <a:t>SLIDE BUDGET</a:t>
+            </a:r>
+          </a:p>
+          <a:p>
+            <a:pPr algn="l">
+              <a:spcAft>
+                <a:spcPts val="0"/>
+              </a:spcAft>
+            </a:pPr>
+            <a:r>
+              <a:rPr sz="2600" b="1">
+                <a:solidFill>
+                  <a:srgbClr val="D4A853"/>
+                </a:solidFill>
+                <a:latin typeface="Calibri"/>
+              </a:rPr>
+              <a:t>1:15</a:t>
+            </a:r>
+          </a:p>
+          <a:p>
+            <a:pPr algn="l">
+              <a:spcAft>
+                <a:spcPts val="0"/>
+              </a:spcAft>
+            </a:pPr>
+            <a:r>
+              <a:rPr sz="900" b="0">
+                <a:solidFill>
+                  <a:srgbClr val="8B9CB3"/>
+                </a:solidFill>
+                <a:latin typeface="Calibri"/>
+              </a:rPr>
+              <a:t>by end 5:00 · left 5:00</a:t>
+            </a:r>
+          </a:p>
+        </p:txBody>
+      </p:sp>
+      <p:sp>
+        <p:nvSpPr>
+          <p:cNvPr id="33" name="Rounded Rectangle 32"/>
+          <p:cNvSpPr/>
+          <p:nvPr/>
+        </p:nvSpPr>
+        <p:spPr>
+          <a:xfrm>
+            <a:off x="502920" y="5961888"/>
+            <a:ext cx="11155680" cy="109728"/>
+          </a:xfrm>
+          <a:prstGeom prst="roundRect">
+            <a:avLst>
+              <a:gd name="adj" fmla="val 50000"/>
+            </a:avLst>
+          </a:prstGeom>
+          <a:solidFill>
+            <a:srgbClr val="243044"/>
+          </a:solidFill>
+          <a:ln>
+            <a:noFill/>
+          </a:ln>
+        </p:spPr>
+        <p:style>
+          <a:lnRef idx="1">
+            <a:schemeClr val="accent1"/>
+          </a:lnRef>
+          <a:fillRef idx="3">
+            <a:schemeClr val="accent1"/>
+          </a:fillRef>
+          <a:effectRef idx="2">
+            <a:schemeClr val="accent1"/>
+          </a:effectRef>
+          <a:fontRef idx="minor">
+            <a:schemeClr val="lt1"/>
+          </a:fontRef>
+        </p:style>
+        <p:txBody>
+          <a:bodyPr rtlCol="0" anchor="ctr"/>
+          <a:lstStyle/>
+          <a:p>
+            <a:pPr algn="ctr"/>
+          </a:p>
+        </p:txBody>
+      </p:sp>
+      <p:sp>
+        <p:nvSpPr>
+          <p:cNvPr id="34" name="Rounded Rectangle 33"/>
+          <p:cNvSpPr/>
+          <p:nvPr/>
+        </p:nvSpPr>
+        <p:spPr>
+          <a:xfrm>
+            <a:off x="502920" y="5961888"/>
+            <a:ext cx="11155680" cy="109728"/>
+          </a:xfrm>
+          <a:prstGeom prst="roundRect">
+            <a:avLst>
+              <a:gd name="adj" fmla="val 50000"/>
+            </a:avLst>
+          </a:prstGeom>
+          <a:solidFill>
+            <a:srgbClr val="D4A853"/>
+          </a:solidFill>
+          <a:ln>
+            <a:noFill/>
+          </a:ln>
+        </p:spPr>
+        <p:style>
+          <a:lnRef idx="1">
+            <a:schemeClr val="accent1"/>
+          </a:lnRef>
+          <a:fillRef idx="3">
+            <a:schemeClr val="accent1"/>
+          </a:fillRef>
+          <a:effectRef idx="2">
+            <a:schemeClr val="accent1"/>
+          </a:effectRef>
+          <a:fontRef idx="minor">
+            <a:schemeClr val="lt1"/>
+          </a:fontRef>
+        </p:style>
+        <p:txBody>
+          <a:bodyPr rtlCol="0" anchor="ctr"/>
+          <a:lstStyle/>
+          <a:p>
+            <a:pPr algn="ctr"/>
+          </a:p>
+        </p:txBody>
+      </p:sp>
+      <p:sp>
+        <p:nvSpPr>
+          <p:cNvPr id="35" name="TextBox 34"/>
+          <p:cNvSpPr txBox="1"/>
+          <p:nvPr/>
+        </p:nvSpPr>
+        <p:spPr>
+          <a:xfrm>
+            <a:off x="502920" y="5760720"/>
+            <a:ext cx="5029200" cy="201168"/>
+          </a:xfrm>
+          <a:prstGeom prst="rect">
+            <a:avLst/>
+          </a:prstGeom>
+          <a:noFill/>
+        </p:spPr>
+        <p:txBody>
+          <a:bodyPr wrap="none">
+            <a:spAutoFit/>
+          </a:bodyPr>
+          <a:lstStyle/>
+          <a:p>
+            <a:pPr algn="l">
+              <a:spcAft>
+                <a:spcPts val="0"/>
+              </a:spcAft>
+            </a:pPr>
+            <a:r>
+              <a:rPr sz="800" b="0">
+                <a:solidFill>
+                  <a:srgbClr val="8B9CB3"/>
+                </a:solidFill>
+                <a:latin typeface="Calibri"/>
+              </a:rPr>
+              <a:t>Countdown bar starts in Slideshow · does not auto-advance — you click when ready</a:t>
             </a:r>
           </a:p>
         </p:txBody>
@@ -9699,6 +11083,62 @@
   <p:clrMapOvr>
     <a:masterClrMapping/>
   </p:clrMapOvr>
+  <p:timing>
+    <p:tnLst>
+      <p:par>
+        <p:cTn id="1" dur="indefinite" restart="never" nodeType="tmRoot">
+          <p:childTnLst>
+            <p:seq concurrent="1" nextAc="seek">
+              <p:cTn id="2" dur="indefinite" nodeType="mainSeq">
+                <p:childTnLst>
+                  <p:par>
+                    <p:cTn id="3" fill="hold">
+                      <p:stCondLst>
+                        <p:cond delay="0"/>
+                      </p:stCondLst>
+                      <p:childTnLst>
+                        <p:par>
+                          <p:cTn id="4" fill="hold">
+                            <p:stCondLst>
+                              <p:cond delay="0"/>
+                            </p:stCondLst>
+                            <p:childTnLst>
+                              <p:animEffect transition="out" filter="wipe(left)">
+                                <p:cBhvr>
+                                  <p:cTn id="5" dur="75000" fill="hold"/>
+                                  <p:tgtEl>
+                                    <p:spTgt spid="34"/>
+                                  </p:tgtEl>
+                                </p:cBhvr>
+                              </p:animEffect>
+                            </p:childTnLst>
+                          </p:cTn>
+                        </p:par>
+                      </p:childTnLst>
+                    </p:cTn>
+                  </p:par>
+                </p:childTnLst>
+              </p:cTn>
+              <p:prevCondLst>
+                <p:cond evt="onPrev" delay="0">
+                  <p:tgtEl>
+                    <p:sldTgt/>
+                  </p:tgtEl>
+                </p:cond>
+              </p:prevCondLst>
+              <p:nextCondLst>
+                <p:cond evt="onNext" delay="0">
+                  <p:tgtEl>
+                    <p:sldTgt/>
+                  </p:tgtEl>
+                </p:cond>
+              </p:nextCondLst>
+            </p:seq>
+          </p:childTnLst>
+        </p:cTn>
+      </p:par>
+    </p:tnLst>
+  </p:timing>
 </p:sld>
 </file>
 
@@ -9803,7 +11243,7 @@
         <p:spPr>
           <a:xfrm>
             <a:off x="502920" y="438912"/>
-            <a:ext cx="11155680" cy="594360"/>
+            <a:ext cx="8869680" cy="594360"/>
           </a:xfrm>
           <a:prstGeom prst="rect">
             <a:avLst/>
@@ -10865,7 +12305,7 @@
         </p:nvSpPr>
         <p:spPr>
           <a:xfrm>
-            <a:off x="502920" y="6144768"/>
+            <a:off x="502920" y="6199632"/>
             <a:ext cx="1508760" cy="292608"/>
           </a:xfrm>
           <a:prstGeom prst="roundRect">
@@ -10910,7 +12350,7 @@
         </p:nvSpPr>
         <p:spPr>
           <a:xfrm>
-            <a:off x="502920" y="6163056"/>
+            <a:off x="502920" y="6217920"/>
             <a:ext cx="1508760" cy="256032"/>
           </a:xfrm>
           <a:prstGeom prst="rect">
@@ -10949,7 +12389,7 @@
         </p:nvSpPr>
         <p:spPr>
           <a:xfrm>
-            <a:off x="2121408" y="6144768"/>
+            <a:off x="2121408" y="6199632"/>
             <a:ext cx="1508760" cy="292608"/>
           </a:xfrm>
           <a:prstGeom prst="roundRect">
@@ -10994,7 +12434,7 @@
         </p:nvSpPr>
         <p:spPr>
           <a:xfrm>
-            <a:off x="2121408" y="6163056"/>
+            <a:off x="2121408" y="6217920"/>
             <a:ext cx="1508760" cy="256032"/>
           </a:xfrm>
           <a:prstGeom prst="rect">
@@ -11033,7 +12473,7 @@
         </p:nvSpPr>
         <p:spPr>
           <a:xfrm>
-            <a:off x="3739896" y="6144768"/>
+            <a:off x="3739896" y="6199632"/>
             <a:ext cx="1508760" cy="292608"/>
           </a:xfrm>
           <a:prstGeom prst="roundRect">
@@ -11078,7 +12518,7 @@
         </p:nvSpPr>
         <p:spPr>
           <a:xfrm>
-            <a:off x="3739896" y="6163056"/>
+            <a:off x="3739896" y="6217920"/>
             <a:ext cx="1508760" cy="256032"/>
           </a:xfrm>
           <a:prstGeom prst="rect">
@@ -11117,7 +12557,7 @@
         </p:nvSpPr>
         <p:spPr>
           <a:xfrm>
-            <a:off x="5358384" y="6144768"/>
+            <a:off x="5358384" y="6199632"/>
             <a:ext cx="1508760" cy="292608"/>
           </a:xfrm>
           <a:prstGeom prst="roundRect">
@@ -11162,7 +12602,7 @@
         </p:nvSpPr>
         <p:spPr>
           <a:xfrm>
-            <a:off x="5358384" y="6144768"/>
+            <a:off x="5358384" y="6199632"/>
             <a:ext cx="1508760" cy="45720"/>
           </a:xfrm>
           <a:prstGeom prst="rect">
@@ -11205,7 +12645,7 @@
         </p:nvSpPr>
         <p:spPr>
           <a:xfrm>
-            <a:off x="5358384" y="6163056"/>
+            <a:off x="5358384" y="6217920"/>
             <a:ext cx="1508760" cy="256032"/>
           </a:xfrm>
           <a:prstGeom prst="rect">
@@ -11244,7 +12684,7 @@
         </p:nvSpPr>
         <p:spPr>
           <a:xfrm>
-            <a:off x="6976872" y="6144768"/>
+            <a:off x="6976872" y="6199632"/>
             <a:ext cx="1508760" cy="292608"/>
           </a:xfrm>
           <a:prstGeom prst="roundRect">
@@ -11289,7 +12729,7 @@
         </p:nvSpPr>
         <p:spPr>
           <a:xfrm>
-            <a:off x="6976872" y="6163056"/>
+            <a:off x="6976872" y="6217920"/>
             <a:ext cx="1508760" cy="256032"/>
           </a:xfrm>
           <a:prstGeom prst="rect">
@@ -11328,7 +12768,7 @@
         </p:nvSpPr>
         <p:spPr>
           <a:xfrm>
-            <a:off x="8595360" y="6144768"/>
+            <a:off x="8595360" y="6199632"/>
             <a:ext cx="1508760" cy="292608"/>
           </a:xfrm>
           <a:prstGeom prst="roundRect">
@@ -11373,7 +12813,7 @@
         </p:nvSpPr>
         <p:spPr>
           <a:xfrm>
-            <a:off x="8595360" y="6163056"/>
+            <a:off x="8595360" y="6217920"/>
             <a:ext cx="1508760" cy="256032"/>
           </a:xfrm>
           <a:prstGeom prst="rect">
@@ -11412,7 +12852,7 @@
         </p:nvSpPr>
         <p:spPr>
           <a:xfrm>
-            <a:off x="10213848" y="6144768"/>
+            <a:off x="10213848" y="6199632"/>
             <a:ext cx="1508760" cy="292608"/>
           </a:xfrm>
           <a:prstGeom prst="roundRect">
@@ -11457,7 +12897,7 @@
         </p:nvSpPr>
         <p:spPr>
           <a:xfrm>
-            <a:off x="10213848" y="6163056"/>
+            <a:off x="10213848" y="6217920"/>
             <a:ext cx="1508760" cy="256032"/>
           </a:xfrm>
           <a:prstGeom prst="rect">
@@ -11562,6 +13002,294 @@
                 <a:latin typeface="Calibri"/>
               </a:rPr>
               <a:t>5 / 8</a:t>
+            </a:r>
+          </a:p>
+        </p:txBody>
+      </p:sp>
+      <p:sp>
+        <p:nvSpPr>
+          <p:cNvPr id="44" name="Rounded Rectangle 43"/>
+          <p:cNvSpPr/>
+          <p:nvPr/>
+        </p:nvSpPr>
+        <p:spPr>
+          <a:xfrm>
+            <a:off x="9646920" y="164592"/>
+            <a:ext cx="2331720" cy="868680"/>
+          </a:xfrm>
+          <a:prstGeom prst="roundRect">
+            <a:avLst>
+              <a:gd name="adj" fmla="val 12000"/>
+            </a:avLst>
+          </a:prstGeom>
+          <a:solidFill>
+            <a:srgbClr val="1A2332"/>
+          </a:solidFill>
+          <a:ln>
+            <a:noFill/>
+          </a:ln>
+        </p:spPr>
+        <p:style>
+          <a:lnRef idx="1">
+            <a:schemeClr val="accent1"/>
+          </a:lnRef>
+          <a:fillRef idx="3">
+            <a:schemeClr val="accent1"/>
+          </a:fillRef>
+          <a:effectRef idx="2">
+            <a:schemeClr val="accent1"/>
+          </a:effectRef>
+          <a:fontRef idx="minor">
+            <a:schemeClr val="lt1"/>
+          </a:fontRef>
+        </p:style>
+        <p:txBody>
+          <a:bodyPr rtlCol="0" anchor="ctr"/>
+          <a:lstStyle/>
+          <a:p>
+            <a:pPr algn="ctr"/>
+          </a:p>
+        </p:txBody>
+      </p:sp>
+      <p:sp>
+        <p:nvSpPr>
+          <p:cNvPr id="45" name="Rectangle 44"/>
+          <p:cNvSpPr/>
+          <p:nvPr/>
+        </p:nvSpPr>
+        <p:spPr>
+          <a:xfrm>
+            <a:off x="9646920" y="164592"/>
+            <a:ext cx="73152" cy="868680"/>
+          </a:xfrm>
+          <a:prstGeom prst="rect">
+            <a:avLst/>
+          </a:prstGeom>
+          <a:solidFill>
+            <a:srgbClr val="D4A853"/>
+          </a:solidFill>
+          <a:ln>
+            <a:noFill/>
+          </a:ln>
+        </p:spPr>
+        <p:style>
+          <a:lnRef idx="1">
+            <a:schemeClr val="accent1"/>
+          </a:lnRef>
+          <a:fillRef idx="3">
+            <a:schemeClr val="accent1"/>
+          </a:fillRef>
+          <a:effectRef idx="2">
+            <a:schemeClr val="accent1"/>
+          </a:effectRef>
+          <a:fontRef idx="minor">
+            <a:schemeClr val="lt1"/>
+          </a:fontRef>
+        </p:style>
+        <p:txBody>
+          <a:bodyPr rtlCol="0" anchor="ctr"/>
+          <a:lstStyle/>
+          <a:p>
+            <a:pPr algn="ctr"/>
+          </a:p>
+        </p:txBody>
+      </p:sp>
+      <p:sp>
+        <p:nvSpPr>
+          <p:cNvPr id="46" name="TextBox 45"/>
+          <p:cNvSpPr txBox="1"/>
+          <p:nvPr/>
+        </p:nvSpPr>
+        <p:spPr>
+          <a:xfrm>
+            <a:off x="9811512" y="219456"/>
+            <a:ext cx="2075688" cy="777240"/>
+          </a:xfrm>
+          <a:prstGeom prst="rect">
+            <a:avLst/>
+          </a:prstGeom>
+          <a:noFill/>
+        </p:spPr>
+        <p:txBody>
+          <a:bodyPr wrap="square">
+            <a:spAutoFit/>
+          </a:bodyPr>
+          <a:lstStyle/>
+          <a:p>
+            <a:pPr algn="l">
+              <a:spcAft>
+                <a:spcPts val="0"/>
+              </a:spcAft>
+            </a:pPr>
+            <a:r>
+              <a:rPr sz="900" b="1">
+                <a:solidFill>
+                  <a:srgbClr val="8B9CB3"/>
+                </a:solidFill>
+                <a:latin typeface="Calibri"/>
+              </a:rPr>
+              <a:t>SLIDE BUDGET</a:t>
+            </a:r>
+          </a:p>
+          <a:p>
+            <a:pPr algn="l">
+              <a:spcAft>
+                <a:spcPts val="0"/>
+              </a:spcAft>
+            </a:pPr>
+            <a:r>
+              <a:rPr sz="2600" b="1">
+                <a:solidFill>
+                  <a:srgbClr val="D4A853"/>
+                </a:solidFill>
+                <a:latin typeface="Calibri"/>
+              </a:rPr>
+              <a:t>1:00</a:t>
+            </a:r>
+          </a:p>
+          <a:p>
+            <a:pPr algn="l">
+              <a:spcAft>
+                <a:spcPts val="0"/>
+              </a:spcAft>
+            </a:pPr>
+            <a:r>
+              <a:rPr sz="900" b="0">
+                <a:solidFill>
+                  <a:srgbClr val="8B9CB3"/>
+                </a:solidFill>
+                <a:latin typeface="Calibri"/>
+              </a:rPr>
+              <a:t>by end 6:00 · left 4:00</a:t>
+            </a:r>
+          </a:p>
+        </p:txBody>
+      </p:sp>
+      <p:sp>
+        <p:nvSpPr>
+          <p:cNvPr id="47" name="Rounded Rectangle 46"/>
+          <p:cNvSpPr/>
+          <p:nvPr/>
+        </p:nvSpPr>
+        <p:spPr>
+          <a:xfrm>
+            <a:off x="502920" y="5961888"/>
+            <a:ext cx="11155680" cy="109728"/>
+          </a:xfrm>
+          <a:prstGeom prst="roundRect">
+            <a:avLst>
+              <a:gd name="adj" fmla="val 50000"/>
+            </a:avLst>
+          </a:prstGeom>
+          <a:solidFill>
+            <a:srgbClr val="243044"/>
+          </a:solidFill>
+          <a:ln>
+            <a:noFill/>
+          </a:ln>
+        </p:spPr>
+        <p:style>
+          <a:lnRef idx="1">
+            <a:schemeClr val="accent1"/>
+          </a:lnRef>
+          <a:fillRef idx="3">
+            <a:schemeClr val="accent1"/>
+          </a:fillRef>
+          <a:effectRef idx="2">
+            <a:schemeClr val="accent1"/>
+          </a:effectRef>
+          <a:fontRef idx="minor">
+            <a:schemeClr val="lt1"/>
+          </a:fontRef>
+        </p:style>
+        <p:txBody>
+          <a:bodyPr rtlCol="0" anchor="ctr"/>
+          <a:lstStyle/>
+          <a:p>
+            <a:pPr algn="ctr"/>
+          </a:p>
+        </p:txBody>
+      </p:sp>
+      <p:sp>
+        <p:nvSpPr>
+          <p:cNvPr id="48" name="Rounded Rectangle 47"/>
+          <p:cNvSpPr/>
+          <p:nvPr/>
+        </p:nvSpPr>
+        <p:spPr>
+          <a:xfrm>
+            <a:off x="502920" y="5961888"/>
+            <a:ext cx="11155680" cy="109728"/>
+          </a:xfrm>
+          <a:prstGeom prst="roundRect">
+            <a:avLst>
+              <a:gd name="adj" fmla="val 50000"/>
+            </a:avLst>
+          </a:prstGeom>
+          <a:solidFill>
+            <a:srgbClr val="D4A853"/>
+          </a:solidFill>
+          <a:ln>
+            <a:noFill/>
+          </a:ln>
+        </p:spPr>
+        <p:style>
+          <a:lnRef idx="1">
+            <a:schemeClr val="accent1"/>
+          </a:lnRef>
+          <a:fillRef idx="3">
+            <a:schemeClr val="accent1"/>
+          </a:fillRef>
+          <a:effectRef idx="2">
+            <a:schemeClr val="accent1"/>
+          </a:effectRef>
+          <a:fontRef idx="minor">
+            <a:schemeClr val="lt1"/>
+          </a:fontRef>
+        </p:style>
+        <p:txBody>
+          <a:bodyPr rtlCol="0" anchor="ctr"/>
+          <a:lstStyle/>
+          <a:p>
+            <a:pPr algn="ctr"/>
+          </a:p>
+        </p:txBody>
+      </p:sp>
+      <p:sp>
+        <p:nvSpPr>
+          <p:cNvPr id="49" name="TextBox 48"/>
+          <p:cNvSpPr txBox="1"/>
+          <p:nvPr/>
+        </p:nvSpPr>
+        <p:spPr>
+          <a:xfrm>
+            <a:off x="502920" y="5760720"/>
+            <a:ext cx="5029200" cy="201168"/>
+          </a:xfrm>
+          <a:prstGeom prst="rect">
+            <a:avLst/>
+          </a:prstGeom>
+          <a:noFill/>
+        </p:spPr>
+        <p:txBody>
+          <a:bodyPr wrap="none">
+            <a:spAutoFit/>
+          </a:bodyPr>
+          <a:lstStyle/>
+          <a:p>
+            <a:pPr algn="l">
+              <a:spcAft>
+                <a:spcPts val="0"/>
+              </a:spcAft>
+            </a:pPr>
+            <a:r>
+              <a:rPr sz="800" b="0">
+                <a:solidFill>
+                  <a:srgbClr val="8B9CB3"/>
+                </a:solidFill>
+                <a:latin typeface="Calibri"/>
+              </a:rPr>
+              <a:t>Countdown bar starts in Slideshow · does not auto-advance — you click when ready</a:t>
             </a:r>
           </a:p>
         </p:txBody>
@@ -11571,6 +13299,62 @@
   <p:clrMapOvr>
     <a:masterClrMapping/>
   </p:clrMapOvr>
+  <p:timing>
+    <p:tnLst>
+      <p:par>
+        <p:cTn id="1" dur="indefinite" restart="never" nodeType="tmRoot">
+          <p:childTnLst>
+            <p:seq concurrent="1" nextAc="seek">
+              <p:cTn id="2" dur="indefinite" nodeType="mainSeq">
+                <p:childTnLst>
+                  <p:par>
+                    <p:cTn id="3" fill="hold">
+                      <p:stCondLst>
+                        <p:cond delay="0"/>
+                      </p:stCondLst>
+                      <p:childTnLst>
+                        <p:par>
+                          <p:cTn id="4" fill="hold">
+                            <p:stCondLst>
+                              <p:cond delay="0"/>
+                            </p:stCondLst>
+                            <p:childTnLst>
+                              <p:animEffect transition="out" filter="wipe(left)">
+                                <p:cBhvr>
+                                  <p:cTn id="5" dur="60000" fill="hold"/>
+                                  <p:tgtEl>
+                                    <p:spTgt spid="48"/>
+                                  </p:tgtEl>
+                                </p:cBhvr>
+                              </p:animEffect>
+                            </p:childTnLst>
+                          </p:cTn>
+                        </p:par>
+                      </p:childTnLst>
+                    </p:cTn>
+                  </p:par>
+                </p:childTnLst>
+              </p:cTn>
+              <p:prevCondLst>
+                <p:cond evt="onPrev" delay="0">
+                  <p:tgtEl>
+                    <p:sldTgt/>
+                  </p:tgtEl>
+                </p:cond>
+              </p:prevCondLst>
+              <p:nextCondLst>
+                <p:cond evt="onNext" delay="0">
+                  <p:tgtEl>
+                    <p:sldTgt/>
+                  </p:tgtEl>
+                </p:cond>
+              </p:nextCondLst>
+            </p:seq>
+          </p:childTnLst>
+        </p:cTn>
+      </p:par>
+    </p:tnLst>
+  </p:timing>
 </p:sld>
 </file>
 
@@ -11675,7 +13459,7 @@
         <p:spPr>
           <a:xfrm>
             <a:off x="502920" y="438912"/>
-            <a:ext cx="11155680" cy="594360"/>
+            <a:ext cx="8869680" cy="594360"/>
           </a:xfrm>
           <a:prstGeom prst="rect">
             <a:avLst/>
@@ -12723,7 +14507,7 @@
         </p:nvSpPr>
         <p:spPr>
           <a:xfrm>
-            <a:off x="502920" y="6144768"/>
+            <a:off x="502920" y="6199632"/>
             <a:ext cx="1508760" cy="292608"/>
           </a:xfrm>
           <a:prstGeom prst="roundRect">
@@ -12768,7 +14552,7 @@
         </p:nvSpPr>
         <p:spPr>
           <a:xfrm>
-            <a:off x="502920" y="6163056"/>
+            <a:off x="502920" y="6217920"/>
             <a:ext cx="1508760" cy="256032"/>
           </a:xfrm>
           <a:prstGeom prst="rect">
@@ -12807,7 +14591,7 @@
         </p:nvSpPr>
         <p:spPr>
           <a:xfrm>
-            <a:off x="2121408" y="6144768"/>
+            <a:off x="2121408" y="6199632"/>
             <a:ext cx="1508760" cy="292608"/>
           </a:xfrm>
           <a:prstGeom prst="roundRect">
@@ -12852,7 +14636,7 @@
         </p:nvSpPr>
         <p:spPr>
           <a:xfrm>
-            <a:off x="2121408" y="6163056"/>
+            <a:off x="2121408" y="6217920"/>
             <a:ext cx="1508760" cy="256032"/>
           </a:xfrm>
           <a:prstGeom prst="rect">
@@ -12891,7 +14675,7 @@
         </p:nvSpPr>
         <p:spPr>
           <a:xfrm>
-            <a:off x="3739896" y="6144768"/>
+            <a:off x="3739896" y="6199632"/>
             <a:ext cx="1508760" cy="292608"/>
           </a:xfrm>
           <a:prstGeom prst="roundRect">
@@ -12936,7 +14720,7 @@
         </p:nvSpPr>
         <p:spPr>
           <a:xfrm>
-            <a:off x="3739896" y="6163056"/>
+            <a:off x="3739896" y="6217920"/>
             <a:ext cx="1508760" cy="256032"/>
           </a:xfrm>
           <a:prstGeom prst="rect">
@@ -12975,7 +14759,7 @@
         </p:nvSpPr>
         <p:spPr>
           <a:xfrm>
-            <a:off x="5358384" y="6144768"/>
+            <a:off x="5358384" y="6199632"/>
             <a:ext cx="1508760" cy="292608"/>
           </a:xfrm>
           <a:prstGeom prst="roundRect">
@@ -13020,7 +14804,7 @@
         </p:nvSpPr>
         <p:spPr>
           <a:xfrm>
-            <a:off x="5358384" y="6163056"/>
+            <a:off x="5358384" y="6217920"/>
             <a:ext cx="1508760" cy="256032"/>
           </a:xfrm>
           <a:prstGeom prst="rect">
@@ -13059,7 +14843,7 @@
         </p:nvSpPr>
         <p:spPr>
           <a:xfrm>
-            <a:off x="6976872" y="6144768"/>
+            <a:off x="6976872" y="6199632"/>
             <a:ext cx="1508760" cy="292608"/>
           </a:xfrm>
           <a:prstGeom prst="roundRect">
@@ -13104,7 +14888,7 @@
         </p:nvSpPr>
         <p:spPr>
           <a:xfrm>
-            <a:off x="6976872" y="6144768"/>
+            <a:off x="6976872" y="6199632"/>
             <a:ext cx="1508760" cy="45720"/>
           </a:xfrm>
           <a:prstGeom prst="rect">
@@ -13147,7 +14931,7 @@
         </p:nvSpPr>
         <p:spPr>
           <a:xfrm>
-            <a:off x="6976872" y="6163056"/>
+            <a:off x="6976872" y="6217920"/>
             <a:ext cx="1508760" cy="256032"/>
           </a:xfrm>
           <a:prstGeom prst="rect">
@@ -13186,7 +14970,7 @@
         </p:nvSpPr>
         <p:spPr>
           <a:xfrm>
-            <a:off x="8595360" y="6144768"/>
+            <a:off x="8595360" y="6199632"/>
             <a:ext cx="1508760" cy="292608"/>
           </a:xfrm>
           <a:prstGeom prst="roundRect">
@@ -13231,7 +15015,7 @@
         </p:nvSpPr>
         <p:spPr>
           <a:xfrm>
-            <a:off x="8595360" y="6163056"/>
+            <a:off x="8595360" y="6217920"/>
             <a:ext cx="1508760" cy="256032"/>
           </a:xfrm>
           <a:prstGeom prst="rect">
@@ -13270,7 +15054,7 @@
         </p:nvSpPr>
         <p:spPr>
           <a:xfrm>
-            <a:off x="10213848" y="6144768"/>
+            <a:off x="10213848" y="6199632"/>
             <a:ext cx="1508760" cy="292608"/>
           </a:xfrm>
           <a:prstGeom prst="roundRect">
@@ -13315,7 +15099,7 @@
         </p:nvSpPr>
         <p:spPr>
           <a:xfrm>
-            <a:off x="10213848" y="6163056"/>
+            <a:off x="10213848" y="6217920"/>
             <a:ext cx="1508760" cy="256032"/>
           </a:xfrm>
           <a:prstGeom prst="rect">
@@ -13420,6 +15204,294 @@
                 <a:latin typeface="Calibri"/>
               </a:rPr>
               <a:t>6 / 8</a:t>
+            </a:r>
+          </a:p>
+        </p:txBody>
+      </p:sp>
+      <p:sp>
+        <p:nvSpPr>
+          <p:cNvPr id="40" name="Rounded Rectangle 39"/>
+          <p:cNvSpPr/>
+          <p:nvPr/>
+        </p:nvSpPr>
+        <p:spPr>
+          <a:xfrm>
+            <a:off x="9646920" y="164592"/>
+            <a:ext cx="2331720" cy="868680"/>
+          </a:xfrm>
+          <a:prstGeom prst="roundRect">
+            <a:avLst>
+              <a:gd name="adj" fmla="val 12000"/>
+            </a:avLst>
+          </a:prstGeom>
+          <a:solidFill>
+            <a:srgbClr val="1A2332"/>
+          </a:solidFill>
+          <a:ln>
+            <a:noFill/>
+          </a:ln>
+        </p:spPr>
+        <p:style>
+          <a:lnRef idx="1">
+            <a:schemeClr val="accent1"/>
+          </a:lnRef>
+          <a:fillRef idx="3">
+            <a:schemeClr val="accent1"/>
+          </a:fillRef>
+          <a:effectRef idx="2">
+            <a:schemeClr val="accent1"/>
+          </a:effectRef>
+          <a:fontRef idx="minor">
+            <a:schemeClr val="lt1"/>
+          </a:fontRef>
+        </p:style>
+        <p:txBody>
+          <a:bodyPr rtlCol="0" anchor="ctr"/>
+          <a:lstStyle/>
+          <a:p>
+            <a:pPr algn="ctr"/>
+          </a:p>
+        </p:txBody>
+      </p:sp>
+      <p:sp>
+        <p:nvSpPr>
+          <p:cNvPr id="41" name="Rectangle 40"/>
+          <p:cNvSpPr/>
+          <p:nvPr/>
+        </p:nvSpPr>
+        <p:spPr>
+          <a:xfrm>
+            <a:off x="9646920" y="164592"/>
+            <a:ext cx="73152" cy="868680"/>
+          </a:xfrm>
+          <a:prstGeom prst="rect">
+            <a:avLst/>
+          </a:prstGeom>
+          <a:solidFill>
+            <a:srgbClr val="D4A853"/>
+          </a:solidFill>
+          <a:ln>
+            <a:noFill/>
+          </a:ln>
+        </p:spPr>
+        <p:style>
+          <a:lnRef idx="1">
+            <a:schemeClr val="accent1"/>
+          </a:lnRef>
+          <a:fillRef idx="3">
+            <a:schemeClr val="accent1"/>
+          </a:fillRef>
+          <a:effectRef idx="2">
+            <a:schemeClr val="accent1"/>
+          </a:effectRef>
+          <a:fontRef idx="minor">
+            <a:schemeClr val="lt1"/>
+          </a:fontRef>
+        </p:style>
+        <p:txBody>
+          <a:bodyPr rtlCol="0" anchor="ctr"/>
+          <a:lstStyle/>
+          <a:p>
+            <a:pPr algn="ctr"/>
+          </a:p>
+        </p:txBody>
+      </p:sp>
+      <p:sp>
+        <p:nvSpPr>
+          <p:cNvPr id="42" name="TextBox 41"/>
+          <p:cNvSpPr txBox="1"/>
+          <p:nvPr/>
+        </p:nvSpPr>
+        <p:spPr>
+          <a:xfrm>
+            <a:off x="9811512" y="219456"/>
+            <a:ext cx="2075688" cy="777240"/>
+          </a:xfrm>
+          <a:prstGeom prst="rect">
+            <a:avLst/>
+          </a:prstGeom>
+          <a:noFill/>
+        </p:spPr>
+        <p:txBody>
+          <a:bodyPr wrap="square">
+            <a:spAutoFit/>
+          </a:bodyPr>
+          <a:lstStyle/>
+          <a:p>
+            <a:pPr algn="l">
+              <a:spcAft>
+                <a:spcPts val="0"/>
+              </a:spcAft>
+            </a:pPr>
+            <a:r>
+              <a:rPr sz="900" b="1">
+                <a:solidFill>
+                  <a:srgbClr val="8B9CB3"/>
+                </a:solidFill>
+                <a:latin typeface="Calibri"/>
+              </a:rPr>
+              <a:t>SLIDE BUDGET</a:t>
+            </a:r>
+          </a:p>
+          <a:p>
+            <a:pPr algn="l">
+              <a:spcAft>
+                <a:spcPts val="0"/>
+              </a:spcAft>
+            </a:pPr>
+            <a:r>
+              <a:rPr sz="2600" b="1">
+                <a:solidFill>
+                  <a:srgbClr val="D4A853"/>
+                </a:solidFill>
+                <a:latin typeface="Calibri"/>
+              </a:rPr>
+              <a:t>1:15</a:t>
+            </a:r>
+          </a:p>
+          <a:p>
+            <a:pPr algn="l">
+              <a:spcAft>
+                <a:spcPts val="0"/>
+              </a:spcAft>
+            </a:pPr>
+            <a:r>
+              <a:rPr sz="900" b="0">
+                <a:solidFill>
+                  <a:srgbClr val="8B9CB3"/>
+                </a:solidFill>
+                <a:latin typeface="Calibri"/>
+              </a:rPr>
+              <a:t>by end 7:15 · left 2:45</a:t>
+            </a:r>
+          </a:p>
+        </p:txBody>
+      </p:sp>
+      <p:sp>
+        <p:nvSpPr>
+          <p:cNvPr id="43" name="Rounded Rectangle 42"/>
+          <p:cNvSpPr/>
+          <p:nvPr/>
+        </p:nvSpPr>
+        <p:spPr>
+          <a:xfrm>
+            <a:off x="502920" y="5961888"/>
+            <a:ext cx="11155680" cy="109728"/>
+          </a:xfrm>
+          <a:prstGeom prst="roundRect">
+            <a:avLst>
+              <a:gd name="adj" fmla="val 50000"/>
+            </a:avLst>
+          </a:prstGeom>
+          <a:solidFill>
+            <a:srgbClr val="243044"/>
+          </a:solidFill>
+          <a:ln>
+            <a:noFill/>
+          </a:ln>
+        </p:spPr>
+        <p:style>
+          <a:lnRef idx="1">
+            <a:schemeClr val="accent1"/>
+          </a:lnRef>
+          <a:fillRef idx="3">
+            <a:schemeClr val="accent1"/>
+          </a:fillRef>
+          <a:effectRef idx="2">
+            <a:schemeClr val="accent1"/>
+          </a:effectRef>
+          <a:fontRef idx="minor">
+            <a:schemeClr val="lt1"/>
+          </a:fontRef>
+        </p:style>
+        <p:txBody>
+          <a:bodyPr rtlCol="0" anchor="ctr"/>
+          <a:lstStyle/>
+          <a:p>
+            <a:pPr algn="ctr"/>
+          </a:p>
+        </p:txBody>
+      </p:sp>
+      <p:sp>
+        <p:nvSpPr>
+          <p:cNvPr id="44" name="Rounded Rectangle 43"/>
+          <p:cNvSpPr/>
+          <p:nvPr/>
+        </p:nvSpPr>
+        <p:spPr>
+          <a:xfrm>
+            <a:off x="502920" y="5961888"/>
+            <a:ext cx="11155680" cy="109728"/>
+          </a:xfrm>
+          <a:prstGeom prst="roundRect">
+            <a:avLst>
+              <a:gd name="adj" fmla="val 50000"/>
+            </a:avLst>
+          </a:prstGeom>
+          <a:solidFill>
+            <a:srgbClr val="D4A853"/>
+          </a:solidFill>
+          <a:ln>
+            <a:noFill/>
+          </a:ln>
+        </p:spPr>
+        <p:style>
+          <a:lnRef idx="1">
+            <a:schemeClr val="accent1"/>
+          </a:lnRef>
+          <a:fillRef idx="3">
+            <a:schemeClr val="accent1"/>
+          </a:fillRef>
+          <a:effectRef idx="2">
+            <a:schemeClr val="accent1"/>
+          </a:effectRef>
+          <a:fontRef idx="minor">
+            <a:schemeClr val="lt1"/>
+          </a:fontRef>
+        </p:style>
+        <p:txBody>
+          <a:bodyPr rtlCol="0" anchor="ctr"/>
+          <a:lstStyle/>
+          <a:p>
+            <a:pPr algn="ctr"/>
+          </a:p>
+        </p:txBody>
+      </p:sp>
+      <p:sp>
+        <p:nvSpPr>
+          <p:cNvPr id="45" name="TextBox 44"/>
+          <p:cNvSpPr txBox="1"/>
+          <p:nvPr/>
+        </p:nvSpPr>
+        <p:spPr>
+          <a:xfrm>
+            <a:off x="502920" y="5760720"/>
+            <a:ext cx="5029200" cy="201168"/>
+          </a:xfrm>
+          <a:prstGeom prst="rect">
+            <a:avLst/>
+          </a:prstGeom>
+          <a:noFill/>
+        </p:spPr>
+        <p:txBody>
+          <a:bodyPr wrap="none">
+            <a:spAutoFit/>
+          </a:bodyPr>
+          <a:lstStyle/>
+          <a:p>
+            <a:pPr algn="l">
+              <a:spcAft>
+                <a:spcPts val="0"/>
+              </a:spcAft>
+            </a:pPr>
+            <a:r>
+              <a:rPr sz="800" b="0">
+                <a:solidFill>
+                  <a:srgbClr val="8B9CB3"/>
+                </a:solidFill>
+                <a:latin typeface="Calibri"/>
+              </a:rPr>
+              <a:t>Countdown bar starts in Slideshow · does not auto-advance — you click when ready</a:t>
             </a:r>
           </a:p>
         </p:txBody>
@@ -13429,6 +15501,62 @@
   <p:clrMapOvr>
     <a:masterClrMapping/>
   </p:clrMapOvr>
+  <p:timing>
+    <p:tnLst>
+      <p:par>
+        <p:cTn id="1" dur="indefinite" restart="never" nodeType="tmRoot">
+          <p:childTnLst>
+            <p:seq concurrent="1" nextAc="seek">
+              <p:cTn id="2" dur="indefinite" nodeType="mainSeq">
+                <p:childTnLst>
+                  <p:par>
+                    <p:cTn id="3" fill="hold">
+                      <p:stCondLst>
+                        <p:cond delay="0"/>
+                      </p:stCondLst>
+                      <p:childTnLst>
+                        <p:par>
+                          <p:cTn id="4" fill="hold">
+                            <p:stCondLst>
+                              <p:cond delay="0"/>
+                            </p:stCondLst>
+                            <p:childTnLst>
+                              <p:animEffect transition="out" filter="wipe(left)">
+                                <p:cBhvr>
+                                  <p:cTn id="5" dur="75000" fill="hold"/>
+                                  <p:tgtEl>
+                                    <p:spTgt spid="44"/>
+                                  </p:tgtEl>
+                                </p:cBhvr>
+                              </p:animEffect>
+                            </p:childTnLst>
+                          </p:cTn>
+                        </p:par>
+                      </p:childTnLst>
+                    </p:cTn>
+                  </p:par>
+                </p:childTnLst>
+              </p:cTn>
+              <p:prevCondLst>
+                <p:cond evt="onPrev" delay="0">
+                  <p:tgtEl>
+                    <p:sldTgt/>
+                  </p:tgtEl>
+                </p:cond>
+              </p:prevCondLst>
+              <p:nextCondLst>
+                <p:cond evt="onNext" delay="0">
+                  <p:tgtEl>
+                    <p:sldTgt/>
+                  </p:tgtEl>
+                </p:cond>
+              </p:nextCondLst>
+            </p:seq>
+          </p:childTnLst>
+        </p:cTn>
+      </p:par>
+    </p:tnLst>
+  </p:timing>
 </p:sld>
 </file>
 
@@ -13533,7 +15661,7 @@
         <p:spPr>
           <a:xfrm>
             <a:off x="502920" y="438912"/>
-            <a:ext cx="11155680" cy="594360"/>
+            <a:ext cx="8869680" cy="594360"/>
           </a:xfrm>
           <a:prstGeom prst="rect">
             <a:avLst/>
@@ -14897,7 +17025,7 @@
         </p:nvSpPr>
         <p:spPr>
           <a:xfrm>
-            <a:off x="502920" y="6144768"/>
+            <a:off x="502920" y="6199632"/>
             <a:ext cx="1508760" cy="292608"/>
           </a:xfrm>
           <a:prstGeom prst="roundRect">
@@ -14942,7 +17070,7 @@
         </p:nvSpPr>
         <p:spPr>
           <a:xfrm>
-            <a:off x="502920" y="6163056"/>
+            <a:off x="502920" y="6217920"/>
             <a:ext cx="1508760" cy="256032"/>
           </a:xfrm>
           <a:prstGeom prst="rect">
@@ -14981,7 +17109,7 @@
         </p:nvSpPr>
         <p:spPr>
           <a:xfrm>
-            <a:off x="2121408" y="6144768"/>
+            <a:off x="2121408" y="6199632"/>
             <a:ext cx="1508760" cy="292608"/>
           </a:xfrm>
           <a:prstGeom prst="roundRect">
@@ -15026,7 +17154,7 @@
         </p:nvSpPr>
         <p:spPr>
           <a:xfrm>
-            <a:off x="2121408" y="6163056"/>
+            <a:off x="2121408" y="6217920"/>
             <a:ext cx="1508760" cy="256032"/>
           </a:xfrm>
           <a:prstGeom prst="rect">
@@ -15065,7 +17193,7 @@
         </p:nvSpPr>
         <p:spPr>
           <a:xfrm>
-            <a:off x="3739896" y="6144768"/>
+            <a:off x="3739896" y="6199632"/>
             <a:ext cx="1508760" cy="292608"/>
           </a:xfrm>
           <a:prstGeom prst="roundRect">
@@ -15110,7 +17238,7 @@
         </p:nvSpPr>
         <p:spPr>
           <a:xfrm>
-            <a:off x="3739896" y="6163056"/>
+            <a:off x="3739896" y="6217920"/>
             <a:ext cx="1508760" cy="256032"/>
           </a:xfrm>
           <a:prstGeom prst="rect">
@@ -15149,7 +17277,7 @@
         </p:nvSpPr>
         <p:spPr>
           <a:xfrm>
-            <a:off x="5358384" y="6144768"/>
+            <a:off x="5358384" y="6199632"/>
             <a:ext cx="1508760" cy="292608"/>
           </a:xfrm>
           <a:prstGeom prst="roundRect">
@@ -15194,7 +17322,7 @@
         </p:nvSpPr>
         <p:spPr>
           <a:xfrm>
-            <a:off x="5358384" y="6163056"/>
+            <a:off x="5358384" y="6217920"/>
             <a:ext cx="1508760" cy="256032"/>
           </a:xfrm>
           <a:prstGeom prst="rect">
@@ -15233,7 +17361,7 @@
         </p:nvSpPr>
         <p:spPr>
           <a:xfrm>
-            <a:off x="6976872" y="6144768"/>
+            <a:off x="6976872" y="6199632"/>
             <a:ext cx="1508760" cy="292608"/>
           </a:xfrm>
           <a:prstGeom prst="roundRect">
@@ -15278,7 +17406,7 @@
         </p:nvSpPr>
         <p:spPr>
           <a:xfrm>
-            <a:off x="6976872" y="6163056"/>
+            <a:off x="6976872" y="6217920"/>
             <a:ext cx="1508760" cy="256032"/>
           </a:xfrm>
           <a:prstGeom prst="rect">
@@ -15317,7 +17445,7 @@
         </p:nvSpPr>
         <p:spPr>
           <a:xfrm>
-            <a:off x="8595360" y="6144768"/>
+            <a:off x="8595360" y="6199632"/>
             <a:ext cx="1508760" cy="292608"/>
           </a:xfrm>
           <a:prstGeom prst="roundRect">
@@ -15362,7 +17490,7 @@
         </p:nvSpPr>
         <p:spPr>
           <a:xfrm>
-            <a:off x="8595360" y="6144768"/>
+            <a:off x="8595360" y="6199632"/>
             <a:ext cx="1508760" cy="45720"/>
           </a:xfrm>
           <a:prstGeom prst="rect">
@@ -15405,7 +17533,7 @@
         </p:nvSpPr>
         <p:spPr>
           <a:xfrm>
-            <a:off x="8595360" y="6163056"/>
+            <a:off x="8595360" y="6217920"/>
             <a:ext cx="1508760" cy="256032"/>
           </a:xfrm>
           <a:prstGeom prst="rect">
@@ -15444,7 +17572,7 @@
         </p:nvSpPr>
         <p:spPr>
           <a:xfrm>
-            <a:off x="10213848" y="6144768"/>
+            <a:off x="10213848" y="6199632"/>
             <a:ext cx="1508760" cy="292608"/>
           </a:xfrm>
           <a:prstGeom prst="roundRect">
@@ -15489,7 +17617,7 @@
         </p:nvSpPr>
         <p:spPr>
           <a:xfrm>
-            <a:off x="10213848" y="6163056"/>
+            <a:off x="10213848" y="6217920"/>
             <a:ext cx="1508760" cy="256032"/>
           </a:xfrm>
           <a:prstGeom prst="rect">
@@ -15594,6 +17722,294 @@
                 <a:latin typeface="Calibri"/>
               </a:rPr>
               <a:t>7 / 8</a:t>
+            </a:r>
+          </a:p>
+        </p:txBody>
+      </p:sp>
+      <p:sp>
+        <p:nvSpPr>
+          <p:cNvPr id="46" name="Rounded Rectangle 45"/>
+          <p:cNvSpPr/>
+          <p:nvPr/>
+        </p:nvSpPr>
+        <p:spPr>
+          <a:xfrm>
+            <a:off x="9646920" y="164592"/>
+            <a:ext cx="2331720" cy="868680"/>
+          </a:xfrm>
+          <a:prstGeom prst="roundRect">
+            <a:avLst>
+              <a:gd name="adj" fmla="val 12000"/>
+            </a:avLst>
+          </a:prstGeom>
+          <a:solidFill>
+            <a:srgbClr val="1A2332"/>
+          </a:solidFill>
+          <a:ln>
+            <a:noFill/>
+          </a:ln>
+        </p:spPr>
+        <p:style>
+          <a:lnRef idx="1">
+            <a:schemeClr val="accent1"/>
+          </a:lnRef>
+          <a:fillRef idx="3">
+            <a:schemeClr val="accent1"/>
+          </a:fillRef>
+          <a:effectRef idx="2">
+            <a:schemeClr val="accent1"/>
+          </a:effectRef>
+          <a:fontRef idx="minor">
+            <a:schemeClr val="lt1"/>
+          </a:fontRef>
+        </p:style>
+        <p:txBody>
+          <a:bodyPr rtlCol="0" anchor="ctr"/>
+          <a:lstStyle/>
+          <a:p>
+            <a:pPr algn="ctr"/>
+          </a:p>
+        </p:txBody>
+      </p:sp>
+      <p:sp>
+        <p:nvSpPr>
+          <p:cNvPr id="47" name="Rectangle 46"/>
+          <p:cNvSpPr/>
+          <p:nvPr/>
+        </p:nvSpPr>
+        <p:spPr>
+          <a:xfrm>
+            <a:off x="9646920" y="164592"/>
+            <a:ext cx="73152" cy="868680"/>
+          </a:xfrm>
+          <a:prstGeom prst="rect">
+            <a:avLst/>
+          </a:prstGeom>
+          <a:solidFill>
+            <a:srgbClr val="D4A853"/>
+          </a:solidFill>
+          <a:ln>
+            <a:noFill/>
+          </a:ln>
+        </p:spPr>
+        <p:style>
+          <a:lnRef idx="1">
+            <a:schemeClr val="accent1"/>
+          </a:lnRef>
+          <a:fillRef idx="3">
+            <a:schemeClr val="accent1"/>
+          </a:fillRef>
+          <a:effectRef idx="2">
+            <a:schemeClr val="accent1"/>
+          </a:effectRef>
+          <a:fontRef idx="minor">
+            <a:schemeClr val="lt1"/>
+          </a:fontRef>
+        </p:style>
+        <p:txBody>
+          <a:bodyPr rtlCol="0" anchor="ctr"/>
+          <a:lstStyle/>
+          <a:p>
+            <a:pPr algn="ctr"/>
+          </a:p>
+        </p:txBody>
+      </p:sp>
+      <p:sp>
+        <p:nvSpPr>
+          <p:cNvPr id="48" name="TextBox 47"/>
+          <p:cNvSpPr txBox="1"/>
+          <p:nvPr/>
+        </p:nvSpPr>
+        <p:spPr>
+          <a:xfrm>
+            <a:off x="9811512" y="219456"/>
+            <a:ext cx="2075688" cy="777240"/>
+          </a:xfrm>
+          <a:prstGeom prst="rect">
+            <a:avLst/>
+          </a:prstGeom>
+          <a:noFill/>
+        </p:spPr>
+        <p:txBody>
+          <a:bodyPr wrap="square">
+            <a:spAutoFit/>
+          </a:bodyPr>
+          <a:lstStyle/>
+          <a:p>
+            <a:pPr algn="l">
+              <a:spcAft>
+                <a:spcPts val="0"/>
+              </a:spcAft>
+            </a:pPr>
+            <a:r>
+              <a:rPr sz="900" b="1">
+                <a:solidFill>
+                  <a:srgbClr val="8B9CB3"/>
+                </a:solidFill>
+                <a:latin typeface="Calibri"/>
+              </a:rPr>
+              <a:t>SLIDE BUDGET</a:t>
+            </a:r>
+          </a:p>
+          <a:p>
+            <a:pPr algn="l">
+              <a:spcAft>
+                <a:spcPts val="0"/>
+              </a:spcAft>
+            </a:pPr>
+            <a:r>
+              <a:rPr sz="2600" b="1">
+                <a:solidFill>
+                  <a:srgbClr val="D4A853"/>
+                </a:solidFill>
+                <a:latin typeface="Calibri"/>
+              </a:rPr>
+              <a:t>1:30</a:t>
+            </a:r>
+          </a:p>
+          <a:p>
+            <a:pPr algn="l">
+              <a:spcAft>
+                <a:spcPts val="0"/>
+              </a:spcAft>
+            </a:pPr>
+            <a:r>
+              <a:rPr sz="900" b="0">
+                <a:solidFill>
+                  <a:srgbClr val="8B9CB3"/>
+                </a:solidFill>
+                <a:latin typeface="Calibri"/>
+              </a:rPr>
+              <a:t>by end 8:45 · left 1:15</a:t>
+            </a:r>
+          </a:p>
+        </p:txBody>
+      </p:sp>
+      <p:sp>
+        <p:nvSpPr>
+          <p:cNvPr id="49" name="Rounded Rectangle 48"/>
+          <p:cNvSpPr/>
+          <p:nvPr/>
+        </p:nvSpPr>
+        <p:spPr>
+          <a:xfrm>
+            <a:off x="502920" y="5961888"/>
+            <a:ext cx="11155680" cy="109728"/>
+          </a:xfrm>
+          <a:prstGeom prst="roundRect">
+            <a:avLst>
+              <a:gd name="adj" fmla="val 50000"/>
+            </a:avLst>
+          </a:prstGeom>
+          <a:solidFill>
+            <a:srgbClr val="243044"/>
+          </a:solidFill>
+          <a:ln>
+            <a:noFill/>
+          </a:ln>
+        </p:spPr>
+        <p:style>
+          <a:lnRef idx="1">
+            <a:schemeClr val="accent1"/>
+          </a:lnRef>
+          <a:fillRef idx="3">
+            <a:schemeClr val="accent1"/>
+          </a:fillRef>
+          <a:effectRef idx="2">
+            <a:schemeClr val="accent1"/>
+          </a:effectRef>
+          <a:fontRef idx="minor">
+            <a:schemeClr val="lt1"/>
+          </a:fontRef>
+        </p:style>
+        <p:txBody>
+          <a:bodyPr rtlCol="0" anchor="ctr"/>
+          <a:lstStyle/>
+          <a:p>
+            <a:pPr algn="ctr"/>
+          </a:p>
+        </p:txBody>
+      </p:sp>
+      <p:sp>
+        <p:nvSpPr>
+          <p:cNvPr id="50" name="Rounded Rectangle 49"/>
+          <p:cNvSpPr/>
+          <p:nvPr/>
+        </p:nvSpPr>
+        <p:spPr>
+          <a:xfrm>
+            <a:off x="502920" y="5961888"/>
+            <a:ext cx="11155680" cy="109728"/>
+          </a:xfrm>
+          <a:prstGeom prst="roundRect">
+            <a:avLst>
+              <a:gd name="adj" fmla="val 50000"/>
+            </a:avLst>
+          </a:prstGeom>
+          <a:solidFill>
+            <a:srgbClr val="D4A853"/>
+          </a:solidFill>
+          <a:ln>
+            <a:noFill/>
+          </a:ln>
+        </p:spPr>
+        <p:style>
+          <a:lnRef idx="1">
+            <a:schemeClr val="accent1"/>
+          </a:lnRef>
+          <a:fillRef idx="3">
+            <a:schemeClr val="accent1"/>
+          </a:fillRef>
+          <a:effectRef idx="2">
+            <a:schemeClr val="accent1"/>
+          </a:effectRef>
+          <a:fontRef idx="minor">
+            <a:schemeClr val="lt1"/>
+          </a:fontRef>
+        </p:style>
+        <p:txBody>
+          <a:bodyPr rtlCol="0" anchor="ctr"/>
+          <a:lstStyle/>
+          <a:p>
+            <a:pPr algn="ctr"/>
+          </a:p>
+        </p:txBody>
+      </p:sp>
+      <p:sp>
+        <p:nvSpPr>
+          <p:cNvPr id="51" name="TextBox 50"/>
+          <p:cNvSpPr txBox="1"/>
+          <p:nvPr/>
+        </p:nvSpPr>
+        <p:spPr>
+          <a:xfrm>
+            <a:off x="502920" y="5760720"/>
+            <a:ext cx="5029200" cy="201168"/>
+          </a:xfrm>
+          <a:prstGeom prst="rect">
+            <a:avLst/>
+          </a:prstGeom>
+          <a:noFill/>
+        </p:spPr>
+        <p:txBody>
+          <a:bodyPr wrap="none">
+            <a:spAutoFit/>
+          </a:bodyPr>
+          <a:lstStyle/>
+          <a:p>
+            <a:pPr algn="l">
+              <a:spcAft>
+                <a:spcPts val="0"/>
+              </a:spcAft>
+            </a:pPr>
+            <a:r>
+              <a:rPr sz="800" b="0">
+                <a:solidFill>
+                  <a:srgbClr val="8B9CB3"/>
+                </a:solidFill>
+                <a:latin typeface="Calibri"/>
+              </a:rPr>
+              <a:t>Countdown bar starts in Slideshow · does not auto-advance — you click when ready</a:t>
             </a:r>
           </a:p>
         </p:txBody>
@@ -15603,6 +18019,62 @@
   <p:clrMapOvr>
     <a:masterClrMapping/>
   </p:clrMapOvr>
+  <p:timing>
+    <p:tnLst>
+      <p:par>
+        <p:cTn id="1" dur="indefinite" restart="never" nodeType="tmRoot">
+          <p:childTnLst>
+            <p:seq concurrent="1" nextAc="seek">
+              <p:cTn id="2" dur="indefinite" nodeType="mainSeq">
+                <p:childTnLst>
+                  <p:par>
+                    <p:cTn id="3" fill="hold">
+                      <p:stCondLst>
+                        <p:cond delay="0"/>
+                      </p:stCondLst>
+                      <p:childTnLst>
+                        <p:par>
+                          <p:cTn id="4" fill="hold">
+                            <p:stCondLst>
+                              <p:cond delay="0"/>
+                            </p:stCondLst>
+                            <p:childTnLst>
+                              <p:animEffect transition="out" filter="wipe(left)">
+                                <p:cBhvr>
+                                  <p:cTn id="5" dur="90000" fill="hold"/>
+                                  <p:tgtEl>
+                                    <p:spTgt spid="50"/>
+                                  </p:tgtEl>
+                                </p:cBhvr>
+                              </p:animEffect>
+                            </p:childTnLst>
+                          </p:cTn>
+                        </p:par>
+                      </p:childTnLst>
+                    </p:cTn>
+                  </p:par>
+                </p:childTnLst>
+              </p:cTn>
+              <p:prevCondLst>
+                <p:cond evt="onPrev" delay="0">
+                  <p:tgtEl>
+                    <p:sldTgt/>
+                  </p:tgtEl>
+                </p:cond>
+              </p:prevCondLst>
+              <p:nextCondLst>
+                <p:cond evt="onNext" delay="0">
+                  <p:tgtEl>
+                    <p:sldTgt/>
+                  </p:tgtEl>
+                </p:cond>
+              </p:nextCondLst>
+            </p:seq>
+          </p:childTnLst>
+        </p:cTn>
+      </p:par>
+    </p:tnLst>
+  </p:timing>
 </p:sld>
 </file>
 
@@ -15707,7 +18179,7 @@
         <p:spPr>
           <a:xfrm>
             <a:off x="502920" y="438912"/>
-            <a:ext cx="11155680" cy="594360"/>
+            <a:ext cx="8869680" cy="594360"/>
           </a:xfrm>
           <a:prstGeom prst="rect">
             <a:avLst/>
@@ -16275,7 +18747,7 @@
         </p:nvSpPr>
         <p:spPr>
           <a:xfrm>
-            <a:off x="502920" y="6144768"/>
+            <a:off x="502920" y="6199632"/>
             <a:ext cx="1508760" cy="292608"/>
           </a:xfrm>
           <a:prstGeom prst="roundRect">
@@ -16320,7 +18792,7 @@
         </p:nvSpPr>
         <p:spPr>
           <a:xfrm>
-            <a:off x="502920" y="6163056"/>
+            <a:off x="502920" y="6217920"/>
             <a:ext cx="1508760" cy="256032"/>
           </a:xfrm>
           <a:prstGeom prst="rect">
@@ -16359,7 +18831,7 @@
         </p:nvSpPr>
         <p:spPr>
           <a:xfrm>
-            <a:off x="2121408" y="6144768"/>
+            <a:off x="2121408" y="6199632"/>
             <a:ext cx="1508760" cy="292608"/>
           </a:xfrm>
           <a:prstGeom prst="roundRect">
@@ -16404,7 +18876,7 @@
         </p:nvSpPr>
         <p:spPr>
           <a:xfrm>
-            <a:off x="2121408" y="6163056"/>
+            <a:off x="2121408" y="6217920"/>
             <a:ext cx="1508760" cy="256032"/>
           </a:xfrm>
           <a:prstGeom prst="rect">
@@ -16443,7 +18915,7 @@
         </p:nvSpPr>
         <p:spPr>
           <a:xfrm>
-            <a:off x="3739896" y="6144768"/>
+            <a:off x="3739896" y="6199632"/>
             <a:ext cx="1508760" cy="292608"/>
           </a:xfrm>
           <a:prstGeom prst="roundRect">
@@ -16488,7 +18960,7 @@
         </p:nvSpPr>
         <p:spPr>
           <a:xfrm>
-            <a:off x="3739896" y="6163056"/>
+            <a:off x="3739896" y="6217920"/>
             <a:ext cx="1508760" cy="256032"/>
           </a:xfrm>
           <a:prstGeom prst="rect">
@@ -16527,7 +18999,7 @@
         </p:nvSpPr>
         <p:spPr>
           <a:xfrm>
-            <a:off x="5358384" y="6144768"/>
+            <a:off x="5358384" y="6199632"/>
             <a:ext cx="1508760" cy="292608"/>
           </a:xfrm>
           <a:prstGeom prst="roundRect">
@@ -16572,7 +19044,7 @@
         </p:nvSpPr>
         <p:spPr>
           <a:xfrm>
-            <a:off x="5358384" y="6163056"/>
+            <a:off x="5358384" y="6217920"/>
             <a:ext cx="1508760" cy="256032"/>
           </a:xfrm>
           <a:prstGeom prst="rect">
@@ -16611,7 +19083,7 @@
         </p:nvSpPr>
         <p:spPr>
           <a:xfrm>
-            <a:off x="6976872" y="6144768"/>
+            <a:off x="6976872" y="6199632"/>
             <a:ext cx="1508760" cy="292608"/>
           </a:xfrm>
           <a:prstGeom prst="roundRect">
@@ -16656,7 +19128,7 @@
         </p:nvSpPr>
         <p:spPr>
           <a:xfrm>
-            <a:off x="6976872" y="6163056"/>
+            <a:off x="6976872" y="6217920"/>
             <a:ext cx="1508760" cy="256032"/>
           </a:xfrm>
           <a:prstGeom prst="rect">
@@ -16695,7 +19167,7 @@
         </p:nvSpPr>
         <p:spPr>
           <a:xfrm>
-            <a:off x="8595360" y="6144768"/>
+            <a:off x="8595360" y="6199632"/>
             <a:ext cx="1508760" cy="292608"/>
           </a:xfrm>
           <a:prstGeom prst="roundRect">
@@ -16740,7 +19212,7 @@
         </p:nvSpPr>
         <p:spPr>
           <a:xfrm>
-            <a:off x="8595360" y="6163056"/>
+            <a:off x="8595360" y="6217920"/>
             <a:ext cx="1508760" cy="256032"/>
           </a:xfrm>
           <a:prstGeom prst="rect">
@@ -16779,7 +19251,7 @@
         </p:nvSpPr>
         <p:spPr>
           <a:xfrm>
-            <a:off x="10213848" y="6144768"/>
+            <a:off x="10213848" y="6199632"/>
             <a:ext cx="1508760" cy="292608"/>
           </a:xfrm>
           <a:prstGeom prst="roundRect">
@@ -16824,7 +19296,7 @@
         </p:nvSpPr>
         <p:spPr>
           <a:xfrm>
-            <a:off x="10213848" y="6144768"/>
+            <a:off x="10213848" y="6199632"/>
             <a:ext cx="1508760" cy="45720"/>
           </a:xfrm>
           <a:prstGeom prst="rect">
@@ -16867,7 +19339,7 @@
         </p:nvSpPr>
         <p:spPr>
           <a:xfrm>
-            <a:off x="10213848" y="6163056"/>
+            <a:off x="10213848" y="6217920"/>
             <a:ext cx="1508760" cy="256032"/>
           </a:xfrm>
           <a:prstGeom prst="rect">
@@ -16972,6 +19444,294 @@
                 <a:latin typeface="Calibri"/>
               </a:rPr>
               <a:t>8 / 8</a:t>
+            </a:r>
+          </a:p>
+        </p:txBody>
+      </p:sp>
+      <p:sp>
+        <p:nvSpPr>
+          <p:cNvPr id="32" name="Rounded Rectangle 31"/>
+          <p:cNvSpPr/>
+          <p:nvPr/>
+        </p:nvSpPr>
+        <p:spPr>
+          <a:xfrm>
+            <a:off x="9646920" y="164592"/>
+            <a:ext cx="2331720" cy="868680"/>
+          </a:xfrm>
+          <a:prstGeom prst="roundRect">
+            <a:avLst>
+              <a:gd name="adj" fmla="val 12000"/>
+            </a:avLst>
+          </a:prstGeom>
+          <a:solidFill>
+            <a:srgbClr val="1A2332"/>
+          </a:solidFill>
+          <a:ln>
+            <a:noFill/>
+          </a:ln>
+        </p:spPr>
+        <p:style>
+          <a:lnRef idx="1">
+            <a:schemeClr val="accent1"/>
+          </a:lnRef>
+          <a:fillRef idx="3">
+            <a:schemeClr val="accent1"/>
+          </a:fillRef>
+          <a:effectRef idx="2">
+            <a:schemeClr val="accent1"/>
+          </a:effectRef>
+          <a:fontRef idx="minor">
+            <a:schemeClr val="lt1"/>
+          </a:fontRef>
+        </p:style>
+        <p:txBody>
+          <a:bodyPr rtlCol="0" anchor="ctr"/>
+          <a:lstStyle/>
+          <a:p>
+            <a:pPr algn="ctr"/>
+          </a:p>
+        </p:txBody>
+      </p:sp>
+      <p:sp>
+        <p:nvSpPr>
+          <p:cNvPr id="33" name="Rectangle 32"/>
+          <p:cNvSpPr/>
+          <p:nvPr/>
+        </p:nvSpPr>
+        <p:spPr>
+          <a:xfrm>
+            <a:off x="9646920" y="164592"/>
+            <a:ext cx="73152" cy="868680"/>
+          </a:xfrm>
+          <a:prstGeom prst="rect">
+            <a:avLst/>
+          </a:prstGeom>
+          <a:solidFill>
+            <a:srgbClr val="D4A853"/>
+          </a:solidFill>
+          <a:ln>
+            <a:noFill/>
+          </a:ln>
+        </p:spPr>
+        <p:style>
+          <a:lnRef idx="1">
+            <a:schemeClr val="accent1"/>
+          </a:lnRef>
+          <a:fillRef idx="3">
+            <a:schemeClr val="accent1"/>
+          </a:fillRef>
+          <a:effectRef idx="2">
+            <a:schemeClr val="accent1"/>
+          </a:effectRef>
+          <a:fontRef idx="minor">
+            <a:schemeClr val="lt1"/>
+          </a:fontRef>
+        </p:style>
+        <p:txBody>
+          <a:bodyPr rtlCol="0" anchor="ctr"/>
+          <a:lstStyle/>
+          <a:p>
+            <a:pPr algn="ctr"/>
+          </a:p>
+        </p:txBody>
+      </p:sp>
+      <p:sp>
+        <p:nvSpPr>
+          <p:cNvPr id="34" name="TextBox 33"/>
+          <p:cNvSpPr txBox="1"/>
+          <p:nvPr/>
+        </p:nvSpPr>
+        <p:spPr>
+          <a:xfrm>
+            <a:off x="9811512" y="219456"/>
+            <a:ext cx="2075688" cy="777240"/>
+          </a:xfrm>
+          <a:prstGeom prst="rect">
+            <a:avLst/>
+          </a:prstGeom>
+          <a:noFill/>
+        </p:spPr>
+        <p:txBody>
+          <a:bodyPr wrap="square">
+            <a:spAutoFit/>
+          </a:bodyPr>
+          <a:lstStyle/>
+          <a:p>
+            <a:pPr algn="l">
+              <a:spcAft>
+                <a:spcPts val="0"/>
+              </a:spcAft>
+            </a:pPr>
+            <a:r>
+              <a:rPr sz="900" b="1">
+                <a:solidFill>
+                  <a:srgbClr val="8B9CB3"/>
+                </a:solidFill>
+                <a:latin typeface="Calibri"/>
+              </a:rPr>
+              <a:t>SLIDE BUDGET</a:t>
+            </a:r>
+          </a:p>
+          <a:p>
+            <a:pPr algn="l">
+              <a:spcAft>
+                <a:spcPts val="0"/>
+              </a:spcAft>
+            </a:pPr>
+            <a:r>
+              <a:rPr sz="2600" b="1">
+                <a:solidFill>
+                  <a:srgbClr val="D4A853"/>
+                </a:solidFill>
+                <a:latin typeface="Calibri"/>
+              </a:rPr>
+              <a:t>1:15</a:t>
+            </a:r>
+          </a:p>
+          <a:p>
+            <a:pPr algn="l">
+              <a:spcAft>
+                <a:spcPts val="0"/>
+              </a:spcAft>
+            </a:pPr>
+            <a:r>
+              <a:rPr sz="900" b="0">
+                <a:solidFill>
+                  <a:srgbClr val="8B9CB3"/>
+                </a:solidFill>
+                <a:latin typeface="Calibri"/>
+              </a:rPr>
+              <a:t>by end 10:00 · left 0:00</a:t>
+            </a:r>
+          </a:p>
+        </p:txBody>
+      </p:sp>
+      <p:sp>
+        <p:nvSpPr>
+          <p:cNvPr id="35" name="Rounded Rectangle 34"/>
+          <p:cNvSpPr/>
+          <p:nvPr/>
+        </p:nvSpPr>
+        <p:spPr>
+          <a:xfrm>
+            <a:off x="502920" y="5961888"/>
+            <a:ext cx="11155680" cy="109728"/>
+          </a:xfrm>
+          <a:prstGeom prst="roundRect">
+            <a:avLst>
+              <a:gd name="adj" fmla="val 50000"/>
+            </a:avLst>
+          </a:prstGeom>
+          <a:solidFill>
+            <a:srgbClr val="243044"/>
+          </a:solidFill>
+          <a:ln>
+            <a:noFill/>
+          </a:ln>
+        </p:spPr>
+        <p:style>
+          <a:lnRef idx="1">
+            <a:schemeClr val="accent1"/>
+          </a:lnRef>
+          <a:fillRef idx="3">
+            <a:schemeClr val="accent1"/>
+          </a:fillRef>
+          <a:effectRef idx="2">
+            <a:schemeClr val="accent1"/>
+          </a:effectRef>
+          <a:fontRef idx="minor">
+            <a:schemeClr val="lt1"/>
+          </a:fontRef>
+        </p:style>
+        <p:txBody>
+          <a:bodyPr rtlCol="0" anchor="ctr"/>
+          <a:lstStyle/>
+          <a:p>
+            <a:pPr algn="ctr"/>
+          </a:p>
+        </p:txBody>
+      </p:sp>
+      <p:sp>
+        <p:nvSpPr>
+          <p:cNvPr id="36" name="Rounded Rectangle 35"/>
+          <p:cNvSpPr/>
+          <p:nvPr/>
+        </p:nvSpPr>
+        <p:spPr>
+          <a:xfrm>
+            <a:off x="502920" y="5961888"/>
+            <a:ext cx="11155680" cy="109728"/>
+          </a:xfrm>
+          <a:prstGeom prst="roundRect">
+            <a:avLst>
+              <a:gd name="adj" fmla="val 50000"/>
+            </a:avLst>
+          </a:prstGeom>
+          <a:solidFill>
+            <a:srgbClr val="D4A853"/>
+          </a:solidFill>
+          <a:ln>
+            <a:noFill/>
+          </a:ln>
+        </p:spPr>
+        <p:style>
+          <a:lnRef idx="1">
+            <a:schemeClr val="accent1"/>
+          </a:lnRef>
+          <a:fillRef idx="3">
+            <a:schemeClr val="accent1"/>
+          </a:fillRef>
+          <a:effectRef idx="2">
+            <a:schemeClr val="accent1"/>
+          </a:effectRef>
+          <a:fontRef idx="minor">
+            <a:schemeClr val="lt1"/>
+          </a:fontRef>
+        </p:style>
+        <p:txBody>
+          <a:bodyPr rtlCol="0" anchor="ctr"/>
+          <a:lstStyle/>
+          <a:p>
+            <a:pPr algn="ctr"/>
+          </a:p>
+        </p:txBody>
+      </p:sp>
+      <p:sp>
+        <p:nvSpPr>
+          <p:cNvPr id="37" name="TextBox 36"/>
+          <p:cNvSpPr txBox="1"/>
+          <p:nvPr/>
+        </p:nvSpPr>
+        <p:spPr>
+          <a:xfrm>
+            <a:off x="502920" y="5760720"/>
+            <a:ext cx="5029200" cy="201168"/>
+          </a:xfrm>
+          <a:prstGeom prst="rect">
+            <a:avLst/>
+          </a:prstGeom>
+          <a:noFill/>
+        </p:spPr>
+        <p:txBody>
+          <a:bodyPr wrap="none">
+            <a:spAutoFit/>
+          </a:bodyPr>
+          <a:lstStyle/>
+          <a:p>
+            <a:pPr algn="l">
+              <a:spcAft>
+                <a:spcPts val="0"/>
+              </a:spcAft>
+            </a:pPr>
+            <a:r>
+              <a:rPr sz="800" b="0">
+                <a:solidFill>
+                  <a:srgbClr val="8B9CB3"/>
+                </a:solidFill>
+                <a:latin typeface="Calibri"/>
+              </a:rPr>
+              <a:t>Countdown bar starts in Slideshow · does not auto-advance — you click when ready</a:t>
             </a:r>
           </a:p>
         </p:txBody>
@@ -16981,6 +19741,62 @@
   <p:clrMapOvr>
     <a:masterClrMapping/>
   </p:clrMapOvr>
+  <p:timing>
+    <p:tnLst>
+      <p:par>
+        <p:cTn id="1" dur="indefinite" restart="never" nodeType="tmRoot">
+          <p:childTnLst>
+            <p:seq concurrent="1" nextAc="seek">
+              <p:cTn id="2" dur="indefinite" nodeType="mainSeq">
+                <p:childTnLst>
+                  <p:par>
+                    <p:cTn id="3" fill="hold">
+                      <p:stCondLst>
+                        <p:cond delay="0"/>
+                      </p:stCondLst>
+                      <p:childTnLst>
+                        <p:par>
+                          <p:cTn id="4" fill="hold">
+                            <p:stCondLst>
+                              <p:cond delay="0"/>
+                            </p:stCondLst>
+                            <p:childTnLst>
+                              <p:animEffect transition="out" filter="wipe(left)">
+                                <p:cBhvr>
+                                  <p:cTn id="5" dur="75000" fill="hold"/>
+                                  <p:tgtEl>
+                                    <p:spTgt spid="36"/>
+                                  </p:tgtEl>
+                                </p:cBhvr>
+                              </p:animEffect>
+                            </p:childTnLst>
+                          </p:cTn>
+                        </p:par>
+                      </p:childTnLst>
+                    </p:cTn>
+                  </p:par>
+                </p:childTnLst>
+              </p:cTn>
+              <p:prevCondLst>
+                <p:cond evt="onPrev" delay="0">
+                  <p:tgtEl>
+                    <p:sldTgt/>
+                  </p:tgtEl>
+                </p:cond>
+              </p:prevCondLst>
+              <p:nextCondLst>
+                <p:cond evt="onNext" delay="0">
+                  <p:tgtEl>
+                    <p:sldTgt/>
+                  </p:tgtEl>
+                </p:cond>
+              </p:nextCondLst>
+            </p:seq>
+          </p:childTnLst>
+        </p:cTn>
+      </p:par>
+    </p:tnLst>
+  </p:timing>
 </p:sld>
 </file>
 

--- a/case-study-2-ao-offering-executive.pptx
+++ b/case-study-2-ao-offering-executive.pptx
@@ -537,7 +537,7 @@
           <a:p/>
           <a:p>
             <a:r>
-              <a:t>ON-SLIDE TIMER: Budget 1:15 for this slide. Gold bar counts down when Slideshow opens (does not auto-advance). By end of this slide you should be at ~1:15 of 10:00 (~8:45 remaining).</a:t>
+              <a:t>ON-SLIDE TIMER: Budget 1:15 for this slide. Gold bar counts down in Slideshow; red MOVE ON appears when budget ends (does not auto-advance). Prefer presenter-timer.html on a second screen for a live stopwatch that records actual seconds per slide. By end of this slide you should be at ~1:15 of 10:00 (~8:45 remaining).</a:t>
             </a:r>
           </a:p>
         </p:txBody>
@@ -635,7 +635,7 @@
           <a:p/>
           <a:p>
             <a:r>
-              <a:t>ON-SLIDE TIMER: Budget 1:15 for this slide. Gold bar counts down when Slideshow opens (does not auto-advance). By end of this slide you should be at ~2:30 of 10:00 (~7:30 remaining).</a:t>
+              <a:t>ON-SLIDE TIMER: Budget 1:15 for this slide. Gold bar counts down in Slideshow; red MOVE ON appears when budget ends (does not auto-advance). Prefer presenter-timer.html on a second screen for a live stopwatch that records actual seconds per slide. By end of this slide you should be at ~2:30 of 10:00 (~7:30 remaining).</a:t>
             </a:r>
           </a:p>
         </p:txBody>
@@ -722,7 +722,7 @@
           <a:p/>
           <a:p>
             <a:r>
-              <a:t>ON-SLIDE TIMER: Budget 1:15 for this slide. Gold bar counts down when Slideshow opens (does not auto-advance). By end of this slide you should be at ~3:45 of 10:00 (~6:15 remaining).</a:t>
+              <a:t>ON-SLIDE TIMER: Budget 1:15 for this slide. Gold bar counts down in Slideshow; red MOVE ON appears when budget ends (does not auto-advance). Prefer presenter-timer.html on a second screen for a live stopwatch that records actual seconds per slide. By end of this slide you should be at ~3:45 of 10:00 (~6:15 remaining).</a:t>
             </a:r>
           </a:p>
         </p:txBody>
@@ -809,7 +809,7 @@
           <a:p/>
           <a:p>
             <a:r>
-              <a:t>ON-SLIDE TIMER: Budget 1:15 for this slide. Gold bar counts down when Slideshow opens (does not auto-advance). By end of this slide you should be at ~5:00 of 10:00 (~5:00 remaining).</a:t>
+              <a:t>ON-SLIDE TIMER: Budget 1:15 for this slide. Gold bar counts down in Slideshow; red MOVE ON appears when budget ends (does not auto-advance). Prefer presenter-timer.html on a second screen for a live stopwatch that records actual seconds per slide. By end of this slide you should be at ~5:00 of 10:00 (~5:00 remaining).</a:t>
             </a:r>
           </a:p>
         </p:txBody>
@@ -896,7 +896,7 @@
           <a:p/>
           <a:p>
             <a:r>
-              <a:t>ON-SLIDE TIMER: Budget 1:00 for this slide. Gold bar counts down when Slideshow opens (does not auto-advance). By end of this slide you should be at ~6:00 of 10:00 (~4:00 remaining).</a:t>
+              <a:t>ON-SLIDE TIMER: Budget 1:00 for this slide. Gold bar counts down in Slideshow; red MOVE ON appears when budget ends (does not auto-advance). Prefer presenter-timer.html on a second screen for a live stopwatch that records actual seconds per slide. By end of this slide you should be at ~6:00 of 10:00 (~4:00 remaining).</a:t>
             </a:r>
           </a:p>
         </p:txBody>
@@ -993,7 +993,7 @@
           <a:p/>
           <a:p>
             <a:r>
-              <a:t>ON-SLIDE TIMER: Budget 1:15 for this slide. Gold bar counts down when Slideshow opens (does not auto-advance). By end of this slide you should be at ~7:15 of 10:00 (~2:45 remaining).</a:t>
+              <a:t>ON-SLIDE TIMER: Budget 1:15 for this slide. Gold bar counts down in Slideshow; red MOVE ON appears when budget ends (does not auto-advance). Prefer presenter-timer.html on a second screen for a live stopwatch that records actual seconds per slide. By end of this slide you should be at ~7:15 of 10:00 (~2:45 remaining).</a:t>
             </a:r>
           </a:p>
         </p:txBody>
@@ -1080,7 +1080,7 @@
           <a:p/>
           <a:p>
             <a:r>
-              <a:t>ON-SLIDE TIMER: Budget 1:30 for this slide. Gold bar counts down when Slideshow opens (does not auto-advance). By end of this slide you should be at ~8:45 of 10:00 (~1:15 remaining).</a:t>
+              <a:t>ON-SLIDE TIMER: Budget 1:30 for this slide. Gold bar counts down in Slideshow; red MOVE ON appears when budget ends (does not auto-advance). Prefer presenter-timer.html on a second screen for a live stopwatch that records actual seconds per slide. By end of this slide you should be at ~8:45 of 10:00 (~1:15 remaining).</a:t>
             </a:r>
           </a:p>
         </p:txBody>
@@ -1188,7 +1188,7 @@
           <a:p/>
           <a:p>
             <a:r>
-              <a:t>ON-SLIDE TIMER: Budget 1:15 for this slide. Gold bar counts down when Slideshow opens (does not auto-advance). By end of this slide you should be at ~10:00 of 10:00 (~0:00 remaining).</a:t>
+              <a:t>ON-SLIDE TIMER: Budget 1:15 for this slide. Gold bar counts down in Slideshow; red MOVE ON appears when budget ends (does not auto-advance). Prefer presenter-timer.html on a second screen for a live stopwatch that records actual seconds per slide. By end of this slide you should be at ~10:00 of 10:00 (~0:00 remaining).</a:t>
             </a:r>
           </a:p>
         </p:txBody>
@@ -4826,6 +4826,22 @@
           <a:p>
             <a:pPr algn="l">
               <a:spcAft>
+                <a:spcPts val="200"/>
+              </a:spcAft>
+            </a:pPr>
+            <a:r>
+              <a:rPr sz="1200" b="0">
+                <a:solidFill>
+                  <a:srgbClr val="8B9CB3"/>
+                </a:solidFill>
+                <a:latin typeface="Calibri"/>
+              </a:rPr>
+              <a:t>Top-right SLIDE BUDGET + gold bar countdown; red MOVE ON when budget ends (Slideshow).</a:t>
+            </a:r>
+          </a:p>
+          <a:p>
+            <a:pPr algn="l">
+              <a:spcAft>
                 <a:spcPts val="0"/>
               </a:spcAft>
             </a:pPr>
@@ -4836,7 +4852,7 @@
                 </a:solidFill>
                 <a:latin typeface="Calibri"/>
               </a:rPr>
-              <a:t>Top-right SLIDE BUDGET + gold bar = live countdown in Slideshow (does not auto-advance).</a:t>
+              <a:t>For a live stopwatch that records actual seconds/slide: open presenter-timer.html on a second screen.</a:t>
             </a:r>
           </a:p>
         </p:txBody>
@@ -5202,7 +5218,61 @@
                 </a:solidFill>
                 <a:latin typeface="Calibri"/>
               </a:rPr>
-              <a:t>Countdown bar starts in Slideshow · does not auto-advance — you click when ready</a:t>
+              <a:t>Countdown starts in Slideshow · red MOVE ON appears when budget ends · does not auto-advance</a:t>
+            </a:r>
+          </a:p>
+        </p:txBody>
+      </p:sp>
+      <p:sp>
+        <p:nvSpPr>
+          <p:cNvPr id="23" name="Rounded Rectangle 22"/>
+          <p:cNvSpPr/>
+          <p:nvPr/>
+        </p:nvSpPr>
+        <p:spPr>
+          <a:xfrm>
+            <a:off x="9189720" y="5614416"/>
+            <a:ext cx="2468880" cy="292608"/>
+          </a:xfrm>
+          <a:prstGeom prst="roundRect">
+            <a:avLst>
+              <a:gd name="adj" fmla="val 20000"/>
+            </a:avLst>
+          </a:prstGeom>
+          <a:solidFill>
+            <a:srgbClr val="F87171"/>
+          </a:solidFill>
+          <a:ln>
+            <a:noFill/>
+          </a:ln>
+        </p:spPr>
+        <p:style>
+          <a:lnRef idx="1">
+            <a:schemeClr val="accent1"/>
+          </a:lnRef>
+          <a:fillRef idx="3">
+            <a:schemeClr val="accent1"/>
+          </a:fillRef>
+          <a:effectRef idx="2">
+            <a:schemeClr val="accent1"/>
+          </a:effectRef>
+          <a:fontRef idx="minor">
+            <a:schemeClr val="lt1"/>
+          </a:fontRef>
+        </p:style>
+        <p:txBody>
+          <a:bodyPr rtlCol="0" anchor="ctr" wrap="none"/>
+          <a:lstStyle/>
+          <a:p>
+            <a:pPr algn="ctr"/>
+            <a:r>
+              <a:rPr sz="1200" b="1">
+                <a:solidFill>
+                  <a:srgbClr val="E6EDF3"/>
+                </a:solidFill>
+                <a:latin typeface="Calibri"/>
+              </a:rPr>
+              <a:t>MOVE ON  →</a:t>
             </a:r>
           </a:p>
         </p:txBody>
@@ -5232,14 +5302,58 @@
                               <p:cond delay="0"/>
                             </p:stCondLst>
                             <p:childTnLst>
+                              <p:set>
+                                <p:cBhvr>
+                                  <p:cTn id="5" dur="1" fill="hold"/>
+                                  <p:tgtEl>
+                                    <p:spTgt spid="23"/>
+                                  </p:tgtEl>
+                                  <p:attrNameLst>
+                                    <p:attrName>style.visibility</p:attrName>
+                                  </p:attrNameLst>
+                                </p:cBhvr>
+                                <p:to>
+                                  <p:strVal val="hidden"/>
+                                </p:to>
+                              </p:set>
                               <p:animEffect transition="out" filter="wipe(left)">
                                 <p:cBhvr>
-                                  <p:cTn id="5" dur="75000" fill="hold"/>
+                                  <p:cTn id="6" dur="75000" fill="hold"/>
                                   <p:tgtEl>
                                     <p:spTgt spid="21"/>
                                   </p:tgtEl>
                                 </p:cBhvr>
                               </p:animEffect>
+                              <p:animEffect transition="in" filter="fade">
+                                <p:cBhvr>
+                                  <p:cTn id="7" dur="400" fill="hold">
+                                    <p:stCondLst>
+                                      <p:cond delay="75000"/>
+                                    </p:stCondLst>
+                                  </p:cTn>
+                                  <p:tgtEl>
+                                    <p:spTgt spid="23"/>
+                                  </p:tgtEl>
+                                </p:cBhvr>
+                              </p:animEffect>
+                              <p:set>
+                                <p:cBhvr>
+                                  <p:cTn id="8" dur="1" fill="hold">
+                                    <p:stCondLst>
+                                      <p:cond delay="75000"/>
+                                    </p:stCondLst>
+                                  </p:cTn>
+                                  <p:tgtEl>
+                                    <p:spTgt spid="23"/>
+                                  </p:tgtEl>
+                                  <p:attrNameLst>
+                                    <p:attrName>style.visibility</p:attrName>
+                                  </p:attrNameLst>
+                                </p:cBhvr>
+                                <p:to>
+                                  <p:strVal val="visible"/>
+                                </p:to>
+                              </p:set>
                             </p:childTnLst>
                           </p:cTn>
                         </p:par>
@@ -7433,7 +7547,61 @@
                 </a:solidFill>
                 <a:latin typeface="Calibri"/>
               </a:rPr>
-              <a:t>Countdown bar starts in Slideshow · does not auto-advance — you click when ready</a:t>
+              <a:t>Countdown starts in Slideshow · red MOVE ON appears when budget ends · does not auto-advance</a:t>
+            </a:r>
+          </a:p>
+        </p:txBody>
+      </p:sp>
+      <p:sp>
+        <p:nvSpPr>
+          <p:cNvPr id="47" name="Rounded Rectangle 46"/>
+          <p:cNvSpPr/>
+          <p:nvPr/>
+        </p:nvSpPr>
+        <p:spPr>
+          <a:xfrm>
+            <a:off x="9189720" y="5614416"/>
+            <a:ext cx="2468880" cy="292608"/>
+          </a:xfrm>
+          <a:prstGeom prst="roundRect">
+            <a:avLst>
+              <a:gd name="adj" fmla="val 20000"/>
+            </a:avLst>
+          </a:prstGeom>
+          <a:solidFill>
+            <a:srgbClr val="F87171"/>
+          </a:solidFill>
+          <a:ln>
+            <a:noFill/>
+          </a:ln>
+        </p:spPr>
+        <p:style>
+          <a:lnRef idx="1">
+            <a:schemeClr val="accent1"/>
+          </a:lnRef>
+          <a:fillRef idx="3">
+            <a:schemeClr val="accent1"/>
+          </a:fillRef>
+          <a:effectRef idx="2">
+            <a:schemeClr val="accent1"/>
+          </a:effectRef>
+          <a:fontRef idx="minor">
+            <a:schemeClr val="lt1"/>
+          </a:fontRef>
+        </p:style>
+        <p:txBody>
+          <a:bodyPr rtlCol="0" anchor="ctr" wrap="none"/>
+          <a:lstStyle/>
+          <a:p>
+            <a:pPr algn="ctr"/>
+            <a:r>
+              <a:rPr sz="1200" b="1">
+                <a:solidFill>
+                  <a:srgbClr val="E6EDF3"/>
+                </a:solidFill>
+                <a:latin typeface="Calibri"/>
+              </a:rPr>
+              <a:t>MOVE ON  →</a:t>
             </a:r>
           </a:p>
         </p:txBody>
@@ -7463,14 +7631,58 @@
                               <p:cond delay="0"/>
                             </p:stCondLst>
                             <p:childTnLst>
+                              <p:set>
+                                <p:cBhvr>
+                                  <p:cTn id="5" dur="1" fill="hold"/>
+                                  <p:tgtEl>
+                                    <p:spTgt spid="47"/>
+                                  </p:tgtEl>
+                                  <p:attrNameLst>
+                                    <p:attrName>style.visibility</p:attrName>
+                                  </p:attrNameLst>
+                                </p:cBhvr>
+                                <p:to>
+                                  <p:strVal val="hidden"/>
+                                </p:to>
+                              </p:set>
                               <p:animEffect transition="out" filter="wipe(left)">
                                 <p:cBhvr>
-                                  <p:cTn id="5" dur="75000" fill="hold"/>
+                                  <p:cTn id="6" dur="75000" fill="hold"/>
                                   <p:tgtEl>
                                     <p:spTgt spid="45"/>
                                   </p:tgtEl>
                                 </p:cBhvr>
                               </p:animEffect>
+                              <p:animEffect transition="in" filter="fade">
+                                <p:cBhvr>
+                                  <p:cTn id="7" dur="400" fill="hold">
+                                    <p:stCondLst>
+                                      <p:cond delay="75000"/>
+                                    </p:stCondLst>
+                                  </p:cTn>
+                                  <p:tgtEl>
+                                    <p:spTgt spid="47"/>
+                                  </p:tgtEl>
+                                </p:cBhvr>
+                              </p:animEffect>
+                              <p:set>
+                                <p:cBhvr>
+                                  <p:cTn id="8" dur="1" fill="hold">
+                                    <p:stCondLst>
+                                      <p:cond delay="75000"/>
+                                    </p:stCondLst>
+                                  </p:cTn>
+                                  <p:tgtEl>
+                                    <p:spTgt spid="47"/>
+                                  </p:tgtEl>
+                                  <p:attrNameLst>
+                                    <p:attrName>style.visibility</p:attrName>
+                                  </p:attrNameLst>
+                                </p:cBhvr>
+                                <p:to>
+                                  <p:strVal val="visible"/>
+                                </p:to>
+                              </p:set>
                             </p:childTnLst>
                           </p:cTn>
                         </p:par>
@@ -9355,7 +9567,61 @@
                 </a:solidFill>
                 <a:latin typeface="Calibri"/>
               </a:rPr>
-              <a:t>Countdown bar starts in Slideshow · does not auto-advance — you click when ready</a:t>
+              <a:t>Countdown starts in Slideshow · red MOVE ON appears when budget ends · does not auto-advance</a:t>
+            </a:r>
+          </a:p>
+        </p:txBody>
+      </p:sp>
+      <p:sp>
+        <p:nvSpPr>
+          <p:cNvPr id="42" name="Rounded Rectangle 41"/>
+          <p:cNvSpPr/>
+          <p:nvPr/>
+        </p:nvSpPr>
+        <p:spPr>
+          <a:xfrm>
+            <a:off x="9189720" y="5614416"/>
+            <a:ext cx="2468880" cy="292608"/>
+          </a:xfrm>
+          <a:prstGeom prst="roundRect">
+            <a:avLst>
+              <a:gd name="adj" fmla="val 20000"/>
+            </a:avLst>
+          </a:prstGeom>
+          <a:solidFill>
+            <a:srgbClr val="F87171"/>
+          </a:solidFill>
+          <a:ln>
+            <a:noFill/>
+          </a:ln>
+        </p:spPr>
+        <p:style>
+          <a:lnRef idx="1">
+            <a:schemeClr val="accent1"/>
+          </a:lnRef>
+          <a:fillRef idx="3">
+            <a:schemeClr val="accent1"/>
+          </a:fillRef>
+          <a:effectRef idx="2">
+            <a:schemeClr val="accent1"/>
+          </a:effectRef>
+          <a:fontRef idx="minor">
+            <a:schemeClr val="lt1"/>
+          </a:fontRef>
+        </p:style>
+        <p:txBody>
+          <a:bodyPr rtlCol="0" anchor="ctr" wrap="none"/>
+          <a:lstStyle/>
+          <a:p>
+            <a:pPr algn="ctr"/>
+            <a:r>
+              <a:rPr sz="1200" b="1">
+                <a:solidFill>
+                  <a:srgbClr val="E6EDF3"/>
+                </a:solidFill>
+                <a:latin typeface="Calibri"/>
+              </a:rPr>
+              <a:t>MOVE ON  →</a:t>
             </a:r>
           </a:p>
         </p:txBody>
@@ -9385,14 +9651,58 @@
                               <p:cond delay="0"/>
                             </p:stCondLst>
                             <p:childTnLst>
+                              <p:set>
+                                <p:cBhvr>
+                                  <p:cTn id="5" dur="1" fill="hold"/>
+                                  <p:tgtEl>
+                                    <p:spTgt spid="42"/>
+                                  </p:tgtEl>
+                                  <p:attrNameLst>
+                                    <p:attrName>style.visibility</p:attrName>
+                                  </p:attrNameLst>
+                                </p:cBhvr>
+                                <p:to>
+                                  <p:strVal val="hidden"/>
+                                </p:to>
+                              </p:set>
                               <p:animEffect transition="out" filter="wipe(left)">
                                 <p:cBhvr>
-                                  <p:cTn id="5" dur="75000" fill="hold"/>
+                                  <p:cTn id="6" dur="75000" fill="hold"/>
                                   <p:tgtEl>
                                     <p:spTgt spid="40"/>
                                   </p:tgtEl>
                                 </p:cBhvr>
                               </p:animEffect>
+                              <p:animEffect transition="in" filter="fade">
+                                <p:cBhvr>
+                                  <p:cTn id="7" dur="400" fill="hold">
+                                    <p:stCondLst>
+                                      <p:cond delay="75000"/>
+                                    </p:stCondLst>
+                                  </p:cTn>
+                                  <p:tgtEl>
+                                    <p:spTgt spid="42"/>
+                                  </p:tgtEl>
+                                </p:cBhvr>
+                              </p:animEffect>
+                              <p:set>
+                                <p:cBhvr>
+                                  <p:cTn id="8" dur="1" fill="hold">
+                                    <p:stCondLst>
+                                      <p:cond delay="75000"/>
+                                    </p:stCondLst>
+                                  </p:cTn>
+                                  <p:tgtEl>
+                                    <p:spTgt spid="42"/>
+                                  </p:tgtEl>
+                                  <p:attrNameLst>
+                                    <p:attrName>style.visibility</p:attrName>
+                                  </p:attrNameLst>
+                                </p:cBhvr>
+                                <p:to>
+                                  <p:strVal val="visible"/>
+                                </p:to>
+                              </p:set>
                             </p:childTnLst>
                           </p:cTn>
                         </p:par>
@@ -11073,7 +11383,61 @@
                 </a:solidFill>
                 <a:latin typeface="Calibri"/>
               </a:rPr>
-              <a:t>Countdown bar starts in Slideshow · does not auto-advance — you click when ready</a:t>
+              <a:t>Countdown starts in Slideshow · red MOVE ON appears when budget ends · does not auto-advance</a:t>
+            </a:r>
+          </a:p>
+        </p:txBody>
+      </p:sp>
+      <p:sp>
+        <p:nvSpPr>
+          <p:cNvPr id="36" name="Rounded Rectangle 35"/>
+          <p:cNvSpPr/>
+          <p:nvPr/>
+        </p:nvSpPr>
+        <p:spPr>
+          <a:xfrm>
+            <a:off x="9189720" y="5614416"/>
+            <a:ext cx="2468880" cy="292608"/>
+          </a:xfrm>
+          <a:prstGeom prst="roundRect">
+            <a:avLst>
+              <a:gd name="adj" fmla="val 20000"/>
+            </a:avLst>
+          </a:prstGeom>
+          <a:solidFill>
+            <a:srgbClr val="F87171"/>
+          </a:solidFill>
+          <a:ln>
+            <a:noFill/>
+          </a:ln>
+        </p:spPr>
+        <p:style>
+          <a:lnRef idx="1">
+            <a:schemeClr val="accent1"/>
+          </a:lnRef>
+          <a:fillRef idx="3">
+            <a:schemeClr val="accent1"/>
+          </a:fillRef>
+          <a:effectRef idx="2">
+            <a:schemeClr val="accent1"/>
+          </a:effectRef>
+          <a:fontRef idx="minor">
+            <a:schemeClr val="lt1"/>
+          </a:fontRef>
+        </p:style>
+        <p:txBody>
+          <a:bodyPr rtlCol="0" anchor="ctr" wrap="none"/>
+          <a:lstStyle/>
+          <a:p>
+            <a:pPr algn="ctr"/>
+            <a:r>
+              <a:rPr sz="1200" b="1">
+                <a:solidFill>
+                  <a:srgbClr val="E6EDF3"/>
+                </a:solidFill>
+                <a:latin typeface="Calibri"/>
+              </a:rPr>
+              <a:t>MOVE ON  →</a:t>
             </a:r>
           </a:p>
         </p:txBody>
@@ -11103,14 +11467,58 @@
                               <p:cond delay="0"/>
                             </p:stCondLst>
                             <p:childTnLst>
+                              <p:set>
+                                <p:cBhvr>
+                                  <p:cTn id="5" dur="1" fill="hold"/>
+                                  <p:tgtEl>
+                                    <p:spTgt spid="36"/>
+                                  </p:tgtEl>
+                                  <p:attrNameLst>
+                                    <p:attrName>style.visibility</p:attrName>
+                                  </p:attrNameLst>
+                                </p:cBhvr>
+                                <p:to>
+                                  <p:strVal val="hidden"/>
+                                </p:to>
+                              </p:set>
                               <p:animEffect transition="out" filter="wipe(left)">
                                 <p:cBhvr>
-                                  <p:cTn id="5" dur="75000" fill="hold"/>
+                                  <p:cTn id="6" dur="75000" fill="hold"/>
                                   <p:tgtEl>
                                     <p:spTgt spid="34"/>
                                   </p:tgtEl>
                                 </p:cBhvr>
                               </p:animEffect>
+                              <p:animEffect transition="in" filter="fade">
+                                <p:cBhvr>
+                                  <p:cTn id="7" dur="400" fill="hold">
+                                    <p:stCondLst>
+                                      <p:cond delay="75000"/>
+                                    </p:stCondLst>
+                                  </p:cTn>
+                                  <p:tgtEl>
+                                    <p:spTgt spid="36"/>
+                                  </p:tgtEl>
+                                </p:cBhvr>
+                              </p:animEffect>
+                              <p:set>
+                                <p:cBhvr>
+                                  <p:cTn id="8" dur="1" fill="hold">
+                                    <p:stCondLst>
+                                      <p:cond delay="75000"/>
+                                    </p:stCondLst>
+                                  </p:cTn>
+                                  <p:tgtEl>
+                                    <p:spTgt spid="36"/>
+                                  </p:tgtEl>
+                                  <p:attrNameLst>
+                                    <p:attrName>style.visibility</p:attrName>
+                                  </p:attrNameLst>
+                                </p:cBhvr>
+                                <p:to>
+                                  <p:strVal val="visible"/>
+                                </p:to>
+                              </p:set>
                             </p:childTnLst>
                           </p:cTn>
                         </p:par>
@@ -13289,7 +13697,61 @@
                 </a:solidFill>
                 <a:latin typeface="Calibri"/>
               </a:rPr>
-              <a:t>Countdown bar starts in Slideshow · does not auto-advance — you click when ready</a:t>
+              <a:t>Countdown starts in Slideshow · red MOVE ON appears when budget ends · does not auto-advance</a:t>
+            </a:r>
+          </a:p>
+        </p:txBody>
+      </p:sp>
+      <p:sp>
+        <p:nvSpPr>
+          <p:cNvPr id="50" name="Rounded Rectangle 49"/>
+          <p:cNvSpPr/>
+          <p:nvPr/>
+        </p:nvSpPr>
+        <p:spPr>
+          <a:xfrm>
+            <a:off x="9189720" y="5614416"/>
+            <a:ext cx="2468880" cy="292608"/>
+          </a:xfrm>
+          <a:prstGeom prst="roundRect">
+            <a:avLst>
+              <a:gd name="adj" fmla="val 20000"/>
+            </a:avLst>
+          </a:prstGeom>
+          <a:solidFill>
+            <a:srgbClr val="F87171"/>
+          </a:solidFill>
+          <a:ln>
+            <a:noFill/>
+          </a:ln>
+        </p:spPr>
+        <p:style>
+          <a:lnRef idx="1">
+            <a:schemeClr val="accent1"/>
+          </a:lnRef>
+          <a:fillRef idx="3">
+            <a:schemeClr val="accent1"/>
+          </a:fillRef>
+          <a:effectRef idx="2">
+            <a:schemeClr val="accent1"/>
+          </a:effectRef>
+          <a:fontRef idx="minor">
+            <a:schemeClr val="lt1"/>
+          </a:fontRef>
+        </p:style>
+        <p:txBody>
+          <a:bodyPr rtlCol="0" anchor="ctr" wrap="none"/>
+          <a:lstStyle/>
+          <a:p>
+            <a:pPr algn="ctr"/>
+            <a:r>
+              <a:rPr sz="1200" b="1">
+                <a:solidFill>
+                  <a:srgbClr val="E6EDF3"/>
+                </a:solidFill>
+                <a:latin typeface="Calibri"/>
+              </a:rPr>
+              <a:t>MOVE ON  →</a:t>
             </a:r>
           </a:p>
         </p:txBody>
@@ -13319,14 +13781,58 @@
                               <p:cond delay="0"/>
                             </p:stCondLst>
                             <p:childTnLst>
+                              <p:set>
+                                <p:cBhvr>
+                                  <p:cTn id="5" dur="1" fill="hold"/>
+                                  <p:tgtEl>
+                                    <p:spTgt spid="50"/>
+                                  </p:tgtEl>
+                                  <p:attrNameLst>
+                                    <p:attrName>style.visibility</p:attrName>
+                                  </p:attrNameLst>
+                                </p:cBhvr>
+                                <p:to>
+                                  <p:strVal val="hidden"/>
+                                </p:to>
+                              </p:set>
                               <p:animEffect transition="out" filter="wipe(left)">
                                 <p:cBhvr>
-                                  <p:cTn id="5" dur="60000" fill="hold"/>
+                                  <p:cTn id="6" dur="60000" fill="hold"/>
                                   <p:tgtEl>
                                     <p:spTgt spid="48"/>
                                   </p:tgtEl>
                                 </p:cBhvr>
                               </p:animEffect>
+                              <p:animEffect transition="in" filter="fade">
+                                <p:cBhvr>
+                                  <p:cTn id="7" dur="400" fill="hold">
+                                    <p:stCondLst>
+                                      <p:cond delay="60000"/>
+                                    </p:stCondLst>
+                                  </p:cTn>
+                                  <p:tgtEl>
+                                    <p:spTgt spid="50"/>
+                                  </p:tgtEl>
+                                </p:cBhvr>
+                              </p:animEffect>
+                              <p:set>
+                                <p:cBhvr>
+                                  <p:cTn id="8" dur="1" fill="hold">
+                                    <p:stCondLst>
+                                      <p:cond delay="60000"/>
+                                    </p:stCondLst>
+                                  </p:cTn>
+                                  <p:tgtEl>
+                                    <p:spTgt spid="50"/>
+                                  </p:tgtEl>
+                                  <p:attrNameLst>
+                                    <p:attrName>style.visibility</p:attrName>
+                                  </p:attrNameLst>
+                                </p:cBhvr>
+                                <p:to>
+                                  <p:strVal val="visible"/>
+                                </p:to>
+                              </p:set>
                             </p:childTnLst>
                           </p:cTn>
                         </p:par>
@@ -15491,7 +15997,61 @@
                 </a:solidFill>
                 <a:latin typeface="Calibri"/>
               </a:rPr>
-              <a:t>Countdown bar starts in Slideshow · does not auto-advance — you click when ready</a:t>
+              <a:t>Countdown starts in Slideshow · red MOVE ON appears when budget ends · does not auto-advance</a:t>
+            </a:r>
+          </a:p>
+        </p:txBody>
+      </p:sp>
+      <p:sp>
+        <p:nvSpPr>
+          <p:cNvPr id="46" name="Rounded Rectangle 45"/>
+          <p:cNvSpPr/>
+          <p:nvPr/>
+        </p:nvSpPr>
+        <p:spPr>
+          <a:xfrm>
+            <a:off x="9189720" y="5614416"/>
+            <a:ext cx="2468880" cy="292608"/>
+          </a:xfrm>
+          <a:prstGeom prst="roundRect">
+            <a:avLst>
+              <a:gd name="adj" fmla="val 20000"/>
+            </a:avLst>
+          </a:prstGeom>
+          <a:solidFill>
+            <a:srgbClr val="F87171"/>
+          </a:solidFill>
+          <a:ln>
+            <a:noFill/>
+          </a:ln>
+        </p:spPr>
+        <p:style>
+          <a:lnRef idx="1">
+            <a:schemeClr val="accent1"/>
+          </a:lnRef>
+          <a:fillRef idx="3">
+            <a:schemeClr val="accent1"/>
+          </a:fillRef>
+          <a:effectRef idx="2">
+            <a:schemeClr val="accent1"/>
+          </a:effectRef>
+          <a:fontRef idx="minor">
+            <a:schemeClr val="lt1"/>
+          </a:fontRef>
+        </p:style>
+        <p:txBody>
+          <a:bodyPr rtlCol="0" anchor="ctr" wrap="none"/>
+          <a:lstStyle/>
+          <a:p>
+            <a:pPr algn="ctr"/>
+            <a:r>
+              <a:rPr sz="1200" b="1">
+                <a:solidFill>
+                  <a:srgbClr val="E6EDF3"/>
+                </a:solidFill>
+                <a:latin typeface="Calibri"/>
+              </a:rPr>
+              <a:t>MOVE ON  →</a:t>
             </a:r>
           </a:p>
         </p:txBody>
@@ -15521,14 +16081,58 @@
                               <p:cond delay="0"/>
                             </p:stCondLst>
                             <p:childTnLst>
+                              <p:set>
+                                <p:cBhvr>
+                                  <p:cTn id="5" dur="1" fill="hold"/>
+                                  <p:tgtEl>
+                                    <p:spTgt spid="46"/>
+                                  </p:tgtEl>
+                                  <p:attrNameLst>
+                                    <p:attrName>style.visibility</p:attrName>
+                                  </p:attrNameLst>
+                                </p:cBhvr>
+                                <p:to>
+                                  <p:strVal val="hidden"/>
+                                </p:to>
+                              </p:set>
                               <p:animEffect transition="out" filter="wipe(left)">
                                 <p:cBhvr>
-                                  <p:cTn id="5" dur="75000" fill="hold"/>
+                                  <p:cTn id="6" dur="75000" fill="hold"/>
                                   <p:tgtEl>
                                     <p:spTgt spid="44"/>
                                   </p:tgtEl>
                                 </p:cBhvr>
                               </p:animEffect>
+                              <p:animEffect transition="in" filter="fade">
+                                <p:cBhvr>
+                                  <p:cTn id="7" dur="400" fill="hold">
+                                    <p:stCondLst>
+                                      <p:cond delay="75000"/>
+                                    </p:stCondLst>
+                                  </p:cTn>
+                                  <p:tgtEl>
+                                    <p:spTgt spid="46"/>
+                                  </p:tgtEl>
+                                </p:cBhvr>
+                              </p:animEffect>
+                              <p:set>
+                                <p:cBhvr>
+                                  <p:cTn id="8" dur="1" fill="hold">
+                                    <p:stCondLst>
+                                      <p:cond delay="75000"/>
+                                    </p:stCondLst>
+                                  </p:cTn>
+                                  <p:tgtEl>
+                                    <p:spTgt spid="46"/>
+                                  </p:tgtEl>
+                                  <p:attrNameLst>
+                                    <p:attrName>style.visibility</p:attrName>
+                                  </p:attrNameLst>
+                                </p:cBhvr>
+                                <p:to>
+                                  <p:strVal val="visible"/>
+                                </p:to>
+                              </p:set>
                             </p:childTnLst>
                           </p:cTn>
                         </p:par>
@@ -18009,7 +18613,61 @@
                 </a:solidFill>
                 <a:latin typeface="Calibri"/>
               </a:rPr>
-              <a:t>Countdown bar starts in Slideshow · does not auto-advance — you click when ready</a:t>
+              <a:t>Countdown starts in Slideshow · red MOVE ON appears when budget ends · does not auto-advance</a:t>
+            </a:r>
+          </a:p>
+        </p:txBody>
+      </p:sp>
+      <p:sp>
+        <p:nvSpPr>
+          <p:cNvPr id="52" name="Rounded Rectangle 51"/>
+          <p:cNvSpPr/>
+          <p:nvPr/>
+        </p:nvSpPr>
+        <p:spPr>
+          <a:xfrm>
+            <a:off x="9189720" y="5614416"/>
+            <a:ext cx="2468880" cy="292608"/>
+          </a:xfrm>
+          <a:prstGeom prst="roundRect">
+            <a:avLst>
+              <a:gd name="adj" fmla="val 20000"/>
+            </a:avLst>
+          </a:prstGeom>
+          <a:solidFill>
+            <a:srgbClr val="F87171"/>
+          </a:solidFill>
+          <a:ln>
+            <a:noFill/>
+          </a:ln>
+        </p:spPr>
+        <p:style>
+          <a:lnRef idx="1">
+            <a:schemeClr val="accent1"/>
+          </a:lnRef>
+          <a:fillRef idx="3">
+            <a:schemeClr val="accent1"/>
+          </a:fillRef>
+          <a:effectRef idx="2">
+            <a:schemeClr val="accent1"/>
+          </a:effectRef>
+          <a:fontRef idx="minor">
+            <a:schemeClr val="lt1"/>
+          </a:fontRef>
+        </p:style>
+        <p:txBody>
+          <a:bodyPr rtlCol="0" anchor="ctr" wrap="none"/>
+          <a:lstStyle/>
+          <a:p>
+            <a:pPr algn="ctr"/>
+            <a:r>
+              <a:rPr sz="1200" b="1">
+                <a:solidFill>
+                  <a:srgbClr val="E6EDF3"/>
+                </a:solidFill>
+                <a:latin typeface="Calibri"/>
+              </a:rPr>
+              <a:t>MOVE ON  →</a:t>
             </a:r>
           </a:p>
         </p:txBody>
@@ -18039,14 +18697,58 @@
                               <p:cond delay="0"/>
                             </p:stCondLst>
                             <p:childTnLst>
+                              <p:set>
+                                <p:cBhvr>
+                                  <p:cTn id="5" dur="1" fill="hold"/>
+                                  <p:tgtEl>
+                                    <p:spTgt spid="52"/>
+                                  </p:tgtEl>
+                                  <p:attrNameLst>
+                                    <p:attrName>style.visibility</p:attrName>
+                                  </p:attrNameLst>
+                                </p:cBhvr>
+                                <p:to>
+                                  <p:strVal val="hidden"/>
+                                </p:to>
+                              </p:set>
                               <p:animEffect transition="out" filter="wipe(left)">
                                 <p:cBhvr>
-                                  <p:cTn id="5" dur="90000" fill="hold"/>
+                                  <p:cTn id="6" dur="90000" fill="hold"/>
                                   <p:tgtEl>
                                     <p:spTgt spid="50"/>
                                   </p:tgtEl>
                                 </p:cBhvr>
                               </p:animEffect>
+                              <p:animEffect transition="in" filter="fade">
+                                <p:cBhvr>
+                                  <p:cTn id="7" dur="400" fill="hold">
+                                    <p:stCondLst>
+                                      <p:cond delay="90000"/>
+                                    </p:stCondLst>
+                                  </p:cTn>
+                                  <p:tgtEl>
+                                    <p:spTgt spid="52"/>
+                                  </p:tgtEl>
+                                </p:cBhvr>
+                              </p:animEffect>
+                              <p:set>
+                                <p:cBhvr>
+                                  <p:cTn id="8" dur="1" fill="hold">
+                                    <p:stCondLst>
+                                      <p:cond delay="90000"/>
+                                    </p:stCondLst>
+                                  </p:cTn>
+                                  <p:tgtEl>
+                                    <p:spTgt spid="52"/>
+                                  </p:tgtEl>
+                                  <p:attrNameLst>
+                                    <p:attrName>style.visibility</p:attrName>
+                                  </p:attrNameLst>
+                                </p:cBhvr>
+                                <p:to>
+                                  <p:strVal val="visible"/>
+                                </p:to>
+                              </p:set>
                             </p:childTnLst>
                           </p:cTn>
                         </p:par>
@@ -19731,7 +20433,61 @@
                 </a:solidFill>
                 <a:latin typeface="Calibri"/>
               </a:rPr>
-              <a:t>Countdown bar starts in Slideshow · does not auto-advance — you click when ready</a:t>
+              <a:t>Countdown starts in Slideshow · red MOVE ON appears when budget ends · does not auto-advance</a:t>
+            </a:r>
+          </a:p>
+        </p:txBody>
+      </p:sp>
+      <p:sp>
+        <p:nvSpPr>
+          <p:cNvPr id="38" name="Rounded Rectangle 37"/>
+          <p:cNvSpPr/>
+          <p:nvPr/>
+        </p:nvSpPr>
+        <p:spPr>
+          <a:xfrm>
+            <a:off x="9189720" y="5614416"/>
+            <a:ext cx="2468880" cy="292608"/>
+          </a:xfrm>
+          <a:prstGeom prst="roundRect">
+            <a:avLst>
+              <a:gd name="adj" fmla="val 20000"/>
+            </a:avLst>
+          </a:prstGeom>
+          <a:solidFill>
+            <a:srgbClr val="F87171"/>
+          </a:solidFill>
+          <a:ln>
+            <a:noFill/>
+          </a:ln>
+        </p:spPr>
+        <p:style>
+          <a:lnRef idx="1">
+            <a:schemeClr val="accent1"/>
+          </a:lnRef>
+          <a:fillRef idx="3">
+            <a:schemeClr val="accent1"/>
+          </a:fillRef>
+          <a:effectRef idx="2">
+            <a:schemeClr val="accent1"/>
+          </a:effectRef>
+          <a:fontRef idx="minor">
+            <a:schemeClr val="lt1"/>
+          </a:fontRef>
+        </p:style>
+        <p:txBody>
+          <a:bodyPr rtlCol="0" anchor="ctr" wrap="none"/>
+          <a:lstStyle/>
+          <a:p>
+            <a:pPr algn="ctr"/>
+            <a:r>
+              <a:rPr sz="1200" b="1">
+                <a:solidFill>
+                  <a:srgbClr val="E6EDF3"/>
+                </a:solidFill>
+                <a:latin typeface="Calibri"/>
+              </a:rPr>
+              <a:t>MOVE ON  →</a:t>
             </a:r>
           </a:p>
         </p:txBody>
@@ -19761,14 +20517,58 @@
                               <p:cond delay="0"/>
                             </p:stCondLst>
                             <p:childTnLst>
+                              <p:set>
+                                <p:cBhvr>
+                                  <p:cTn id="5" dur="1" fill="hold"/>
+                                  <p:tgtEl>
+                                    <p:spTgt spid="38"/>
+                                  </p:tgtEl>
+                                  <p:attrNameLst>
+                                    <p:attrName>style.visibility</p:attrName>
+                                  </p:attrNameLst>
+                                </p:cBhvr>
+                                <p:to>
+                                  <p:strVal val="hidden"/>
+                                </p:to>
+                              </p:set>
                               <p:animEffect transition="out" filter="wipe(left)">
                                 <p:cBhvr>
-                                  <p:cTn id="5" dur="75000" fill="hold"/>
+                                  <p:cTn id="6" dur="75000" fill="hold"/>
                                   <p:tgtEl>
                                     <p:spTgt spid="36"/>
                                   </p:tgtEl>
                                 </p:cBhvr>
                               </p:animEffect>
+                              <p:animEffect transition="in" filter="fade">
+                                <p:cBhvr>
+                                  <p:cTn id="7" dur="400" fill="hold">
+                                    <p:stCondLst>
+                                      <p:cond delay="75000"/>
+                                    </p:stCondLst>
+                                  </p:cTn>
+                                  <p:tgtEl>
+                                    <p:spTgt spid="38"/>
+                                  </p:tgtEl>
+                                </p:cBhvr>
+                              </p:animEffect>
+                              <p:set>
+                                <p:cBhvr>
+                                  <p:cTn id="8" dur="1" fill="hold">
+                                    <p:stCondLst>
+                                      <p:cond delay="75000"/>
+                                    </p:stCondLst>
+                                  </p:cTn>
+                                  <p:tgtEl>
+                                    <p:spTgt spid="38"/>
+                                  </p:tgtEl>
+                                  <p:attrNameLst>
+                                    <p:attrName>style.visibility</p:attrName>
+                                  </p:attrNameLst>
+                                </p:cBhvr>
+                                <p:to>
+                                  <p:strVal val="visible"/>
+                                </p:to>
+                              </p:set>
                             </p:childTnLst>
                           </p:cTn>
                         </p:par>

--- a/case-study-2-ao-offering-executive.pptx
+++ b/case-study-2-ao-offering-executive.pptx
@@ -534,12 +534,6 @@
               <a:t>GLOSSARY: KPI · OKR · TCO · SLA · CPI · NPS · 3PP / third-party products.</a:t>
             </a:r>
           </a:p>
-          <a:p/>
-          <a:p>
-            <a:r>
-              <a:t>ON-SLIDE TIMER: Budget 1:15 for this slide. Gold bar counts down in Slideshow; red MOVE ON appears when budget ends (does not auto-advance). Prefer presenter-timer.html on a second screen for a live stopwatch that records actual seconds per slide. By end of this slide you should be at ~1:15 of 10:00 (~8:45 remaining).</a:t>
-            </a:r>
-          </a:p>
         </p:txBody>
       </p:sp>
       <p:sp>
@@ -632,12 +626,6 @@
               <a:t>GLOSSARY: MTTR = mean time to restore · SDM = Service Delivery Manager · TCO = total cost of ownership.</a:t>
             </a:r>
           </a:p>
-          <a:p/>
-          <a:p>
-            <a:r>
-              <a:t>ON-SLIDE TIMER: Budget 1:15 for this slide. Gold bar counts down in Slideshow; red MOVE ON appears when budget ends (does not auto-advance). Prefer presenter-timer.html on a second screen for a live stopwatch that records actual seconds per slide. By end of this slide you should be at ~2:30 of 10:00 (~7:30 remaining).</a:t>
-            </a:r>
-          </a:p>
         </p:txBody>
       </p:sp>
       <p:sp>
@@ -719,12 +707,6 @@
               <a:t>GLOSSARY: SPOG = single pane of glass · HITL = human-in-the-loop · Shadow mode · Known error.</a:t>
             </a:r>
           </a:p>
-          <a:p/>
-          <a:p>
-            <a:r>
-              <a:t>ON-SLIDE TIMER: Budget 1:15 for this slide. Gold bar counts down in Slideshow; red MOVE ON appears when budget ends (does not auto-advance). Prefer presenter-timer.html on a second screen for a live stopwatch that records actual seconds per slide. By end of this slide you should be at ~3:45 of 10:00 (~6:15 remaining).</a:t>
-            </a:r>
-          </a:p>
         </p:txBody>
       </p:sp>
       <p:sp>
@@ -806,12 +788,6 @@
               <a:t>GLOSSARY: CPI · Soft-ramp · Top offender · P0/P1 · Credit.</a:t>
             </a:r>
           </a:p>
-          <a:p/>
-          <a:p>
-            <a:r>
-              <a:t>ON-SLIDE TIMER: Budget 1:15 for this slide. Gold bar counts down in Slideshow; red MOVE ON appears when budget ends (does not auto-advance). Prefer presenter-timer.html on a second screen for a live stopwatch that records actual seconds per slide. By end of this slide you should be at ~5:00 of 10:00 (~5:00 remaining).</a:t>
-            </a:r>
-          </a:p>
         </p:txBody>
       </p:sp>
       <p:sp>
@@ -893,12 +869,6 @@
               <a:t>GLOSSARY: Adapter · Reuse library · IP = intellectual property.</a:t>
             </a:r>
           </a:p>
-          <a:p/>
-          <a:p>
-            <a:r>
-              <a:t>ON-SLIDE TIMER: Budget 1:00 for this slide. Gold bar counts down in Slideshow; red MOVE ON appears when budget ends (does not auto-advance). Prefer presenter-timer.html on a second screen for a live stopwatch that records actual seconds per slide. By end of this slide you should be at ~6:00 of 10:00 (~4:00 remaining).</a:t>
-            </a:r>
-          </a:p>
         </p:txBody>
       </p:sp>
       <p:sp>
@@ -990,12 +960,6 @@
               <a:t>GLOSSARY: Forward/Reverse shadow · HITL · Pass-gate · Nth logo.</a:t>
             </a:r>
           </a:p>
-          <a:p/>
-          <a:p>
-            <a:r>
-              <a:t>ON-SLIDE TIMER: Budget 1:15 for this slide. Gold bar counts down in Slideshow; red MOVE ON appears when budget ends (does not auto-advance). Prefer presenter-timer.html on a second screen for a live stopwatch that records actual seconds per slide. By end of this slide you should be at ~7:15 of 10:00 (~2:45 remaining).</a:t>
-            </a:r>
-          </a:p>
         </p:txBody>
       </p:sp>
       <p:sp>
@@ -1077,12 +1041,6 @@
               <a:t>GLOSSARY: FTE · B · X · EBIT · Site-mix · Penalty lot · Earn-back.</a:t>
             </a:r>
           </a:p>
-          <a:p/>
-          <a:p>
-            <a:r>
-              <a:t>ON-SLIDE TIMER: Budget 1:30 for this slide. Gold bar counts down in Slideshow; red MOVE ON appears when budget ends (does not auto-advance). Prefer presenter-timer.html on a second screen for a live stopwatch that records actual seconds per slide. By end of this slide you should be at ~8:45 of 10:00 (~1:15 remaining).</a:t>
-            </a:r>
-          </a:p>
         </p:txBody>
       </p:sp>
       <p:sp>
@@ -1183,12 +1141,6 @@
           <a:p>
             <a:r>
               <a:t>• Pilot fails a gate? Do not scale.</a:t>
-            </a:r>
-          </a:p>
-          <a:p/>
-          <a:p>
-            <a:r>
-              <a:t>ON-SLIDE TIMER: Budget 1:15 for this slide. Gold bar counts down in Slideshow; red MOVE ON appears when budget ends (does not auto-advance). Prefer presenter-timer.html on a second screen for a live stopwatch that records actual seconds per slide. By end of this slide you should be at ~10:00 of 10:00 (~0:00 remaining).</a:t>
             </a:r>
           </a:p>
         </p:txBody>
@@ -4285,7 +4237,7 @@
         <p:spPr>
           <a:xfrm>
             <a:off x="502920" y="438912"/>
-            <a:ext cx="8869680" cy="594360"/>
+            <a:ext cx="11155680" cy="594360"/>
           </a:xfrm>
           <a:prstGeom prst="rect">
             <a:avLst/>
@@ -4823,38 +4775,6 @@
               <a:t>4  Reuse library   →   5  Enablement cadence   →   6  Five-year profit-and-loss   →   7  Proof &amp; ask</a:t>
             </a:r>
           </a:p>
-          <a:p>
-            <a:pPr algn="l">
-              <a:spcAft>
-                <a:spcPts val="200"/>
-              </a:spcAft>
-            </a:pPr>
-            <a:r>
-              <a:rPr sz="1200" b="0">
-                <a:solidFill>
-                  <a:srgbClr val="8B9CB3"/>
-                </a:solidFill>
-                <a:latin typeface="Calibri"/>
-              </a:rPr>
-              <a:t>Top-right SLIDE BUDGET + gold bar countdown; red MOVE ON when budget ends (Slideshow).</a:t>
-            </a:r>
-          </a:p>
-          <a:p>
-            <a:pPr algn="l">
-              <a:spcAft>
-                <a:spcPts val="0"/>
-              </a:spcAft>
-            </a:pPr>
-            <a:r>
-              <a:rPr sz="1200" b="0">
-                <a:solidFill>
-                  <a:srgbClr val="8B9CB3"/>
-                </a:solidFill>
-                <a:latin typeface="Calibri"/>
-              </a:rPr>
-              <a:t>For a live stopwatch that records actual seconds/slide: open presenter-timer.html on a second screen.</a:t>
-            </a:r>
-          </a:p>
         </p:txBody>
       </p:sp>
       <p:sp>
@@ -4931,348 +4851,6 @@
                 <a:latin typeface="Calibri"/>
               </a:rPr>
               <a:t>1 / 8</a:t>
-            </a:r>
-          </a:p>
-        </p:txBody>
-      </p:sp>
-      <p:sp>
-        <p:nvSpPr>
-          <p:cNvPr id="17" name="Rounded Rectangle 16"/>
-          <p:cNvSpPr/>
-          <p:nvPr/>
-        </p:nvSpPr>
-        <p:spPr>
-          <a:xfrm>
-            <a:off x="9646920" y="164592"/>
-            <a:ext cx="2331720" cy="868680"/>
-          </a:xfrm>
-          <a:prstGeom prst="roundRect">
-            <a:avLst>
-              <a:gd name="adj" fmla="val 12000"/>
-            </a:avLst>
-          </a:prstGeom>
-          <a:solidFill>
-            <a:srgbClr val="1A2332"/>
-          </a:solidFill>
-          <a:ln>
-            <a:noFill/>
-          </a:ln>
-        </p:spPr>
-        <p:style>
-          <a:lnRef idx="1">
-            <a:schemeClr val="accent1"/>
-          </a:lnRef>
-          <a:fillRef idx="3">
-            <a:schemeClr val="accent1"/>
-          </a:fillRef>
-          <a:effectRef idx="2">
-            <a:schemeClr val="accent1"/>
-          </a:effectRef>
-          <a:fontRef idx="minor">
-            <a:schemeClr val="lt1"/>
-          </a:fontRef>
-        </p:style>
-        <p:txBody>
-          <a:bodyPr rtlCol="0" anchor="ctr"/>
-          <a:lstStyle/>
-          <a:p>
-            <a:pPr algn="ctr"/>
-          </a:p>
-        </p:txBody>
-      </p:sp>
-      <p:sp>
-        <p:nvSpPr>
-          <p:cNvPr id="18" name="Rectangle 17"/>
-          <p:cNvSpPr/>
-          <p:nvPr/>
-        </p:nvSpPr>
-        <p:spPr>
-          <a:xfrm>
-            <a:off x="9646920" y="164592"/>
-            <a:ext cx="73152" cy="868680"/>
-          </a:xfrm>
-          <a:prstGeom prst="rect">
-            <a:avLst/>
-          </a:prstGeom>
-          <a:solidFill>
-            <a:srgbClr val="D4A853"/>
-          </a:solidFill>
-          <a:ln>
-            <a:noFill/>
-          </a:ln>
-        </p:spPr>
-        <p:style>
-          <a:lnRef idx="1">
-            <a:schemeClr val="accent1"/>
-          </a:lnRef>
-          <a:fillRef idx="3">
-            <a:schemeClr val="accent1"/>
-          </a:fillRef>
-          <a:effectRef idx="2">
-            <a:schemeClr val="accent1"/>
-          </a:effectRef>
-          <a:fontRef idx="minor">
-            <a:schemeClr val="lt1"/>
-          </a:fontRef>
-        </p:style>
-        <p:txBody>
-          <a:bodyPr rtlCol="0" anchor="ctr"/>
-          <a:lstStyle/>
-          <a:p>
-            <a:pPr algn="ctr"/>
-          </a:p>
-        </p:txBody>
-      </p:sp>
-      <p:sp>
-        <p:nvSpPr>
-          <p:cNvPr id="19" name="TextBox 18"/>
-          <p:cNvSpPr txBox="1"/>
-          <p:nvPr/>
-        </p:nvSpPr>
-        <p:spPr>
-          <a:xfrm>
-            <a:off x="9811512" y="219456"/>
-            <a:ext cx="2075688" cy="777240"/>
-          </a:xfrm>
-          <a:prstGeom prst="rect">
-            <a:avLst/>
-          </a:prstGeom>
-          <a:noFill/>
-        </p:spPr>
-        <p:txBody>
-          <a:bodyPr wrap="square">
-            <a:spAutoFit/>
-          </a:bodyPr>
-          <a:lstStyle/>
-          <a:p>
-            <a:pPr algn="l">
-              <a:spcAft>
-                <a:spcPts val="0"/>
-              </a:spcAft>
-            </a:pPr>
-            <a:r>
-              <a:rPr sz="900" b="1">
-                <a:solidFill>
-                  <a:srgbClr val="8B9CB3"/>
-                </a:solidFill>
-                <a:latin typeface="Calibri"/>
-              </a:rPr>
-              <a:t>SLIDE BUDGET</a:t>
-            </a:r>
-          </a:p>
-          <a:p>
-            <a:pPr algn="l">
-              <a:spcAft>
-                <a:spcPts val="0"/>
-              </a:spcAft>
-            </a:pPr>
-            <a:r>
-              <a:rPr sz="2600" b="1">
-                <a:solidFill>
-                  <a:srgbClr val="D4A853"/>
-                </a:solidFill>
-                <a:latin typeface="Calibri"/>
-              </a:rPr>
-              <a:t>1:15</a:t>
-            </a:r>
-          </a:p>
-          <a:p>
-            <a:pPr algn="l">
-              <a:spcAft>
-                <a:spcPts val="0"/>
-              </a:spcAft>
-            </a:pPr>
-            <a:r>
-              <a:rPr sz="900" b="0">
-                <a:solidFill>
-                  <a:srgbClr val="8B9CB3"/>
-                </a:solidFill>
-                <a:latin typeface="Calibri"/>
-              </a:rPr>
-              <a:t>by end 1:15 · left 8:45</a:t>
-            </a:r>
-          </a:p>
-        </p:txBody>
-      </p:sp>
-      <p:sp>
-        <p:nvSpPr>
-          <p:cNvPr id="20" name="Rounded Rectangle 19"/>
-          <p:cNvSpPr/>
-          <p:nvPr/>
-        </p:nvSpPr>
-        <p:spPr>
-          <a:xfrm>
-            <a:off x="502920" y="5961888"/>
-            <a:ext cx="11155680" cy="109728"/>
-          </a:xfrm>
-          <a:prstGeom prst="roundRect">
-            <a:avLst>
-              <a:gd name="adj" fmla="val 50000"/>
-            </a:avLst>
-          </a:prstGeom>
-          <a:solidFill>
-            <a:srgbClr val="243044"/>
-          </a:solidFill>
-          <a:ln>
-            <a:noFill/>
-          </a:ln>
-        </p:spPr>
-        <p:style>
-          <a:lnRef idx="1">
-            <a:schemeClr val="accent1"/>
-          </a:lnRef>
-          <a:fillRef idx="3">
-            <a:schemeClr val="accent1"/>
-          </a:fillRef>
-          <a:effectRef idx="2">
-            <a:schemeClr val="accent1"/>
-          </a:effectRef>
-          <a:fontRef idx="minor">
-            <a:schemeClr val="lt1"/>
-          </a:fontRef>
-        </p:style>
-        <p:txBody>
-          <a:bodyPr rtlCol="0" anchor="ctr"/>
-          <a:lstStyle/>
-          <a:p>
-            <a:pPr algn="ctr"/>
-          </a:p>
-        </p:txBody>
-      </p:sp>
-      <p:sp>
-        <p:nvSpPr>
-          <p:cNvPr id="21" name="Rounded Rectangle 20"/>
-          <p:cNvSpPr/>
-          <p:nvPr/>
-        </p:nvSpPr>
-        <p:spPr>
-          <a:xfrm>
-            <a:off x="502920" y="5961888"/>
-            <a:ext cx="11155680" cy="109728"/>
-          </a:xfrm>
-          <a:prstGeom prst="roundRect">
-            <a:avLst>
-              <a:gd name="adj" fmla="val 50000"/>
-            </a:avLst>
-          </a:prstGeom>
-          <a:solidFill>
-            <a:srgbClr val="D4A853"/>
-          </a:solidFill>
-          <a:ln>
-            <a:noFill/>
-          </a:ln>
-        </p:spPr>
-        <p:style>
-          <a:lnRef idx="1">
-            <a:schemeClr val="accent1"/>
-          </a:lnRef>
-          <a:fillRef idx="3">
-            <a:schemeClr val="accent1"/>
-          </a:fillRef>
-          <a:effectRef idx="2">
-            <a:schemeClr val="accent1"/>
-          </a:effectRef>
-          <a:fontRef idx="minor">
-            <a:schemeClr val="lt1"/>
-          </a:fontRef>
-        </p:style>
-        <p:txBody>
-          <a:bodyPr rtlCol="0" anchor="ctr"/>
-          <a:lstStyle/>
-          <a:p>
-            <a:pPr algn="ctr"/>
-          </a:p>
-        </p:txBody>
-      </p:sp>
-      <p:sp>
-        <p:nvSpPr>
-          <p:cNvPr id="22" name="TextBox 21"/>
-          <p:cNvSpPr txBox="1"/>
-          <p:nvPr/>
-        </p:nvSpPr>
-        <p:spPr>
-          <a:xfrm>
-            <a:off x="502920" y="5760720"/>
-            <a:ext cx="5029200" cy="201168"/>
-          </a:xfrm>
-          <a:prstGeom prst="rect">
-            <a:avLst/>
-          </a:prstGeom>
-          <a:noFill/>
-        </p:spPr>
-        <p:txBody>
-          <a:bodyPr wrap="none">
-            <a:spAutoFit/>
-          </a:bodyPr>
-          <a:lstStyle/>
-          <a:p>
-            <a:pPr algn="l">
-              <a:spcAft>
-                <a:spcPts val="0"/>
-              </a:spcAft>
-            </a:pPr>
-            <a:r>
-              <a:rPr sz="800" b="0">
-                <a:solidFill>
-                  <a:srgbClr val="8B9CB3"/>
-                </a:solidFill>
-                <a:latin typeface="Calibri"/>
-              </a:rPr>
-              <a:t>Countdown starts in Slideshow · red MOVE ON appears when budget ends · does not auto-advance</a:t>
-            </a:r>
-          </a:p>
-        </p:txBody>
-      </p:sp>
-      <p:sp>
-        <p:nvSpPr>
-          <p:cNvPr id="23" name="Rounded Rectangle 22"/>
-          <p:cNvSpPr/>
-          <p:nvPr/>
-        </p:nvSpPr>
-        <p:spPr>
-          <a:xfrm>
-            <a:off x="9189720" y="5614416"/>
-            <a:ext cx="2468880" cy="292608"/>
-          </a:xfrm>
-          <a:prstGeom prst="roundRect">
-            <a:avLst>
-              <a:gd name="adj" fmla="val 20000"/>
-            </a:avLst>
-          </a:prstGeom>
-          <a:solidFill>
-            <a:srgbClr val="F87171"/>
-          </a:solidFill>
-          <a:ln>
-            <a:noFill/>
-          </a:ln>
-        </p:spPr>
-        <p:style>
-          <a:lnRef idx="1">
-            <a:schemeClr val="accent1"/>
-          </a:lnRef>
-          <a:fillRef idx="3">
-            <a:schemeClr val="accent1"/>
-          </a:fillRef>
-          <a:effectRef idx="2">
-            <a:schemeClr val="accent1"/>
-          </a:effectRef>
-          <a:fontRef idx="minor">
-            <a:schemeClr val="lt1"/>
-          </a:fontRef>
-        </p:style>
-        <p:txBody>
-          <a:bodyPr rtlCol="0" anchor="ctr" wrap="none"/>
-          <a:lstStyle/>
-          <a:p>
-            <a:pPr algn="ctr"/>
-            <a:r>
-              <a:rPr sz="1200" b="1">
-                <a:solidFill>
-                  <a:srgbClr val="E6EDF3"/>
-                </a:solidFill>
-                <a:latin typeface="Calibri"/>
-              </a:rPr>
-              <a:t>MOVE ON  →</a:t>
             </a:r>
           </a:p>
         </p:txBody>
@@ -5282,106 +4860,6 @@
   <p:clrMapOvr>
     <a:masterClrMapping/>
   </p:clrMapOvr>
-  <p:timing>
-    <p:tnLst>
-      <p:par>
-        <p:cTn id="1" dur="indefinite" restart="never" nodeType="tmRoot">
-          <p:childTnLst>
-            <p:seq concurrent="1" nextAc="seek">
-              <p:cTn id="2" dur="indefinite" nodeType="mainSeq">
-                <p:childTnLst>
-                  <p:par>
-                    <p:cTn id="3" fill="hold">
-                      <p:stCondLst>
-                        <p:cond delay="0"/>
-                      </p:stCondLst>
-                      <p:childTnLst>
-                        <p:par>
-                          <p:cTn id="4" fill="hold">
-                            <p:stCondLst>
-                              <p:cond delay="0"/>
-                            </p:stCondLst>
-                            <p:childTnLst>
-                              <p:set>
-                                <p:cBhvr>
-                                  <p:cTn id="5" dur="1" fill="hold"/>
-                                  <p:tgtEl>
-                                    <p:spTgt spid="23"/>
-                                  </p:tgtEl>
-                                  <p:attrNameLst>
-                                    <p:attrName>style.visibility</p:attrName>
-                                  </p:attrNameLst>
-                                </p:cBhvr>
-                                <p:to>
-                                  <p:strVal val="hidden"/>
-                                </p:to>
-                              </p:set>
-                              <p:animEffect transition="out" filter="wipe(left)">
-                                <p:cBhvr>
-                                  <p:cTn id="6" dur="75000" fill="hold"/>
-                                  <p:tgtEl>
-                                    <p:spTgt spid="21"/>
-                                  </p:tgtEl>
-                                </p:cBhvr>
-                              </p:animEffect>
-                              <p:animEffect transition="in" filter="fade">
-                                <p:cBhvr>
-                                  <p:cTn id="7" dur="400" fill="hold">
-                                    <p:stCondLst>
-                                      <p:cond delay="75000"/>
-                                    </p:stCondLst>
-                                  </p:cTn>
-                                  <p:tgtEl>
-                                    <p:spTgt spid="23"/>
-                                  </p:tgtEl>
-                                </p:cBhvr>
-                              </p:animEffect>
-                              <p:set>
-                                <p:cBhvr>
-                                  <p:cTn id="8" dur="1" fill="hold">
-                                    <p:stCondLst>
-                                      <p:cond delay="75000"/>
-                                    </p:stCondLst>
-                                  </p:cTn>
-                                  <p:tgtEl>
-                                    <p:spTgt spid="23"/>
-                                  </p:tgtEl>
-                                  <p:attrNameLst>
-                                    <p:attrName>style.visibility</p:attrName>
-                                  </p:attrNameLst>
-                                </p:cBhvr>
-                                <p:to>
-                                  <p:strVal val="visible"/>
-                                </p:to>
-                              </p:set>
-                            </p:childTnLst>
-                          </p:cTn>
-                        </p:par>
-                      </p:childTnLst>
-                    </p:cTn>
-                  </p:par>
-                </p:childTnLst>
-              </p:cTn>
-              <p:prevCondLst>
-                <p:cond evt="onPrev" delay="0">
-                  <p:tgtEl>
-                    <p:sldTgt/>
-                  </p:tgtEl>
-                </p:cond>
-              </p:prevCondLst>
-              <p:nextCondLst>
-                <p:cond evt="onNext" delay="0">
-                  <p:tgtEl>
-                    <p:sldTgt/>
-                  </p:tgtEl>
-                </p:cond>
-              </p:nextCondLst>
-            </p:seq>
-          </p:childTnLst>
-        </p:cTn>
-      </p:par>
-    </p:tnLst>
-  </p:timing>
 </p:sld>
 </file>
 
@@ -5486,7 +4964,7 @@
         <p:spPr>
           <a:xfrm>
             <a:off x="502920" y="438912"/>
-            <a:ext cx="8869680" cy="594360"/>
+            <a:ext cx="11155680" cy="594360"/>
           </a:xfrm>
           <a:prstGeom prst="rect">
             <a:avLst/>
@@ -7264,453 +6742,11 @@
           </a:p>
         </p:txBody>
       </p:sp>
-      <p:sp>
-        <p:nvSpPr>
-          <p:cNvPr id="41" name="Rounded Rectangle 40"/>
-          <p:cNvSpPr/>
-          <p:nvPr/>
-        </p:nvSpPr>
-        <p:spPr>
-          <a:xfrm>
-            <a:off x="9646920" y="164592"/>
-            <a:ext cx="2331720" cy="868680"/>
-          </a:xfrm>
-          <a:prstGeom prst="roundRect">
-            <a:avLst>
-              <a:gd name="adj" fmla="val 12000"/>
-            </a:avLst>
-          </a:prstGeom>
-          <a:solidFill>
-            <a:srgbClr val="1A2332"/>
-          </a:solidFill>
-          <a:ln>
-            <a:noFill/>
-          </a:ln>
-        </p:spPr>
-        <p:style>
-          <a:lnRef idx="1">
-            <a:schemeClr val="accent1"/>
-          </a:lnRef>
-          <a:fillRef idx="3">
-            <a:schemeClr val="accent1"/>
-          </a:fillRef>
-          <a:effectRef idx="2">
-            <a:schemeClr val="accent1"/>
-          </a:effectRef>
-          <a:fontRef idx="minor">
-            <a:schemeClr val="lt1"/>
-          </a:fontRef>
-        </p:style>
-        <p:txBody>
-          <a:bodyPr rtlCol="0" anchor="ctr"/>
-          <a:lstStyle/>
-          <a:p>
-            <a:pPr algn="ctr"/>
-          </a:p>
-        </p:txBody>
-      </p:sp>
-      <p:sp>
-        <p:nvSpPr>
-          <p:cNvPr id="42" name="Rectangle 41"/>
-          <p:cNvSpPr/>
-          <p:nvPr/>
-        </p:nvSpPr>
-        <p:spPr>
-          <a:xfrm>
-            <a:off x="9646920" y="164592"/>
-            <a:ext cx="73152" cy="868680"/>
-          </a:xfrm>
-          <a:prstGeom prst="rect">
-            <a:avLst/>
-          </a:prstGeom>
-          <a:solidFill>
-            <a:srgbClr val="D4A853"/>
-          </a:solidFill>
-          <a:ln>
-            <a:noFill/>
-          </a:ln>
-        </p:spPr>
-        <p:style>
-          <a:lnRef idx="1">
-            <a:schemeClr val="accent1"/>
-          </a:lnRef>
-          <a:fillRef idx="3">
-            <a:schemeClr val="accent1"/>
-          </a:fillRef>
-          <a:effectRef idx="2">
-            <a:schemeClr val="accent1"/>
-          </a:effectRef>
-          <a:fontRef idx="minor">
-            <a:schemeClr val="lt1"/>
-          </a:fontRef>
-        </p:style>
-        <p:txBody>
-          <a:bodyPr rtlCol="0" anchor="ctr"/>
-          <a:lstStyle/>
-          <a:p>
-            <a:pPr algn="ctr"/>
-          </a:p>
-        </p:txBody>
-      </p:sp>
-      <p:sp>
-        <p:nvSpPr>
-          <p:cNvPr id="43" name="TextBox 42"/>
-          <p:cNvSpPr txBox="1"/>
-          <p:nvPr/>
-        </p:nvSpPr>
-        <p:spPr>
-          <a:xfrm>
-            <a:off x="9811512" y="219456"/>
-            <a:ext cx="2075688" cy="777240"/>
-          </a:xfrm>
-          <a:prstGeom prst="rect">
-            <a:avLst/>
-          </a:prstGeom>
-          <a:noFill/>
-        </p:spPr>
-        <p:txBody>
-          <a:bodyPr wrap="square">
-            <a:spAutoFit/>
-          </a:bodyPr>
-          <a:lstStyle/>
-          <a:p>
-            <a:pPr algn="l">
-              <a:spcAft>
-                <a:spcPts val="0"/>
-              </a:spcAft>
-            </a:pPr>
-            <a:r>
-              <a:rPr sz="900" b="1">
-                <a:solidFill>
-                  <a:srgbClr val="8B9CB3"/>
-                </a:solidFill>
-                <a:latin typeface="Calibri"/>
-              </a:rPr>
-              <a:t>SLIDE BUDGET</a:t>
-            </a:r>
-          </a:p>
-          <a:p>
-            <a:pPr algn="l">
-              <a:spcAft>
-                <a:spcPts val="0"/>
-              </a:spcAft>
-            </a:pPr>
-            <a:r>
-              <a:rPr sz="2600" b="1">
-                <a:solidFill>
-                  <a:srgbClr val="D4A853"/>
-                </a:solidFill>
-                <a:latin typeface="Calibri"/>
-              </a:rPr>
-              <a:t>1:15</a:t>
-            </a:r>
-          </a:p>
-          <a:p>
-            <a:pPr algn="l">
-              <a:spcAft>
-                <a:spcPts val="0"/>
-              </a:spcAft>
-            </a:pPr>
-            <a:r>
-              <a:rPr sz="900" b="0">
-                <a:solidFill>
-                  <a:srgbClr val="8B9CB3"/>
-                </a:solidFill>
-                <a:latin typeface="Calibri"/>
-              </a:rPr>
-              <a:t>by end 2:30 · left 7:30</a:t>
-            </a:r>
-          </a:p>
-        </p:txBody>
-      </p:sp>
-      <p:sp>
-        <p:nvSpPr>
-          <p:cNvPr id="44" name="Rounded Rectangle 43"/>
-          <p:cNvSpPr/>
-          <p:nvPr/>
-        </p:nvSpPr>
-        <p:spPr>
-          <a:xfrm>
-            <a:off x="502920" y="5961888"/>
-            <a:ext cx="11155680" cy="109728"/>
-          </a:xfrm>
-          <a:prstGeom prst="roundRect">
-            <a:avLst>
-              <a:gd name="adj" fmla="val 50000"/>
-            </a:avLst>
-          </a:prstGeom>
-          <a:solidFill>
-            <a:srgbClr val="243044"/>
-          </a:solidFill>
-          <a:ln>
-            <a:noFill/>
-          </a:ln>
-        </p:spPr>
-        <p:style>
-          <a:lnRef idx="1">
-            <a:schemeClr val="accent1"/>
-          </a:lnRef>
-          <a:fillRef idx="3">
-            <a:schemeClr val="accent1"/>
-          </a:fillRef>
-          <a:effectRef idx="2">
-            <a:schemeClr val="accent1"/>
-          </a:effectRef>
-          <a:fontRef idx="minor">
-            <a:schemeClr val="lt1"/>
-          </a:fontRef>
-        </p:style>
-        <p:txBody>
-          <a:bodyPr rtlCol="0" anchor="ctr"/>
-          <a:lstStyle/>
-          <a:p>
-            <a:pPr algn="ctr"/>
-          </a:p>
-        </p:txBody>
-      </p:sp>
-      <p:sp>
-        <p:nvSpPr>
-          <p:cNvPr id="45" name="Rounded Rectangle 44"/>
-          <p:cNvSpPr/>
-          <p:nvPr/>
-        </p:nvSpPr>
-        <p:spPr>
-          <a:xfrm>
-            <a:off x="502920" y="5961888"/>
-            <a:ext cx="11155680" cy="109728"/>
-          </a:xfrm>
-          <a:prstGeom prst="roundRect">
-            <a:avLst>
-              <a:gd name="adj" fmla="val 50000"/>
-            </a:avLst>
-          </a:prstGeom>
-          <a:solidFill>
-            <a:srgbClr val="D4A853"/>
-          </a:solidFill>
-          <a:ln>
-            <a:noFill/>
-          </a:ln>
-        </p:spPr>
-        <p:style>
-          <a:lnRef idx="1">
-            <a:schemeClr val="accent1"/>
-          </a:lnRef>
-          <a:fillRef idx="3">
-            <a:schemeClr val="accent1"/>
-          </a:fillRef>
-          <a:effectRef idx="2">
-            <a:schemeClr val="accent1"/>
-          </a:effectRef>
-          <a:fontRef idx="minor">
-            <a:schemeClr val="lt1"/>
-          </a:fontRef>
-        </p:style>
-        <p:txBody>
-          <a:bodyPr rtlCol="0" anchor="ctr"/>
-          <a:lstStyle/>
-          <a:p>
-            <a:pPr algn="ctr"/>
-          </a:p>
-        </p:txBody>
-      </p:sp>
-      <p:sp>
-        <p:nvSpPr>
-          <p:cNvPr id="46" name="TextBox 45"/>
-          <p:cNvSpPr txBox="1"/>
-          <p:nvPr/>
-        </p:nvSpPr>
-        <p:spPr>
-          <a:xfrm>
-            <a:off x="502920" y="5760720"/>
-            <a:ext cx="5029200" cy="201168"/>
-          </a:xfrm>
-          <a:prstGeom prst="rect">
-            <a:avLst/>
-          </a:prstGeom>
-          <a:noFill/>
-        </p:spPr>
-        <p:txBody>
-          <a:bodyPr wrap="none">
-            <a:spAutoFit/>
-          </a:bodyPr>
-          <a:lstStyle/>
-          <a:p>
-            <a:pPr algn="l">
-              <a:spcAft>
-                <a:spcPts val="0"/>
-              </a:spcAft>
-            </a:pPr>
-            <a:r>
-              <a:rPr sz="800" b="0">
-                <a:solidFill>
-                  <a:srgbClr val="8B9CB3"/>
-                </a:solidFill>
-                <a:latin typeface="Calibri"/>
-              </a:rPr>
-              <a:t>Countdown starts in Slideshow · red MOVE ON appears when budget ends · does not auto-advance</a:t>
-            </a:r>
-          </a:p>
-        </p:txBody>
-      </p:sp>
-      <p:sp>
-        <p:nvSpPr>
-          <p:cNvPr id="47" name="Rounded Rectangle 46"/>
-          <p:cNvSpPr/>
-          <p:nvPr/>
-        </p:nvSpPr>
-        <p:spPr>
-          <a:xfrm>
-            <a:off x="9189720" y="5614416"/>
-            <a:ext cx="2468880" cy="292608"/>
-          </a:xfrm>
-          <a:prstGeom prst="roundRect">
-            <a:avLst>
-              <a:gd name="adj" fmla="val 20000"/>
-            </a:avLst>
-          </a:prstGeom>
-          <a:solidFill>
-            <a:srgbClr val="F87171"/>
-          </a:solidFill>
-          <a:ln>
-            <a:noFill/>
-          </a:ln>
-        </p:spPr>
-        <p:style>
-          <a:lnRef idx="1">
-            <a:schemeClr val="accent1"/>
-          </a:lnRef>
-          <a:fillRef idx="3">
-            <a:schemeClr val="accent1"/>
-          </a:fillRef>
-          <a:effectRef idx="2">
-            <a:schemeClr val="accent1"/>
-          </a:effectRef>
-          <a:fontRef idx="minor">
-            <a:schemeClr val="lt1"/>
-          </a:fontRef>
-        </p:style>
-        <p:txBody>
-          <a:bodyPr rtlCol="0" anchor="ctr" wrap="none"/>
-          <a:lstStyle/>
-          <a:p>
-            <a:pPr algn="ctr"/>
-            <a:r>
-              <a:rPr sz="1200" b="1">
-                <a:solidFill>
-                  <a:srgbClr val="E6EDF3"/>
-                </a:solidFill>
-                <a:latin typeface="Calibri"/>
-              </a:rPr>
-              <a:t>MOVE ON  →</a:t>
-            </a:r>
-          </a:p>
-        </p:txBody>
-      </p:sp>
     </p:spTree>
   </p:cSld>
   <p:clrMapOvr>
     <a:masterClrMapping/>
   </p:clrMapOvr>
-  <p:timing>
-    <p:tnLst>
-      <p:par>
-        <p:cTn id="1" dur="indefinite" restart="never" nodeType="tmRoot">
-          <p:childTnLst>
-            <p:seq concurrent="1" nextAc="seek">
-              <p:cTn id="2" dur="indefinite" nodeType="mainSeq">
-                <p:childTnLst>
-                  <p:par>
-                    <p:cTn id="3" fill="hold">
-                      <p:stCondLst>
-                        <p:cond delay="0"/>
-                      </p:stCondLst>
-                      <p:childTnLst>
-                        <p:par>
-                          <p:cTn id="4" fill="hold">
-                            <p:stCondLst>
-                              <p:cond delay="0"/>
-                            </p:stCondLst>
-                            <p:childTnLst>
-                              <p:set>
-                                <p:cBhvr>
-                                  <p:cTn id="5" dur="1" fill="hold"/>
-                                  <p:tgtEl>
-                                    <p:spTgt spid="47"/>
-                                  </p:tgtEl>
-                                  <p:attrNameLst>
-                                    <p:attrName>style.visibility</p:attrName>
-                                  </p:attrNameLst>
-                                </p:cBhvr>
-                                <p:to>
-                                  <p:strVal val="hidden"/>
-                                </p:to>
-                              </p:set>
-                              <p:animEffect transition="out" filter="wipe(left)">
-                                <p:cBhvr>
-                                  <p:cTn id="6" dur="75000" fill="hold"/>
-                                  <p:tgtEl>
-                                    <p:spTgt spid="45"/>
-                                  </p:tgtEl>
-                                </p:cBhvr>
-                              </p:animEffect>
-                              <p:animEffect transition="in" filter="fade">
-                                <p:cBhvr>
-                                  <p:cTn id="7" dur="400" fill="hold">
-                                    <p:stCondLst>
-                                      <p:cond delay="75000"/>
-                                    </p:stCondLst>
-                                  </p:cTn>
-                                  <p:tgtEl>
-                                    <p:spTgt spid="47"/>
-                                  </p:tgtEl>
-                                </p:cBhvr>
-                              </p:animEffect>
-                              <p:set>
-                                <p:cBhvr>
-                                  <p:cTn id="8" dur="1" fill="hold">
-                                    <p:stCondLst>
-                                      <p:cond delay="75000"/>
-                                    </p:stCondLst>
-                                  </p:cTn>
-                                  <p:tgtEl>
-                                    <p:spTgt spid="47"/>
-                                  </p:tgtEl>
-                                  <p:attrNameLst>
-                                    <p:attrName>style.visibility</p:attrName>
-                                  </p:attrNameLst>
-                                </p:cBhvr>
-                                <p:to>
-                                  <p:strVal val="visible"/>
-                                </p:to>
-                              </p:set>
-                            </p:childTnLst>
-                          </p:cTn>
-                        </p:par>
-                      </p:childTnLst>
-                    </p:cTn>
-                  </p:par>
-                </p:childTnLst>
-              </p:cTn>
-              <p:prevCondLst>
-                <p:cond evt="onPrev" delay="0">
-                  <p:tgtEl>
-                    <p:sldTgt/>
-                  </p:tgtEl>
-                </p:cond>
-              </p:prevCondLst>
-              <p:nextCondLst>
-                <p:cond evt="onNext" delay="0">
-                  <p:tgtEl>
-                    <p:sldTgt/>
-                  </p:tgtEl>
-                </p:cond>
-              </p:nextCondLst>
-            </p:seq>
-          </p:childTnLst>
-        </p:cTn>
-      </p:par>
-    </p:tnLst>
-  </p:timing>
 </p:sld>
 </file>
 
@@ -7815,7 +6851,7 @@
         <p:spPr>
           <a:xfrm>
             <a:off x="502920" y="438912"/>
-            <a:ext cx="8869680" cy="594360"/>
+            <a:ext cx="11155680" cy="594360"/>
           </a:xfrm>
           <a:prstGeom prst="rect">
             <a:avLst/>
@@ -9284,453 +8320,11 @@
           </a:p>
         </p:txBody>
       </p:sp>
-      <p:sp>
-        <p:nvSpPr>
-          <p:cNvPr id="36" name="Rounded Rectangle 35"/>
-          <p:cNvSpPr/>
-          <p:nvPr/>
-        </p:nvSpPr>
-        <p:spPr>
-          <a:xfrm>
-            <a:off x="9646920" y="164592"/>
-            <a:ext cx="2331720" cy="868680"/>
-          </a:xfrm>
-          <a:prstGeom prst="roundRect">
-            <a:avLst>
-              <a:gd name="adj" fmla="val 12000"/>
-            </a:avLst>
-          </a:prstGeom>
-          <a:solidFill>
-            <a:srgbClr val="1A2332"/>
-          </a:solidFill>
-          <a:ln>
-            <a:noFill/>
-          </a:ln>
-        </p:spPr>
-        <p:style>
-          <a:lnRef idx="1">
-            <a:schemeClr val="accent1"/>
-          </a:lnRef>
-          <a:fillRef idx="3">
-            <a:schemeClr val="accent1"/>
-          </a:fillRef>
-          <a:effectRef idx="2">
-            <a:schemeClr val="accent1"/>
-          </a:effectRef>
-          <a:fontRef idx="minor">
-            <a:schemeClr val="lt1"/>
-          </a:fontRef>
-        </p:style>
-        <p:txBody>
-          <a:bodyPr rtlCol="0" anchor="ctr"/>
-          <a:lstStyle/>
-          <a:p>
-            <a:pPr algn="ctr"/>
-          </a:p>
-        </p:txBody>
-      </p:sp>
-      <p:sp>
-        <p:nvSpPr>
-          <p:cNvPr id="37" name="Rectangle 36"/>
-          <p:cNvSpPr/>
-          <p:nvPr/>
-        </p:nvSpPr>
-        <p:spPr>
-          <a:xfrm>
-            <a:off x="9646920" y="164592"/>
-            <a:ext cx="73152" cy="868680"/>
-          </a:xfrm>
-          <a:prstGeom prst="rect">
-            <a:avLst/>
-          </a:prstGeom>
-          <a:solidFill>
-            <a:srgbClr val="D4A853"/>
-          </a:solidFill>
-          <a:ln>
-            <a:noFill/>
-          </a:ln>
-        </p:spPr>
-        <p:style>
-          <a:lnRef idx="1">
-            <a:schemeClr val="accent1"/>
-          </a:lnRef>
-          <a:fillRef idx="3">
-            <a:schemeClr val="accent1"/>
-          </a:fillRef>
-          <a:effectRef idx="2">
-            <a:schemeClr val="accent1"/>
-          </a:effectRef>
-          <a:fontRef idx="minor">
-            <a:schemeClr val="lt1"/>
-          </a:fontRef>
-        </p:style>
-        <p:txBody>
-          <a:bodyPr rtlCol="0" anchor="ctr"/>
-          <a:lstStyle/>
-          <a:p>
-            <a:pPr algn="ctr"/>
-          </a:p>
-        </p:txBody>
-      </p:sp>
-      <p:sp>
-        <p:nvSpPr>
-          <p:cNvPr id="38" name="TextBox 37"/>
-          <p:cNvSpPr txBox="1"/>
-          <p:nvPr/>
-        </p:nvSpPr>
-        <p:spPr>
-          <a:xfrm>
-            <a:off x="9811512" y="219456"/>
-            <a:ext cx="2075688" cy="777240"/>
-          </a:xfrm>
-          <a:prstGeom prst="rect">
-            <a:avLst/>
-          </a:prstGeom>
-          <a:noFill/>
-        </p:spPr>
-        <p:txBody>
-          <a:bodyPr wrap="square">
-            <a:spAutoFit/>
-          </a:bodyPr>
-          <a:lstStyle/>
-          <a:p>
-            <a:pPr algn="l">
-              <a:spcAft>
-                <a:spcPts val="0"/>
-              </a:spcAft>
-            </a:pPr>
-            <a:r>
-              <a:rPr sz="900" b="1">
-                <a:solidFill>
-                  <a:srgbClr val="8B9CB3"/>
-                </a:solidFill>
-                <a:latin typeface="Calibri"/>
-              </a:rPr>
-              <a:t>SLIDE BUDGET</a:t>
-            </a:r>
-          </a:p>
-          <a:p>
-            <a:pPr algn="l">
-              <a:spcAft>
-                <a:spcPts val="0"/>
-              </a:spcAft>
-            </a:pPr>
-            <a:r>
-              <a:rPr sz="2600" b="1">
-                <a:solidFill>
-                  <a:srgbClr val="D4A853"/>
-                </a:solidFill>
-                <a:latin typeface="Calibri"/>
-              </a:rPr>
-              <a:t>1:15</a:t>
-            </a:r>
-          </a:p>
-          <a:p>
-            <a:pPr algn="l">
-              <a:spcAft>
-                <a:spcPts val="0"/>
-              </a:spcAft>
-            </a:pPr>
-            <a:r>
-              <a:rPr sz="900" b="0">
-                <a:solidFill>
-                  <a:srgbClr val="8B9CB3"/>
-                </a:solidFill>
-                <a:latin typeface="Calibri"/>
-              </a:rPr>
-              <a:t>by end 3:45 · left 6:15</a:t>
-            </a:r>
-          </a:p>
-        </p:txBody>
-      </p:sp>
-      <p:sp>
-        <p:nvSpPr>
-          <p:cNvPr id="39" name="Rounded Rectangle 38"/>
-          <p:cNvSpPr/>
-          <p:nvPr/>
-        </p:nvSpPr>
-        <p:spPr>
-          <a:xfrm>
-            <a:off x="502920" y="5961888"/>
-            <a:ext cx="11155680" cy="109728"/>
-          </a:xfrm>
-          <a:prstGeom prst="roundRect">
-            <a:avLst>
-              <a:gd name="adj" fmla="val 50000"/>
-            </a:avLst>
-          </a:prstGeom>
-          <a:solidFill>
-            <a:srgbClr val="243044"/>
-          </a:solidFill>
-          <a:ln>
-            <a:noFill/>
-          </a:ln>
-        </p:spPr>
-        <p:style>
-          <a:lnRef idx="1">
-            <a:schemeClr val="accent1"/>
-          </a:lnRef>
-          <a:fillRef idx="3">
-            <a:schemeClr val="accent1"/>
-          </a:fillRef>
-          <a:effectRef idx="2">
-            <a:schemeClr val="accent1"/>
-          </a:effectRef>
-          <a:fontRef idx="minor">
-            <a:schemeClr val="lt1"/>
-          </a:fontRef>
-        </p:style>
-        <p:txBody>
-          <a:bodyPr rtlCol="0" anchor="ctr"/>
-          <a:lstStyle/>
-          <a:p>
-            <a:pPr algn="ctr"/>
-          </a:p>
-        </p:txBody>
-      </p:sp>
-      <p:sp>
-        <p:nvSpPr>
-          <p:cNvPr id="40" name="Rounded Rectangle 39"/>
-          <p:cNvSpPr/>
-          <p:nvPr/>
-        </p:nvSpPr>
-        <p:spPr>
-          <a:xfrm>
-            <a:off x="502920" y="5961888"/>
-            <a:ext cx="11155680" cy="109728"/>
-          </a:xfrm>
-          <a:prstGeom prst="roundRect">
-            <a:avLst>
-              <a:gd name="adj" fmla="val 50000"/>
-            </a:avLst>
-          </a:prstGeom>
-          <a:solidFill>
-            <a:srgbClr val="D4A853"/>
-          </a:solidFill>
-          <a:ln>
-            <a:noFill/>
-          </a:ln>
-        </p:spPr>
-        <p:style>
-          <a:lnRef idx="1">
-            <a:schemeClr val="accent1"/>
-          </a:lnRef>
-          <a:fillRef idx="3">
-            <a:schemeClr val="accent1"/>
-          </a:fillRef>
-          <a:effectRef idx="2">
-            <a:schemeClr val="accent1"/>
-          </a:effectRef>
-          <a:fontRef idx="minor">
-            <a:schemeClr val="lt1"/>
-          </a:fontRef>
-        </p:style>
-        <p:txBody>
-          <a:bodyPr rtlCol="0" anchor="ctr"/>
-          <a:lstStyle/>
-          <a:p>
-            <a:pPr algn="ctr"/>
-          </a:p>
-        </p:txBody>
-      </p:sp>
-      <p:sp>
-        <p:nvSpPr>
-          <p:cNvPr id="41" name="TextBox 40"/>
-          <p:cNvSpPr txBox="1"/>
-          <p:nvPr/>
-        </p:nvSpPr>
-        <p:spPr>
-          <a:xfrm>
-            <a:off x="502920" y="5760720"/>
-            <a:ext cx="5029200" cy="201168"/>
-          </a:xfrm>
-          <a:prstGeom prst="rect">
-            <a:avLst/>
-          </a:prstGeom>
-          <a:noFill/>
-        </p:spPr>
-        <p:txBody>
-          <a:bodyPr wrap="none">
-            <a:spAutoFit/>
-          </a:bodyPr>
-          <a:lstStyle/>
-          <a:p>
-            <a:pPr algn="l">
-              <a:spcAft>
-                <a:spcPts val="0"/>
-              </a:spcAft>
-            </a:pPr>
-            <a:r>
-              <a:rPr sz="800" b="0">
-                <a:solidFill>
-                  <a:srgbClr val="8B9CB3"/>
-                </a:solidFill>
-                <a:latin typeface="Calibri"/>
-              </a:rPr>
-              <a:t>Countdown starts in Slideshow · red MOVE ON appears when budget ends · does not auto-advance</a:t>
-            </a:r>
-          </a:p>
-        </p:txBody>
-      </p:sp>
-      <p:sp>
-        <p:nvSpPr>
-          <p:cNvPr id="42" name="Rounded Rectangle 41"/>
-          <p:cNvSpPr/>
-          <p:nvPr/>
-        </p:nvSpPr>
-        <p:spPr>
-          <a:xfrm>
-            <a:off x="9189720" y="5614416"/>
-            <a:ext cx="2468880" cy="292608"/>
-          </a:xfrm>
-          <a:prstGeom prst="roundRect">
-            <a:avLst>
-              <a:gd name="adj" fmla="val 20000"/>
-            </a:avLst>
-          </a:prstGeom>
-          <a:solidFill>
-            <a:srgbClr val="F87171"/>
-          </a:solidFill>
-          <a:ln>
-            <a:noFill/>
-          </a:ln>
-        </p:spPr>
-        <p:style>
-          <a:lnRef idx="1">
-            <a:schemeClr val="accent1"/>
-          </a:lnRef>
-          <a:fillRef idx="3">
-            <a:schemeClr val="accent1"/>
-          </a:fillRef>
-          <a:effectRef idx="2">
-            <a:schemeClr val="accent1"/>
-          </a:effectRef>
-          <a:fontRef idx="minor">
-            <a:schemeClr val="lt1"/>
-          </a:fontRef>
-        </p:style>
-        <p:txBody>
-          <a:bodyPr rtlCol="0" anchor="ctr" wrap="none"/>
-          <a:lstStyle/>
-          <a:p>
-            <a:pPr algn="ctr"/>
-            <a:r>
-              <a:rPr sz="1200" b="1">
-                <a:solidFill>
-                  <a:srgbClr val="E6EDF3"/>
-                </a:solidFill>
-                <a:latin typeface="Calibri"/>
-              </a:rPr>
-              <a:t>MOVE ON  →</a:t>
-            </a:r>
-          </a:p>
-        </p:txBody>
-      </p:sp>
     </p:spTree>
   </p:cSld>
   <p:clrMapOvr>
     <a:masterClrMapping/>
   </p:clrMapOvr>
-  <p:timing>
-    <p:tnLst>
-      <p:par>
-        <p:cTn id="1" dur="indefinite" restart="never" nodeType="tmRoot">
-          <p:childTnLst>
-            <p:seq concurrent="1" nextAc="seek">
-              <p:cTn id="2" dur="indefinite" nodeType="mainSeq">
-                <p:childTnLst>
-                  <p:par>
-                    <p:cTn id="3" fill="hold">
-                      <p:stCondLst>
-                        <p:cond delay="0"/>
-                      </p:stCondLst>
-                      <p:childTnLst>
-                        <p:par>
-                          <p:cTn id="4" fill="hold">
-                            <p:stCondLst>
-                              <p:cond delay="0"/>
-                            </p:stCondLst>
-                            <p:childTnLst>
-                              <p:set>
-                                <p:cBhvr>
-                                  <p:cTn id="5" dur="1" fill="hold"/>
-                                  <p:tgtEl>
-                                    <p:spTgt spid="42"/>
-                                  </p:tgtEl>
-                                  <p:attrNameLst>
-                                    <p:attrName>style.visibility</p:attrName>
-                                  </p:attrNameLst>
-                                </p:cBhvr>
-                                <p:to>
-                                  <p:strVal val="hidden"/>
-                                </p:to>
-                              </p:set>
-                              <p:animEffect transition="out" filter="wipe(left)">
-                                <p:cBhvr>
-                                  <p:cTn id="6" dur="75000" fill="hold"/>
-                                  <p:tgtEl>
-                                    <p:spTgt spid="40"/>
-                                  </p:tgtEl>
-                                </p:cBhvr>
-                              </p:animEffect>
-                              <p:animEffect transition="in" filter="fade">
-                                <p:cBhvr>
-                                  <p:cTn id="7" dur="400" fill="hold">
-                                    <p:stCondLst>
-                                      <p:cond delay="75000"/>
-                                    </p:stCondLst>
-                                  </p:cTn>
-                                  <p:tgtEl>
-                                    <p:spTgt spid="42"/>
-                                  </p:tgtEl>
-                                </p:cBhvr>
-                              </p:animEffect>
-                              <p:set>
-                                <p:cBhvr>
-                                  <p:cTn id="8" dur="1" fill="hold">
-                                    <p:stCondLst>
-                                      <p:cond delay="75000"/>
-                                    </p:stCondLst>
-                                  </p:cTn>
-                                  <p:tgtEl>
-                                    <p:spTgt spid="42"/>
-                                  </p:tgtEl>
-                                  <p:attrNameLst>
-                                    <p:attrName>style.visibility</p:attrName>
-                                  </p:attrNameLst>
-                                </p:cBhvr>
-                                <p:to>
-                                  <p:strVal val="visible"/>
-                                </p:to>
-                              </p:set>
-                            </p:childTnLst>
-                          </p:cTn>
-                        </p:par>
-                      </p:childTnLst>
-                    </p:cTn>
-                  </p:par>
-                </p:childTnLst>
-              </p:cTn>
-              <p:prevCondLst>
-                <p:cond evt="onPrev" delay="0">
-                  <p:tgtEl>
-                    <p:sldTgt/>
-                  </p:tgtEl>
-                </p:cond>
-              </p:prevCondLst>
-              <p:nextCondLst>
-                <p:cond evt="onNext" delay="0">
-                  <p:tgtEl>
-                    <p:sldTgt/>
-                  </p:tgtEl>
-                </p:cond>
-              </p:nextCondLst>
-            </p:seq>
-          </p:childTnLst>
-        </p:cTn>
-      </p:par>
-    </p:tnLst>
-  </p:timing>
 </p:sld>
 </file>
 
@@ -9835,7 +8429,7 @@
         <p:spPr>
           <a:xfrm>
             <a:off x="502920" y="438912"/>
-            <a:ext cx="8869680" cy="594360"/>
+            <a:ext cx="11155680" cy="594360"/>
           </a:xfrm>
           <a:prstGeom prst="rect">
             <a:avLst/>
@@ -11100,453 +9694,11 @@
           </a:p>
         </p:txBody>
       </p:sp>
-      <p:sp>
-        <p:nvSpPr>
-          <p:cNvPr id="30" name="Rounded Rectangle 29"/>
-          <p:cNvSpPr/>
-          <p:nvPr/>
-        </p:nvSpPr>
-        <p:spPr>
-          <a:xfrm>
-            <a:off x="9646920" y="164592"/>
-            <a:ext cx="2331720" cy="868680"/>
-          </a:xfrm>
-          <a:prstGeom prst="roundRect">
-            <a:avLst>
-              <a:gd name="adj" fmla="val 12000"/>
-            </a:avLst>
-          </a:prstGeom>
-          <a:solidFill>
-            <a:srgbClr val="1A2332"/>
-          </a:solidFill>
-          <a:ln>
-            <a:noFill/>
-          </a:ln>
-        </p:spPr>
-        <p:style>
-          <a:lnRef idx="1">
-            <a:schemeClr val="accent1"/>
-          </a:lnRef>
-          <a:fillRef idx="3">
-            <a:schemeClr val="accent1"/>
-          </a:fillRef>
-          <a:effectRef idx="2">
-            <a:schemeClr val="accent1"/>
-          </a:effectRef>
-          <a:fontRef idx="minor">
-            <a:schemeClr val="lt1"/>
-          </a:fontRef>
-        </p:style>
-        <p:txBody>
-          <a:bodyPr rtlCol="0" anchor="ctr"/>
-          <a:lstStyle/>
-          <a:p>
-            <a:pPr algn="ctr"/>
-          </a:p>
-        </p:txBody>
-      </p:sp>
-      <p:sp>
-        <p:nvSpPr>
-          <p:cNvPr id="31" name="Rectangle 30"/>
-          <p:cNvSpPr/>
-          <p:nvPr/>
-        </p:nvSpPr>
-        <p:spPr>
-          <a:xfrm>
-            <a:off x="9646920" y="164592"/>
-            <a:ext cx="73152" cy="868680"/>
-          </a:xfrm>
-          <a:prstGeom prst="rect">
-            <a:avLst/>
-          </a:prstGeom>
-          <a:solidFill>
-            <a:srgbClr val="D4A853"/>
-          </a:solidFill>
-          <a:ln>
-            <a:noFill/>
-          </a:ln>
-        </p:spPr>
-        <p:style>
-          <a:lnRef idx="1">
-            <a:schemeClr val="accent1"/>
-          </a:lnRef>
-          <a:fillRef idx="3">
-            <a:schemeClr val="accent1"/>
-          </a:fillRef>
-          <a:effectRef idx="2">
-            <a:schemeClr val="accent1"/>
-          </a:effectRef>
-          <a:fontRef idx="minor">
-            <a:schemeClr val="lt1"/>
-          </a:fontRef>
-        </p:style>
-        <p:txBody>
-          <a:bodyPr rtlCol="0" anchor="ctr"/>
-          <a:lstStyle/>
-          <a:p>
-            <a:pPr algn="ctr"/>
-          </a:p>
-        </p:txBody>
-      </p:sp>
-      <p:sp>
-        <p:nvSpPr>
-          <p:cNvPr id="32" name="TextBox 31"/>
-          <p:cNvSpPr txBox="1"/>
-          <p:nvPr/>
-        </p:nvSpPr>
-        <p:spPr>
-          <a:xfrm>
-            <a:off x="9811512" y="219456"/>
-            <a:ext cx="2075688" cy="777240"/>
-          </a:xfrm>
-          <a:prstGeom prst="rect">
-            <a:avLst/>
-          </a:prstGeom>
-          <a:noFill/>
-        </p:spPr>
-        <p:txBody>
-          <a:bodyPr wrap="square">
-            <a:spAutoFit/>
-          </a:bodyPr>
-          <a:lstStyle/>
-          <a:p>
-            <a:pPr algn="l">
-              <a:spcAft>
-                <a:spcPts val="0"/>
-              </a:spcAft>
-            </a:pPr>
-            <a:r>
-              <a:rPr sz="900" b="1">
-                <a:solidFill>
-                  <a:srgbClr val="8B9CB3"/>
-                </a:solidFill>
-                <a:latin typeface="Calibri"/>
-              </a:rPr>
-              <a:t>SLIDE BUDGET</a:t>
-            </a:r>
-          </a:p>
-          <a:p>
-            <a:pPr algn="l">
-              <a:spcAft>
-                <a:spcPts val="0"/>
-              </a:spcAft>
-            </a:pPr>
-            <a:r>
-              <a:rPr sz="2600" b="1">
-                <a:solidFill>
-                  <a:srgbClr val="D4A853"/>
-                </a:solidFill>
-                <a:latin typeface="Calibri"/>
-              </a:rPr>
-              <a:t>1:15</a:t>
-            </a:r>
-          </a:p>
-          <a:p>
-            <a:pPr algn="l">
-              <a:spcAft>
-                <a:spcPts val="0"/>
-              </a:spcAft>
-            </a:pPr>
-            <a:r>
-              <a:rPr sz="900" b="0">
-                <a:solidFill>
-                  <a:srgbClr val="8B9CB3"/>
-                </a:solidFill>
-                <a:latin typeface="Calibri"/>
-              </a:rPr>
-              <a:t>by end 5:00 · left 5:00</a:t>
-            </a:r>
-          </a:p>
-        </p:txBody>
-      </p:sp>
-      <p:sp>
-        <p:nvSpPr>
-          <p:cNvPr id="33" name="Rounded Rectangle 32"/>
-          <p:cNvSpPr/>
-          <p:nvPr/>
-        </p:nvSpPr>
-        <p:spPr>
-          <a:xfrm>
-            <a:off x="502920" y="5961888"/>
-            <a:ext cx="11155680" cy="109728"/>
-          </a:xfrm>
-          <a:prstGeom prst="roundRect">
-            <a:avLst>
-              <a:gd name="adj" fmla="val 50000"/>
-            </a:avLst>
-          </a:prstGeom>
-          <a:solidFill>
-            <a:srgbClr val="243044"/>
-          </a:solidFill>
-          <a:ln>
-            <a:noFill/>
-          </a:ln>
-        </p:spPr>
-        <p:style>
-          <a:lnRef idx="1">
-            <a:schemeClr val="accent1"/>
-          </a:lnRef>
-          <a:fillRef idx="3">
-            <a:schemeClr val="accent1"/>
-          </a:fillRef>
-          <a:effectRef idx="2">
-            <a:schemeClr val="accent1"/>
-          </a:effectRef>
-          <a:fontRef idx="minor">
-            <a:schemeClr val="lt1"/>
-          </a:fontRef>
-        </p:style>
-        <p:txBody>
-          <a:bodyPr rtlCol="0" anchor="ctr"/>
-          <a:lstStyle/>
-          <a:p>
-            <a:pPr algn="ctr"/>
-          </a:p>
-        </p:txBody>
-      </p:sp>
-      <p:sp>
-        <p:nvSpPr>
-          <p:cNvPr id="34" name="Rounded Rectangle 33"/>
-          <p:cNvSpPr/>
-          <p:nvPr/>
-        </p:nvSpPr>
-        <p:spPr>
-          <a:xfrm>
-            <a:off x="502920" y="5961888"/>
-            <a:ext cx="11155680" cy="109728"/>
-          </a:xfrm>
-          <a:prstGeom prst="roundRect">
-            <a:avLst>
-              <a:gd name="adj" fmla="val 50000"/>
-            </a:avLst>
-          </a:prstGeom>
-          <a:solidFill>
-            <a:srgbClr val="D4A853"/>
-          </a:solidFill>
-          <a:ln>
-            <a:noFill/>
-          </a:ln>
-        </p:spPr>
-        <p:style>
-          <a:lnRef idx="1">
-            <a:schemeClr val="accent1"/>
-          </a:lnRef>
-          <a:fillRef idx="3">
-            <a:schemeClr val="accent1"/>
-          </a:fillRef>
-          <a:effectRef idx="2">
-            <a:schemeClr val="accent1"/>
-          </a:effectRef>
-          <a:fontRef idx="minor">
-            <a:schemeClr val="lt1"/>
-          </a:fontRef>
-        </p:style>
-        <p:txBody>
-          <a:bodyPr rtlCol="0" anchor="ctr"/>
-          <a:lstStyle/>
-          <a:p>
-            <a:pPr algn="ctr"/>
-          </a:p>
-        </p:txBody>
-      </p:sp>
-      <p:sp>
-        <p:nvSpPr>
-          <p:cNvPr id="35" name="TextBox 34"/>
-          <p:cNvSpPr txBox="1"/>
-          <p:nvPr/>
-        </p:nvSpPr>
-        <p:spPr>
-          <a:xfrm>
-            <a:off x="502920" y="5760720"/>
-            <a:ext cx="5029200" cy="201168"/>
-          </a:xfrm>
-          <a:prstGeom prst="rect">
-            <a:avLst/>
-          </a:prstGeom>
-          <a:noFill/>
-        </p:spPr>
-        <p:txBody>
-          <a:bodyPr wrap="none">
-            <a:spAutoFit/>
-          </a:bodyPr>
-          <a:lstStyle/>
-          <a:p>
-            <a:pPr algn="l">
-              <a:spcAft>
-                <a:spcPts val="0"/>
-              </a:spcAft>
-            </a:pPr>
-            <a:r>
-              <a:rPr sz="800" b="0">
-                <a:solidFill>
-                  <a:srgbClr val="8B9CB3"/>
-                </a:solidFill>
-                <a:latin typeface="Calibri"/>
-              </a:rPr>
-              <a:t>Countdown starts in Slideshow · red MOVE ON appears when budget ends · does not auto-advance</a:t>
-            </a:r>
-          </a:p>
-        </p:txBody>
-      </p:sp>
-      <p:sp>
-        <p:nvSpPr>
-          <p:cNvPr id="36" name="Rounded Rectangle 35"/>
-          <p:cNvSpPr/>
-          <p:nvPr/>
-        </p:nvSpPr>
-        <p:spPr>
-          <a:xfrm>
-            <a:off x="9189720" y="5614416"/>
-            <a:ext cx="2468880" cy="292608"/>
-          </a:xfrm>
-          <a:prstGeom prst="roundRect">
-            <a:avLst>
-              <a:gd name="adj" fmla="val 20000"/>
-            </a:avLst>
-          </a:prstGeom>
-          <a:solidFill>
-            <a:srgbClr val="F87171"/>
-          </a:solidFill>
-          <a:ln>
-            <a:noFill/>
-          </a:ln>
-        </p:spPr>
-        <p:style>
-          <a:lnRef idx="1">
-            <a:schemeClr val="accent1"/>
-          </a:lnRef>
-          <a:fillRef idx="3">
-            <a:schemeClr val="accent1"/>
-          </a:fillRef>
-          <a:effectRef idx="2">
-            <a:schemeClr val="accent1"/>
-          </a:effectRef>
-          <a:fontRef idx="minor">
-            <a:schemeClr val="lt1"/>
-          </a:fontRef>
-        </p:style>
-        <p:txBody>
-          <a:bodyPr rtlCol="0" anchor="ctr" wrap="none"/>
-          <a:lstStyle/>
-          <a:p>
-            <a:pPr algn="ctr"/>
-            <a:r>
-              <a:rPr sz="1200" b="1">
-                <a:solidFill>
-                  <a:srgbClr val="E6EDF3"/>
-                </a:solidFill>
-                <a:latin typeface="Calibri"/>
-              </a:rPr>
-              <a:t>MOVE ON  →</a:t>
-            </a:r>
-          </a:p>
-        </p:txBody>
-      </p:sp>
     </p:spTree>
   </p:cSld>
   <p:clrMapOvr>
     <a:masterClrMapping/>
   </p:clrMapOvr>
-  <p:timing>
-    <p:tnLst>
-      <p:par>
-        <p:cTn id="1" dur="indefinite" restart="never" nodeType="tmRoot">
-          <p:childTnLst>
-            <p:seq concurrent="1" nextAc="seek">
-              <p:cTn id="2" dur="indefinite" nodeType="mainSeq">
-                <p:childTnLst>
-                  <p:par>
-                    <p:cTn id="3" fill="hold">
-                      <p:stCondLst>
-                        <p:cond delay="0"/>
-                      </p:stCondLst>
-                      <p:childTnLst>
-                        <p:par>
-                          <p:cTn id="4" fill="hold">
-                            <p:stCondLst>
-                              <p:cond delay="0"/>
-                            </p:stCondLst>
-                            <p:childTnLst>
-                              <p:set>
-                                <p:cBhvr>
-                                  <p:cTn id="5" dur="1" fill="hold"/>
-                                  <p:tgtEl>
-                                    <p:spTgt spid="36"/>
-                                  </p:tgtEl>
-                                  <p:attrNameLst>
-                                    <p:attrName>style.visibility</p:attrName>
-                                  </p:attrNameLst>
-                                </p:cBhvr>
-                                <p:to>
-                                  <p:strVal val="hidden"/>
-                                </p:to>
-                              </p:set>
-                              <p:animEffect transition="out" filter="wipe(left)">
-                                <p:cBhvr>
-                                  <p:cTn id="6" dur="75000" fill="hold"/>
-                                  <p:tgtEl>
-                                    <p:spTgt spid="34"/>
-                                  </p:tgtEl>
-                                </p:cBhvr>
-                              </p:animEffect>
-                              <p:animEffect transition="in" filter="fade">
-                                <p:cBhvr>
-                                  <p:cTn id="7" dur="400" fill="hold">
-                                    <p:stCondLst>
-                                      <p:cond delay="75000"/>
-                                    </p:stCondLst>
-                                  </p:cTn>
-                                  <p:tgtEl>
-                                    <p:spTgt spid="36"/>
-                                  </p:tgtEl>
-                                </p:cBhvr>
-                              </p:animEffect>
-                              <p:set>
-                                <p:cBhvr>
-                                  <p:cTn id="8" dur="1" fill="hold">
-                                    <p:stCondLst>
-                                      <p:cond delay="75000"/>
-                                    </p:stCondLst>
-                                  </p:cTn>
-                                  <p:tgtEl>
-                                    <p:spTgt spid="36"/>
-                                  </p:tgtEl>
-                                  <p:attrNameLst>
-                                    <p:attrName>style.visibility</p:attrName>
-                                  </p:attrNameLst>
-                                </p:cBhvr>
-                                <p:to>
-                                  <p:strVal val="visible"/>
-                                </p:to>
-                              </p:set>
-                            </p:childTnLst>
-                          </p:cTn>
-                        </p:par>
-                      </p:childTnLst>
-                    </p:cTn>
-                  </p:par>
-                </p:childTnLst>
-              </p:cTn>
-              <p:prevCondLst>
-                <p:cond evt="onPrev" delay="0">
-                  <p:tgtEl>
-                    <p:sldTgt/>
-                  </p:tgtEl>
-                </p:cond>
-              </p:prevCondLst>
-              <p:nextCondLst>
-                <p:cond evt="onNext" delay="0">
-                  <p:tgtEl>
-                    <p:sldTgt/>
-                  </p:tgtEl>
-                </p:cond>
-              </p:nextCondLst>
-            </p:seq>
-          </p:childTnLst>
-        </p:cTn>
-      </p:par>
-    </p:tnLst>
-  </p:timing>
 </p:sld>
 </file>
 
@@ -11651,7 +9803,7 @@
         <p:spPr>
           <a:xfrm>
             <a:off x="502920" y="438912"/>
-            <a:ext cx="8869680" cy="594360"/>
+            <a:ext cx="11155680" cy="594360"/>
           </a:xfrm>
           <a:prstGeom prst="rect">
             <a:avLst/>
@@ -13414,453 +11566,11 @@
           </a:p>
         </p:txBody>
       </p:sp>
-      <p:sp>
-        <p:nvSpPr>
-          <p:cNvPr id="44" name="Rounded Rectangle 43"/>
-          <p:cNvSpPr/>
-          <p:nvPr/>
-        </p:nvSpPr>
-        <p:spPr>
-          <a:xfrm>
-            <a:off x="9646920" y="164592"/>
-            <a:ext cx="2331720" cy="868680"/>
-          </a:xfrm>
-          <a:prstGeom prst="roundRect">
-            <a:avLst>
-              <a:gd name="adj" fmla="val 12000"/>
-            </a:avLst>
-          </a:prstGeom>
-          <a:solidFill>
-            <a:srgbClr val="1A2332"/>
-          </a:solidFill>
-          <a:ln>
-            <a:noFill/>
-          </a:ln>
-        </p:spPr>
-        <p:style>
-          <a:lnRef idx="1">
-            <a:schemeClr val="accent1"/>
-          </a:lnRef>
-          <a:fillRef idx="3">
-            <a:schemeClr val="accent1"/>
-          </a:fillRef>
-          <a:effectRef idx="2">
-            <a:schemeClr val="accent1"/>
-          </a:effectRef>
-          <a:fontRef idx="minor">
-            <a:schemeClr val="lt1"/>
-          </a:fontRef>
-        </p:style>
-        <p:txBody>
-          <a:bodyPr rtlCol="0" anchor="ctr"/>
-          <a:lstStyle/>
-          <a:p>
-            <a:pPr algn="ctr"/>
-          </a:p>
-        </p:txBody>
-      </p:sp>
-      <p:sp>
-        <p:nvSpPr>
-          <p:cNvPr id="45" name="Rectangle 44"/>
-          <p:cNvSpPr/>
-          <p:nvPr/>
-        </p:nvSpPr>
-        <p:spPr>
-          <a:xfrm>
-            <a:off x="9646920" y="164592"/>
-            <a:ext cx="73152" cy="868680"/>
-          </a:xfrm>
-          <a:prstGeom prst="rect">
-            <a:avLst/>
-          </a:prstGeom>
-          <a:solidFill>
-            <a:srgbClr val="D4A853"/>
-          </a:solidFill>
-          <a:ln>
-            <a:noFill/>
-          </a:ln>
-        </p:spPr>
-        <p:style>
-          <a:lnRef idx="1">
-            <a:schemeClr val="accent1"/>
-          </a:lnRef>
-          <a:fillRef idx="3">
-            <a:schemeClr val="accent1"/>
-          </a:fillRef>
-          <a:effectRef idx="2">
-            <a:schemeClr val="accent1"/>
-          </a:effectRef>
-          <a:fontRef idx="minor">
-            <a:schemeClr val="lt1"/>
-          </a:fontRef>
-        </p:style>
-        <p:txBody>
-          <a:bodyPr rtlCol="0" anchor="ctr"/>
-          <a:lstStyle/>
-          <a:p>
-            <a:pPr algn="ctr"/>
-          </a:p>
-        </p:txBody>
-      </p:sp>
-      <p:sp>
-        <p:nvSpPr>
-          <p:cNvPr id="46" name="TextBox 45"/>
-          <p:cNvSpPr txBox="1"/>
-          <p:nvPr/>
-        </p:nvSpPr>
-        <p:spPr>
-          <a:xfrm>
-            <a:off x="9811512" y="219456"/>
-            <a:ext cx="2075688" cy="777240"/>
-          </a:xfrm>
-          <a:prstGeom prst="rect">
-            <a:avLst/>
-          </a:prstGeom>
-          <a:noFill/>
-        </p:spPr>
-        <p:txBody>
-          <a:bodyPr wrap="square">
-            <a:spAutoFit/>
-          </a:bodyPr>
-          <a:lstStyle/>
-          <a:p>
-            <a:pPr algn="l">
-              <a:spcAft>
-                <a:spcPts val="0"/>
-              </a:spcAft>
-            </a:pPr>
-            <a:r>
-              <a:rPr sz="900" b="1">
-                <a:solidFill>
-                  <a:srgbClr val="8B9CB3"/>
-                </a:solidFill>
-                <a:latin typeface="Calibri"/>
-              </a:rPr>
-              <a:t>SLIDE BUDGET</a:t>
-            </a:r>
-          </a:p>
-          <a:p>
-            <a:pPr algn="l">
-              <a:spcAft>
-                <a:spcPts val="0"/>
-              </a:spcAft>
-            </a:pPr>
-            <a:r>
-              <a:rPr sz="2600" b="1">
-                <a:solidFill>
-                  <a:srgbClr val="D4A853"/>
-                </a:solidFill>
-                <a:latin typeface="Calibri"/>
-              </a:rPr>
-              <a:t>1:00</a:t>
-            </a:r>
-          </a:p>
-          <a:p>
-            <a:pPr algn="l">
-              <a:spcAft>
-                <a:spcPts val="0"/>
-              </a:spcAft>
-            </a:pPr>
-            <a:r>
-              <a:rPr sz="900" b="0">
-                <a:solidFill>
-                  <a:srgbClr val="8B9CB3"/>
-                </a:solidFill>
-                <a:latin typeface="Calibri"/>
-              </a:rPr>
-              <a:t>by end 6:00 · left 4:00</a:t>
-            </a:r>
-          </a:p>
-        </p:txBody>
-      </p:sp>
-      <p:sp>
-        <p:nvSpPr>
-          <p:cNvPr id="47" name="Rounded Rectangle 46"/>
-          <p:cNvSpPr/>
-          <p:nvPr/>
-        </p:nvSpPr>
-        <p:spPr>
-          <a:xfrm>
-            <a:off x="502920" y="5961888"/>
-            <a:ext cx="11155680" cy="109728"/>
-          </a:xfrm>
-          <a:prstGeom prst="roundRect">
-            <a:avLst>
-              <a:gd name="adj" fmla="val 50000"/>
-            </a:avLst>
-          </a:prstGeom>
-          <a:solidFill>
-            <a:srgbClr val="243044"/>
-          </a:solidFill>
-          <a:ln>
-            <a:noFill/>
-          </a:ln>
-        </p:spPr>
-        <p:style>
-          <a:lnRef idx="1">
-            <a:schemeClr val="accent1"/>
-          </a:lnRef>
-          <a:fillRef idx="3">
-            <a:schemeClr val="accent1"/>
-          </a:fillRef>
-          <a:effectRef idx="2">
-            <a:schemeClr val="accent1"/>
-          </a:effectRef>
-          <a:fontRef idx="minor">
-            <a:schemeClr val="lt1"/>
-          </a:fontRef>
-        </p:style>
-        <p:txBody>
-          <a:bodyPr rtlCol="0" anchor="ctr"/>
-          <a:lstStyle/>
-          <a:p>
-            <a:pPr algn="ctr"/>
-          </a:p>
-        </p:txBody>
-      </p:sp>
-      <p:sp>
-        <p:nvSpPr>
-          <p:cNvPr id="48" name="Rounded Rectangle 47"/>
-          <p:cNvSpPr/>
-          <p:nvPr/>
-        </p:nvSpPr>
-        <p:spPr>
-          <a:xfrm>
-            <a:off x="502920" y="5961888"/>
-            <a:ext cx="11155680" cy="109728"/>
-          </a:xfrm>
-          <a:prstGeom prst="roundRect">
-            <a:avLst>
-              <a:gd name="adj" fmla="val 50000"/>
-            </a:avLst>
-          </a:prstGeom>
-          <a:solidFill>
-            <a:srgbClr val="D4A853"/>
-          </a:solidFill>
-          <a:ln>
-            <a:noFill/>
-          </a:ln>
-        </p:spPr>
-        <p:style>
-          <a:lnRef idx="1">
-            <a:schemeClr val="accent1"/>
-          </a:lnRef>
-          <a:fillRef idx="3">
-            <a:schemeClr val="accent1"/>
-          </a:fillRef>
-          <a:effectRef idx="2">
-            <a:schemeClr val="accent1"/>
-          </a:effectRef>
-          <a:fontRef idx="minor">
-            <a:schemeClr val="lt1"/>
-          </a:fontRef>
-        </p:style>
-        <p:txBody>
-          <a:bodyPr rtlCol="0" anchor="ctr"/>
-          <a:lstStyle/>
-          <a:p>
-            <a:pPr algn="ctr"/>
-          </a:p>
-        </p:txBody>
-      </p:sp>
-      <p:sp>
-        <p:nvSpPr>
-          <p:cNvPr id="49" name="TextBox 48"/>
-          <p:cNvSpPr txBox="1"/>
-          <p:nvPr/>
-        </p:nvSpPr>
-        <p:spPr>
-          <a:xfrm>
-            <a:off x="502920" y="5760720"/>
-            <a:ext cx="5029200" cy="201168"/>
-          </a:xfrm>
-          <a:prstGeom prst="rect">
-            <a:avLst/>
-          </a:prstGeom>
-          <a:noFill/>
-        </p:spPr>
-        <p:txBody>
-          <a:bodyPr wrap="none">
-            <a:spAutoFit/>
-          </a:bodyPr>
-          <a:lstStyle/>
-          <a:p>
-            <a:pPr algn="l">
-              <a:spcAft>
-                <a:spcPts val="0"/>
-              </a:spcAft>
-            </a:pPr>
-            <a:r>
-              <a:rPr sz="800" b="0">
-                <a:solidFill>
-                  <a:srgbClr val="8B9CB3"/>
-                </a:solidFill>
-                <a:latin typeface="Calibri"/>
-              </a:rPr>
-              <a:t>Countdown starts in Slideshow · red MOVE ON appears when budget ends · does not auto-advance</a:t>
-            </a:r>
-          </a:p>
-        </p:txBody>
-      </p:sp>
-      <p:sp>
-        <p:nvSpPr>
-          <p:cNvPr id="50" name="Rounded Rectangle 49"/>
-          <p:cNvSpPr/>
-          <p:nvPr/>
-        </p:nvSpPr>
-        <p:spPr>
-          <a:xfrm>
-            <a:off x="9189720" y="5614416"/>
-            <a:ext cx="2468880" cy="292608"/>
-          </a:xfrm>
-          <a:prstGeom prst="roundRect">
-            <a:avLst>
-              <a:gd name="adj" fmla="val 20000"/>
-            </a:avLst>
-          </a:prstGeom>
-          <a:solidFill>
-            <a:srgbClr val="F87171"/>
-          </a:solidFill>
-          <a:ln>
-            <a:noFill/>
-          </a:ln>
-        </p:spPr>
-        <p:style>
-          <a:lnRef idx="1">
-            <a:schemeClr val="accent1"/>
-          </a:lnRef>
-          <a:fillRef idx="3">
-            <a:schemeClr val="accent1"/>
-          </a:fillRef>
-          <a:effectRef idx="2">
-            <a:schemeClr val="accent1"/>
-          </a:effectRef>
-          <a:fontRef idx="minor">
-            <a:schemeClr val="lt1"/>
-          </a:fontRef>
-        </p:style>
-        <p:txBody>
-          <a:bodyPr rtlCol="0" anchor="ctr" wrap="none"/>
-          <a:lstStyle/>
-          <a:p>
-            <a:pPr algn="ctr"/>
-            <a:r>
-              <a:rPr sz="1200" b="1">
-                <a:solidFill>
-                  <a:srgbClr val="E6EDF3"/>
-                </a:solidFill>
-                <a:latin typeface="Calibri"/>
-              </a:rPr>
-              <a:t>MOVE ON  →</a:t>
-            </a:r>
-          </a:p>
-        </p:txBody>
-      </p:sp>
     </p:spTree>
   </p:cSld>
   <p:clrMapOvr>
     <a:masterClrMapping/>
   </p:clrMapOvr>
-  <p:timing>
-    <p:tnLst>
-      <p:par>
-        <p:cTn id="1" dur="indefinite" restart="never" nodeType="tmRoot">
-          <p:childTnLst>
-            <p:seq concurrent="1" nextAc="seek">
-              <p:cTn id="2" dur="indefinite" nodeType="mainSeq">
-                <p:childTnLst>
-                  <p:par>
-                    <p:cTn id="3" fill="hold">
-                      <p:stCondLst>
-                        <p:cond delay="0"/>
-                      </p:stCondLst>
-                      <p:childTnLst>
-                        <p:par>
-                          <p:cTn id="4" fill="hold">
-                            <p:stCondLst>
-                              <p:cond delay="0"/>
-                            </p:stCondLst>
-                            <p:childTnLst>
-                              <p:set>
-                                <p:cBhvr>
-                                  <p:cTn id="5" dur="1" fill="hold"/>
-                                  <p:tgtEl>
-                                    <p:spTgt spid="50"/>
-                                  </p:tgtEl>
-                                  <p:attrNameLst>
-                                    <p:attrName>style.visibility</p:attrName>
-                                  </p:attrNameLst>
-                                </p:cBhvr>
-                                <p:to>
-                                  <p:strVal val="hidden"/>
-                                </p:to>
-                              </p:set>
-                              <p:animEffect transition="out" filter="wipe(left)">
-                                <p:cBhvr>
-                                  <p:cTn id="6" dur="60000" fill="hold"/>
-                                  <p:tgtEl>
-                                    <p:spTgt spid="48"/>
-                                  </p:tgtEl>
-                                </p:cBhvr>
-                              </p:animEffect>
-                              <p:animEffect transition="in" filter="fade">
-                                <p:cBhvr>
-                                  <p:cTn id="7" dur="400" fill="hold">
-                                    <p:stCondLst>
-                                      <p:cond delay="60000"/>
-                                    </p:stCondLst>
-                                  </p:cTn>
-                                  <p:tgtEl>
-                                    <p:spTgt spid="50"/>
-                                  </p:tgtEl>
-                                </p:cBhvr>
-                              </p:animEffect>
-                              <p:set>
-                                <p:cBhvr>
-                                  <p:cTn id="8" dur="1" fill="hold">
-                                    <p:stCondLst>
-                                      <p:cond delay="60000"/>
-                                    </p:stCondLst>
-                                  </p:cTn>
-                                  <p:tgtEl>
-                                    <p:spTgt spid="50"/>
-                                  </p:tgtEl>
-                                  <p:attrNameLst>
-                                    <p:attrName>style.visibility</p:attrName>
-                                  </p:attrNameLst>
-                                </p:cBhvr>
-                                <p:to>
-                                  <p:strVal val="visible"/>
-                                </p:to>
-                              </p:set>
-                            </p:childTnLst>
-                          </p:cTn>
-                        </p:par>
-                      </p:childTnLst>
-                    </p:cTn>
-                  </p:par>
-                </p:childTnLst>
-              </p:cTn>
-              <p:prevCondLst>
-                <p:cond evt="onPrev" delay="0">
-                  <p:tgtEl>
-                    <p:sldTgt/>
-                  </p:tgtEl>
-                </p:cond>
-              </p:prevCondLst>
-              <p:nextCondLst>
-                <p:cond evt="onNext" delay="0">
-                  <p:tgtEl>
-                    <p:sldTgt/>
-                  </p:tgtEl>
-                </p:cond>
-              </p:nextCondLst>
-            </p:seq>
-          </p:childTnLst>
-        </p:cTn>
-      </p:par>
-    </p:tnLst>
-  </p:timing>
 </p:sld>
 </file>
 
@@ -13965,7 +11675,7 @@
         <p:spPr>
           <a:xfrm>
             <a:off x="502920" y="438912"/>
-            <a:ext cx="8869680" cy="594360"/>
+            <a:ext cx="11155680" cy="594360"/>
           </a:xfrm>
           <a:prstGeom prst="rect">
             <a:avLst/>
@@ -15714,453 +13424,11 @@
           </a:p>
         </p:txBody>
       </p:sp>
-      <p:sp>
-        <p:nvSpPr>
-          <p:cNvPr id="40" name="Rounded Rectangle 39"/>
-          <p:cNvSpPr/>
-          <p:nvPr/>
-        </p:nvSpPr>
-        <p:spPr>
-          <a:xfrm>
-            <a:off x="9646920" y="164592"/>
-            <a:ext cx="2331720" cy="868680"/>
-          </a:xfrm>
-          <a:prstGeom prst="roundRect">
-            <a:avLst>
-              <a:gd name="adj" fmla="val 12000"/>
-            </a:avLst>
-          </a:prstGeom>
-          <a:solidFill>
-            <a:srgbClr val="1A2332"/>
-          </a:solidFill>
-          <a:ln>
-            <a:noFill/>
-          </a:ln>
-        </p:spPr>
-        <p:style>
-          <a:lnRef idx="1">
-            <a:schemeClr val="accent1"/>
-          </a:lnRef>
-          <a:fillRef idx="3">
-            <a:schemeClr val="accent1"/>
-          </a:fillRef>
-          <a:effectRef idx="2">
-            <a:schemeClr val="accent1"/>
-          </a:effectRef>
-          <a:fontRef idx="minor">
-            <a:schemeClr val="lt1"/>
-          </a:fontRef>
-        </p:style>
-        <p:txBody>
-          <a:bodyPr rtlCol="0" anchor="ctr"/>
-          <a:lstStyle/>
-          <a:p>
-            <a:pPr algn="ctr"/>
-          </a:p>
-        </p:txBody>
-      </p:sp>
-      <p:sp>
-        <p:nvSpPr>
-          <p:cNvPr id="41" name="Rectangle 40"/>
-          <p:cNvSpPr/>
-          <p:nvPr/>
-        </p:nvSpPr>
-        <p:spPr>
-          <a:xfrm>
-            <a:off x="9646920" y="164592"/>
-            <a:ext cx="73152" cy="868680"/>
-          </a:xfrm>
-          <a:prstGeom prst="rect">
-            <a:avLst/>
-          </a:prstGeom>
-          <a:solidFill>
-            <a:srgbClr val="D4A853"/>
-          </a:solidFill>
-          <a:ln>
-            <a:noFill/>
-          </a:ln>
-        </p:spPr>
-        <p:style>
-          <a:lnRef idx="1">
-            <a:schemeClr val="accent1"/>
-          </a:lnRef>
-          <a:fillRef idx="3">
-            <a:schemeClr val="accent1"/>
-          </a:fillRef>
-          <a:effectRef idx="2">
-            <a:schemeClr val="accent1"/>
-          </a:effectRef>
-          <a:fontRef idx="minor">
-            <a:schemeClr val="lt1"/>
-          </a:fontRef>
-        </p:style>
-        <p:txBody>
-          <a:bodyPr rtlCol="0" anchor="ctr"/>
-          <a:lstStyle/>
-          <a:p>
-            <a:pPr algn="ctr"/>
-          </a:p>
-        </p:txBody>
-      </p:sp>
-      <p:sp>
-        <p:nvSpPr>
-          <p:cNvPr id="42" name="TextBox 41"/>
-          <p:cNvSpPr txBox="1"/>
-          <p:nvPr/>
-        </p:nvSpPr>
-        <p:spPr>
-          <a:xfrm>
-            <a:off x="9811512" y="219456"/>
-            <a:ext cx="2075688" cy="777240"/>
-          </a:xfrm>
-          <a:prstGeom prst="rect">
-            <a:avLst/>
-          </a:prstGeom>
-          <a:noFill/>
-        </p:spPr>
-        <p:txBody>
-          <a:bodyPr wrap="square">
-            <a:spAutoFit/>
-          </a:bodyPr>
-          <a:lstStyle/>
-          <a:p>
-            <a:pPr algn="l">
-              <a:spcAft>
-                <a:spcPts val="0"/>
-              </a:spcAft>
-            </a:pPr>
-            <a:r>
-              <a:rPr sz="900" b="1">
-                <a:solidFill>
-                  <a:srgbClr val="8B9CB3"/>
-                </a:solidFill>
-                <a:latin typeface="Calibri"/>
-              </a:rPr>
-              <a:t>SLIDE BUDGET</a:t>
-            </a:r>
-          </a:p>
-          <a:p>
-            <a:pPr algn="l">
-              <a:spcAft>
-                <a:spcPts val="0"/>
-              </a:spcAft>
-            </a:pPr>
-            <a:r>
-              <a:rPr sz="2600" b="1">
-                <a:solidFill>
-                  <a:srgbClr val="D4A853"/>
-                </a:solidFill>
-                <a:latin typeface="Calibri"/>
-              </a:rPr>
-              <a:t>1:15</a:t>
-            </a:r>
-          </a:p>
-          <a:p>
-            <a:pPr algn="l">
-              <a:spcAft>
-                <a:spcPts val="0"/>
-              </a:spcAft>
-            </a:pPr>
-            <a:r>
-              <a:rPr sz="900" b="0">
-                <a:solidFill>
-                  <a:srgbClr val="8B9CB3"/>
-                </a:solidFill>
-                <a:latin typeface="Calibri"/>
-              </a:rPr>
-              <a:t>by end 7:15 · left 2:45</a:t>
-            </a:r>
-          </a:p>
-        </p:txBody>
-      </p:sp>
-      <p:sp>
-        <p:nvSpPr>
-          <p:cNvPr id="43" name="Rounded Rectangle 42"/>
-          <p:cNvSpPr/>
-          <p:nvPr/>
-        </p:nvSpPr>
-        <p:spPr>
-          <a:xfrm>
-            <a:off x="502920" y="5961888"/>
-            <a:ext cx="11155680" cy="109728"/>
-          </a:xfrm>
-          <a:prstGeom prst="roundRect">
-            <a:avLst>
-              <a:gd name="adj" fmla="val 50000"/>
-            </a:avLst>
-          </a:prstGeom>
-          <a:solidFill>
-            <a:srgbClr val="243044"/>
-          </a:solidFill>
-          <a:ln>
-            <a:noFill/>
-          </a:ln>
-        </p:spPr>
-        <p:style>
-          <a:lnRef idx="1">
-            <a:schemeClr val="accent1"/>
-          </a:lnRef>
-          <a:fillRef idx="3">
-            <a:schemeClr val="accent1"/>
-          </a:fillRef>
-          <a:effectRef idx="2">
-            <a:schemeClr val="accent1"/>
-          </a:effectRef>
-          <a:fontRef idx="minor">
-            <a:schemeClr val="lt1"/>
-          </a:fontRef>
-        </p:style>
-        <p:txBody>
-          <a:bodyPr rtlCol="0" anchor="ctr"/>
-          <a:lstStyle/>
-          <a:p>
-            <a:pPr algn="ctr"/>
-          </a:p>
-        </p:txBody>
-      </p:sp>
-      <p:sp>
-        <p:nvSpPr>
-          <p:cNvPr id="44" name="Rounded Rectangle 43"/>
-          <p:cNvSpPr/>
-          <p:nvPr/>
-        </p:nvSpPr>
-        <p:spPr>
-          <a:xfrm>
-            <a:off x="502920" y="5961888"/>
-            <a:ext cx="11155680" cy="109728"/>
-          </a:xfrm>
-          <a:prstGeom prst="roundRect">
-            <a:avLst>
-              <a:gd name="adj" fmla="val 50000"/>
-            </a:avLst>
-          </a:prstGeom>
-          <a:solidFill>
-            <a:srgbClr val="D4A853"/>
-          </a:solidFill>
-          <a:ln>
-            <a:noFill/>
-          </a:ln>
-        </p:spPr>
-        <p:style>
-          <a:lnRef idx="1">
-            <a:schemeClr val="accent1"/>
-          </a:lnRef>
-          <a:fillRef idx="3">
-            <a:schemeClr val="accent1"/>
-          </a:fillRef>
-          <a:effectRef idx="2">
-            <a:schemeClr val="accent1"/>
-          </a:effectRef>
-          <a:fontRef idx="minor">
-            <a:schemeClr val="lt1"/>
-          </a:fontRef>
-        </p:style>
-        <p:txBody>
-          <a:bodyPr rtlCol="0" anchor="ctr"/>
-          <a:lstStyle/>
-          <a:p>
-            <a:pPr algn="ctr"/>
-          </a:p>
-        </p:txBody>
-      </p:sp>
-      <p:sp>
-        <p:nvSpPr>
-          <p:cNvPr id="45" name="TextBox 44"/>
-          <p:cNvSpPr txBox="1"/>
-          <p:nvPr/>
-        </p:nvSpPr>
-        <p:spPr>
-          <a:xfrm>
-            <a:off x="502920" y="5760720"/>
-            <a:ext cx="5029200" cy="201168"/>
-          </a:xfrm>
-          <a:prstGeom prst="rect">
-            <a:avLst/>
-          </a:prstGeom>
-          <a:noFill/>
-        </p:spPr>
-        <p:txBody>
-          <a:bodyPr wrap="none">
-            <a:spAutoFit/>
-          </a:bodyPr>
-          <a:lstStyle/>
-          <a:p>
-            <a:pPr algn="l">
-              <a:spcAft>
-                <a:spcPts val="0"/>
-              </a:spcAft>
-            </a:pPr>
-            <a:r>
-              <a:rPr sz="800" b="0">
-                <a:solidFill>
-                  <a:srgbClr val="8B9CB3"/>
-                </a:solidFill>
-                <a:latin typeface="Calibri"/>
-              </a:rPr>
-              <a:t>Countdown starts in Slideshow · red MOVE ON appears when budget ends · does not auto-advance</a:t>
-            </a:r>
-          </a:p>
-        </p:txBody>
-      </p:sp>
-      <p:sp>
-        <p:nvSpPr>
-          <p:cNvPr id="46" name="Rounded Rectangle 45"/>
-          <p:cNvSpPr/>
-          <p:nvPr/>
-        </p:nvSpPr>
-        <p:spPr>
-          <a:xfrm>
-            <a:off x="9189720" y="5614416"/>
-            <a:ext cx="2468880" cy="292608"/>
-          </a:xfrm>
-          <a:prstGeom prst="roundRect">
-            <a:avLst>
-              <a:gd name="adj" fmla="val 20000"/>
-            </a:avLst>
-          </a:prstGeom>
-          <a:solidFill>
-            <a:srgbClr val="F87171"/>
-          </a:solidFill>
-          <a:ln>
-            <a:noFill/>
-          </a:ln>
-        </p:spPr>
-        <p:style>
-          <a:lnRef idx="1">
-            <a:schemeClr val="accent1"/>
-          </a:lnRef>
-          <a:fillRef idx="3">
-            <a:schemeClr val="accent1"/>
-          </a:fillRef>
-          <a:effectRef idx="2">
-            <a:schemeClr val="accent1"/>
-          </a:effectRef>
-          <a:fontRef idx="minor">
-            <a:schemeClr val="lt1"/>
-          </a:fontRef>
-        </p:style>
-        <p:txBody>
-          <a:bodyPr rtlCol="0" anchor="ctr" wrap="none"/>
-          <a:lstStyle/>
-          <a:p>
-            <a:pPr algn="ctr"/>
-            <a:r>
-              <a:rPr sz="1200" b="1">
-                <a:solidFill>
-                  <a:srgbClr val="E6EDF3"/>
-                </a:solidFill>
-                <a:latin typeface="Calibri"/>
-              </a:rPr>
-              <a:t>MOVE ON  →</a:t>
-            </a:r>
-          </a:p>
-        </p:txBody>
-      </p:sp>
     </p:spTree>
   </p:cSld>
   <p:clrMapOvr>
     <a:masterClrMapping/>
   </p:clrMapOvr>
-  <p:timing>
-    <p:tnLst>
-      <p:par>
-        <p:cTn id="1" dur="indefinite" restart="never" nodeType="tmRoot">
-          <p:childTnLst>
-            <p:seq concurrent="1" nextAc="seek">
-              <p:cTn id="2" dur="indefinite" nodeType="mainSeq">
-                <p:childTnLst>
-                  <p:par>
-                    <p:cTn id="3" fill="hold">
-                      <p:stCondLst>
-                        <p:cond delay="0"/>
-                      </p:stCondLst>
-                      <p:childTnLst>
-                        <p:par>
-                          <p:cTn id="4" fill="hold">
-                            <p:stCondLst>
-                              <p:cond delay="0"/>
-                            </p:stCondLst>
-                            <p:childTnLst>
-                              <p:set>
-                                <p:cBhvr>
-                                  <p:cTn id="5" dur="1" fill="hold"/>
-                                  <p:tgtEl>
-                                    <p:spTgt spid="46"/>
-                                  </p:tgtEl>
-                                  <p:attrNameLst>
-                                    <p:attrName>style.visibility</p:attrName>
-                                  </p:attrNameLst>
-                                </p:cBhvr>
-                                <p:to>
-                                  <p:strVal val="hidden"/>
-                                </p:to>
-                              </p:set>
-                              <p:animEffect transition="out" filter="wipe(left)">
-                                <p:cBhvr>
-                                  <p:cTn id="6" dur="75000" fill="hold"/>
-                                  <p:tgtEl>
-                                    <p:spTgt spid="44"/>
-                                  </p:tgtEl>
-                                </p:cBhvr>
-                              </p:animEffect>
-                              <p:animEffect transition="in" filter="fade">
-                                <p:cBhvr>
-                                  <p:cTn id="7" dur="400" fill="hold">
-                                    <p:stCondLst>
-                                      <p:cond delay="75000"/>
-                                    </p:stCondLst>
-                                  </p:cTn>
-                                  <p:tgtEl>
-                                    <p:spTgt spid="46"/>
-                                  </p:tgtEl>
-                                </p:cBhvr>
-                              </p:animEffect>
-                              <p:set>
-                                <p:cBhvr>
-                                  <p:cTn id="8" dur="1" fill="hold">
-                                    <p:stCondLst>
-                                      <p:cond delay="75000"/>
-                                    </p:stCondLst>
-                                  </p:cTn>
-                                  <p:tgtEl>
-                                    <p:spTgt spid="46"/>
-                                  </p:tgtEl>
-                                  <p:attrNameLst>
-                                    <p:attrName>style.visibility</p:attrName>
-                                  </p:attrNameLst>
-                                </p:cBhvr>
-                                <p:to>
-                                  <p:strVal val="visible"/>
-                                </p:to>
-                              </p:set>
-                            </p:childTnLst>
-                          </p:cTn>
-                        </p:par>
-                      </p:childTnLst>
-                    </p:cTn>
-                  </p:par>
-                </p:childTnLst>
-              </p:cTn>
-              <p:prevCondLst>
-                <p:cond evt="onPrev" delay="0">
-                  <p:tgtEl>
-                    <p:sldTgt/>
-                  </p:tgtEl>
-                </p:cond>
-              </p:prevCondLst>
-              <p:nextCondLst>
-                <p:cond evt="onNext" delay="0">
-                  <p:tgtEl>
-                    <p:sldTgt/>
-                  </p:tgtEl>
-                </p:cond>
-              </p:nextCondLst>
-            </p:seq>
-          </p:childTnLst>
-        </p:cTn>
-      </p:par>
-    </p:tnLst>
-  </p:timing>
 </p:sld>
 </file>
 
@@ -16265,7 +13533,7 @@
         <p:spPr>
           <a:xfrm>
             <a:off x="502920" y="438912"/>
-            <a:ext cx="8869680" cy="594360"/>
+            <a:ext cx="11155680" cy="594360"/>
           </a:xfrm>
           <a:prstGeom prst="rect">
             <a:avLst/>
@@ -18330,453 +15598,11 @@
           </a:p>
         </p:txBody>
       </p:sp>
-      <p:sp>
-        <p:nvSpPr>
-          <p:cNvPr id="46" name="Rounded Rectangle 45"/>
-          <p:cNvSpPr/>
-          <p:nvPr/>
-        </p:nvSpPr>
-        <p:spPr>
-          <a:xfrm>
-            <a:off x="9646920" y="164592"/>
-            <a:ext cx="2331720" cy="868680"/>
-          </a:xfrm>
-          <a:prstGeom prst="roundRect">
-            <a:avLst>
-              <a:gd name="adj" fmla="val 12000"/>
-            </a:avLst>
-          </a:prstGeom>
-          <a:solidFill>
-            <a:srgbClr val="1A2332"/>
-          </a:solidFill>
-          <a:ln>
-            <a:noFill/>
-          </a:ln>
-        </p:spPr>
-        <p:style>
-          <a:lnRef idx="1">
-            <a:schemeClr val="accent1"/>
-          </a:lnRef>
-          <a:fillRef idx="3">
-            <a:schemeClr val="accent1"/>
-          </a:fillRef>
-          <a:effectRef idx="2">
-            <a:schemeClr val="accent1"/>
-          </a:effectRef>
-          <a:fontRef idx="minor">
-            <a:schemeClr val="lt1"/>
-          </a:fontRef>
-        </p:style>
-        <p:txBody>
-          <a:bodyPr rtlCol="0" anchor="ctr"/>
-          <a:lstStyle/>
-          <a:p>
-            <a:pPr algn="ctr"/>
-          </a:p>
-        </p:txBody>
-      </p:sp>
-      <p:sp>
-        <p:nvSpPr>
-          <p:cNvPr id="47" name="Rectangle 46"/>
-          <p:cNvSpPr/>
-          <p:nvPr/>
-        </p:nvSpPr>
-        <p:spPr>
-          <a:xfrm>
-            <a:off x="9646920" y="164592"/>
-            <a:ext cx="73152" cy="868680"/>
-          </a:xfrm>
-          <a:prstGeom prst="rect">
-            <a:avLst/>
-          </a:prstGeom>
-          <a:solidFill>
-            <a:srgbClr val="D4A853"/>
-          </a:solidFill>
-          <a:ln>
-            <a:noFill/>
-          </a:ln>
-        </p:spPr>
-        <p:style>
-          <a:lnRef idx="1">
-            <a:schemeClr val="accent1"/>
-          </a:lnRef>
-          <a:fillRef idx="3">
-            <a:schemeClr val="accent1"/>
-          </a:fillRef>
-          <a:effectRef idx="2">
-            <a:schemeClr val="accent1"/>
-          </a:effectRef>
-          <a:fontRef idx="minor">
-            <a:schemeClr val="lt1"/>
-          </a:fontRef>
-        </p:style>
-        <p:txBody>
-          <a:bodyPr rtlCol="0" anchor="ctr"/>
-          <a:lstStyle/>
-          <a:p>
-            <a:pPr algn="ctr"/>
-          </a:p>
-        </p:txBody>
-      </p:sp>
-      <p:sp>
-        <p:nvSpPr>
-          <p:cNvPr id="48" name="TextBox 47"/>
-          <p:cNvSpPr txBox="1"/>
-          <p:nvPr/>
-        </p:nvSpPr>
-        <p:spPr>
-          <a:xfrm>
-            <a:off x="9811512" y="219456"/>
-            <a:ext cx="2075688" cy="777240"/>
-          </a:xfrm>
-          <a:prstGeom prst="rect">
-            <a:avLst/>
-          </a:prstGeom>
-          <a:noFill/>
-        </p:spPr>
-        <p:txBody>
-          <a:bodyPr wrap="square">
-            <a:spAutoFit/>
-          </a:bodyPr>
-          <a:lstStyle/>
-          <a:p>
-            <a:pPr algn="l">
-              <a:spcAft>
-                <a:spcPts val="0"/>
-              </a:spcAft>
-            </a:pPr>
-            <a:r>
-              <a:rPr sz="900" b="1">
-                <a:solidFill>
-                  <a:srgbClr val="8B9CB3"/>
-                </a:solidFill>
-                <a:latin typeface="Calibri"/>
-              </a:rPr>
-              <a:t>SLIDE BUDGET</a:t>
-            </a:r>
-          </a:p>
-          <a:p>
-            <a:pPr algn="l">
-              <a:spcAft>
-                <a:spcPts val="0"/>
-              </a:spcAft>
-            </a:pPr>
-            <a:r>
-              <a:rPr sz="2600" b="1">
-                <a:solidFill>
-                  <a:srgbClr val="D4A853"/>
-                </a:solidFill>
-                <a:latin typeface="Calibri"/>
-              </a:rPr>
-              <a:t>1:30</a:t>
-            </a:r>
-          </a:p>
-          <a:p>
-            <a:pPr algn="l">
-              <a:spcAft>
-                <a:spcPts val="0"/>
-              </a:spcAft>
-            </a:pPr>
-            <a:r>
-              <a:rPr sz="900" b="0">
-                <a:solidFill>
-                  <a:srgbClr val="8B9CB3"/>
-                </a:solidFill>
-                <a:latin typeface="Calibri"/>
-              </a:rPr>
-              <a:t>by end 8:45 · left 1:15</a:t>
-            </a:r>
-          </a:p>
-        </p:txBody>
-      </p:sp>
-      <p:sp>
-        <p:nvSpPr>
-          <p:cNvPr id="49" name="Rounded Rectangle 48"/>
-          <p:cNvSpPr/>
-          <p:nvPr/>
-        </p:nvSpPr>
-        <p:spPr>
-          <a:xfrm>
-            <a:off x="502920" y="5961888"/>
-            <a:ext cx="11155680" cy="109728"/>
-          </a:xfrm>
-          <a:prstGeom prst="roundRect">
-            <a:avLst>
-              <a:gd name="adj" fmla="val 50000"/>
-            </a:avLst>
-          </a:prstGeom>
-          <a:solidFill>
-            <a:srgbClr val="243044"/>
-          </a:solidFill>
-          <a:ln>
-            <a:noFill/>
-          </a:ln>
-        </p:spPr>
-        <p:style>
-          <a:lnRef idx="1">
-            <a:schemeClr val="accent1"/>
-          </a:lnRef>
-          <a:fillRef idx="3">
-            <a:schemeClr val="accent1"/>
-          </a:fillRef>
-          <a:effectRef idx="2">
-            <a:schemeClr val="accent1"/>
-          </a:effectRef>
-          <a:fontRef idx="minor">
-            <a:schemeClr val="lt1"/>
-          </a:fontRef>
-        </p:style>
-        <p:txBody>
-          <a:bodyPr rtlCol="0" anchor="ctr"/>
-          <a:lstStyle/>
-          <a:p>
-            <a:pPr algn="ctr"/>
-          </a:p>
-        </p:txBody>
-      </p:sp>
-      <p:sp>
-        <p:nvSpPr>
-          <p:cNvPr id="50" name="Rounded Rectangle 49"/>
-          <p:cNvSpPr/>
-          <p:nvPr/>
-        </p:nvSpPr>
-        <p:spPr>
-          <a:xfrm>
-            <a:off x="502920" y="5961888"/>
-            <a:ext cx="11155680" cy="109728"/>
-          </a:xfrm>
-          <a:prstGeom prst="roundRect">
-            <a:avLst>
-              <a:gd name="adj" fmla="val 50000"/>
-            </a:avLst>
-          </a:prstGeom>
-          <a:solidFill>
-            <a:srgbClr val="D4A853"/>
-          </a:solidFill>
-          <a:ln>
-            <a:noFill/>
-          </a:ln>
-        </p:spPr>
-        <p:style>
-          <a:lnRef idx="1">
-            <a:schemeClr val="accent1"/>
-          </a:lnRef>
-          <a:fillRef idx="3">
-            <a:schemeClr val="accent1"/>
-          </a:fillRef>
-          <a:effectRef idx="2">
-            <a:schemeClr val="accent1"/>
-          </a:effectRef>
-          <a:fontRef idx="minor">
-            <a:schemeClr val="lt1"/>
-          </a:fontRef>
-        </p:style>
-        <p:txBody>
-          <a:bodyPr rtlCol="0" anchor="ctr"/>
-          <a:lstStyle/>
-          <a:p>
-            <a:pPr algn="ctr"/>
-          </a:p>
-        </p:txBody>
-      </p:sp>
-      <p:sp>
-        <p:nvSpPr>
-          <p:cNvPr id="51" name="TextBox 50"/>
-          <p:cNvSpPr txBox="1"/>
-          <p:nvPr/>
-        </p:nvSpPr>
-        <p:spPr>
-          <a:xfrm>
-            <a:off x="502920" y="5760720"/>
-            <a:ext cx="5029200" cy="201168"/>
-          </a:xfrm>
-          <a:prstGeom prst="rect">
-            <a:avLst/>
-          </a:prstGeom>
-          <a:noFill/>
-        </p:spPr>
-        <p:txBody>
-          <a:bodyPr wrap="none">
-            <a:spAutoFit/>
-          </a:bodyPr>
-          <a:lstStyle/>
-          <a:p>
-            <a:pPr algn="l">
-              <a:spcAft>
-                <a:spcPts val="0"/>
-              </a:spcAft>
-            </a:pPr>
-            <a:r>
-              <a:rPr sz="800" b="0">
-                <a:solidFill>
-                  <a:srgbClr val="8B9CB3"/>
-                </a:solidFill>
-                <a:latin typeface="Calibri"/>
-              </a:rPr>
-              <a:t>Countdown starts in Slideshow · red MOVE ON appears when budget ends · does not auto-advance</a:t>
-            </a:r>
-          </a:p>
-        </p:txBody>
-      </p:sp>
-      <p:sp>
-        <p:nvSpPr>
-          <p:cNvPr id="52" name="Rounded Rectangle 51"/>
-          <p:cNvSpPr/>
-          <p:nvPr/>
-        </p:nvSpPr>
-        <p:spPr>
-          <a:xfrm>
-            <a:off x="9189720" y="5614416"/>
-            <a:ext cx="2468880" cy="292608"/>
-          </a:xfrm>
-          <a:prstGeom prst="roundRect">
-            <a:avLst>
-              <a:gd name="adj" fmla="val 20000"/>
-            </a:avLst>
-          </a:prstGeom>
-          <a:solidFill>
-            <a:srgbClr val="F87171"/>
-          </a:solidFill>
-          <a:ln>
-            <a:noFill/>
-          </a:ln>
-        </p:spPr>
-        <p:style>
-          <a:lnRef idx="1">
-            <a:schemeClr val="accent1"/>
-          </a:lnRef>
-          <a:fillRef idx="3">
-            <a:schemeClr val="accent1"/>
-          </a:fillRef>
-          <a:effectRef idx="2">
-            <a:schemeClr val="accent1"/>
-          </a:effectRef>
-          <a:fontRef idx="minor">
-            <a:schemeClr val="lt1"/>
-          </a:fontRef>
-        </p:style>
-        <p:txBody>
-          <a:bodyPr rtlCol="0" anchor="ctr" wrap="none"/>
-          <a:lstStyle/>
-          <a:p>
-            <a:pPr algn="ctr"/>
-            <a:r>
-              <a:rPr sz="1200" b="1">
-                <a:solidFill>
-                  <a:srgbClr val="E6EDF3"/>
-                </a:solidFill>
-                <a:latin typeface="Calibri"/>
-              </a:rPr>
-              <a:t>MOVE ON  →</a:t>
-            </a:r>
-          </a:p>
-        </p:txBody>
-      </p:sp>
     </p:spTree>
   </p:cSld>
   <p:clrMapOvr>
     <a:masterClrMapping/>
   </p:clrMapOvr>
-  <p:timing>
-    <p:tnLst>
-      <p:par>
-        <p:cTn id="1" dur="indefinite" restart="never" nodeType="tmRoot">
-          <p:childTnLst>
-            <p:seq concurrent="1" nextAc="seek">
-              <p:cTn id="2" dur="indefinite" nodeType="mainSeq">
-                <p:childTnLst>
-                  <p:par>
-                    <p:cTn id="3" fill="hold">
-                      <p:stCondLst>
-                        <p:cond delay="0"/>
-                      </p:stCondLst>
-                      <p:childTnLst>
-                        <p:par>
-                          <p:cTn id="4" fill="hold">
-                            <p:stCondLst>
-                              <p:cond delay="0"/>
-                            </p:stCondLst>
-                            <p:childTnLst>
-                              <p:set>
-                                <p:cBhvr>
-                                  <p:cTn id="5" dur="1" fill="hold"/>
-                                  <p:tgtEl>
-                                    <p:spTgt spid="52"/>
-                                  </p:tgtEl>
-                                  <p:attrNameLst>
-                                    <p:attrName>style.visibility</p:attrName>
-                                  </p:attrNameLst>
-                                </p:cBhvr>
-                                <p:to>
-                                  <p:strVal val="hidden"/>
-                                </p:to>
-                              </p:set>
-                              <p:animEffect transition="out" filter="wipe(left)">
-                                <p:cBhvr>
-                                  <p:cTn id="6" dur="90000" fill="hold"/>
-                                  <p:tgtEl>
-                                    <p:spTgt spid="50"/>
-                                  </p:tgtEl>
-                                </p:cBhvr>
-                              </p:animEffect>
-                              <p:animEffect transition="in" filter="fade">
-                                <p:cBhvr>
-                                  <p:cTn id="7" dur="400" fill="hold">
-                                    <p:stCondLst>
-                                      <p:cond delay="90000"/>
-                                    </p:stCondLst>
-                                  </p:cTn>
-                                  <p:tgtEl>
-                                    <p:spTgt spid="52"/>
-                                  </p:tgtEl>
-                                </p:cBhvr>
-                              </p:animEffect>
-                              <p:set>
-                                <p:cBhvr>
-                                  <p:cTn id="8" dur="1" fill="hold">
-                                    <p:stCondLst>
-                                      <p:cond delay="90000"/>
-                                    </p:stCondLst>
-                                  </p:cTn>
-                                  <p:tgtEl>
-                                    <p:spTgt spid="52"/>
-                                  </p:tgtEl>
-                                  <p:attrNameLst>
-                                    <p:attrName>style.visibility</p:attrName>
-                                  </p:attrNameLst>
-                                </p:cBhvr>
-                                <p:to>
-                                  <p:strVal val="visible"/>
-                                </p:to>
-                              </p:set>
-                            </p:childTnLst>
-                          </p:cTn>
-                        </p:par>
-                      </p:childTnLst>
-                    </p:cTn>
-                  </p:par>
-                </p:childTnLst>
-              </p:cTn>
-              <p:prevCondLst>
-                <p:cond evt="onPrev" delay="0">
-                  <p:tgtEl>
-                    <p:sldTgt/>
-                  </p:tgtEl>
-                </p:cond>
-              </p:prevCondLst>
-              <p:nextCondLst>
-                <p:cond evt="onNext" delay="0">
-                  <p:tgtEl>
-                    <p:sldTgt/>
-                  </p:tgtEl>
-                </p:cond>
-              </p:nextCondLst>
-            </p:seq>
-          </p:childTnLst>
-        </p:cTn>
-      </p:par>
-    </p:tnLst>
-  </p:timing>
 </p:sld>
 </file>
 
@@ -18881,7 +15707,7 @@
         <p:spPr>
           <a:xfrm>
             <a:off x="502920" y="438912"/>
-            <a:ext cx="8869680" cy="594360"/>
+            <a:ext cx="11155680" cy="594360"/>
           </a:xfrm>
           <a:prstGeom prst="rect">
             <a:avLst/>
@@ -20150,453 +16976,11 @@
           </a:p>
         </p:txBody>
       </p:sp>
-      <p:sp>
-        <p:nvSpPr>
-          <p:cNvPr id="32" name="Rounded Rectangle 31"/>
-          <p:cNvSpPr/>
-          <p:nvPr/>
-        </p:nvSpPr>
-        <p:spPr>
-          <a:xfrm>
-            <a:off x="9646920" y="164592"/>
-            <a:ext cx="2331720" cy="868680"/>
-          </a:xfrm>
-          <a:prstGeom prst="roundRect">
-            <a:avLst>
-              <a:gd name="adj" fmla="val 12000"/>
-            </a:avLst>
-          </a:prstGeom>
-          <a:solidFill>
-            <a:srgbClr val="1A2332"/>
-          </a:solidFill>
-          <a:ln>
-            <a:noFill/>
-          </a:ln>
-        </p:spPr>
-        <p:style>
-          <a:lnRef idx="1">
-            <a:schemeClr val="accent1"/>
-          </a:lnRef>
-          <a:fillRef idx="3">
-            <a:schemeClr val="accent1"/>
-          </a:fillRef>
-          <a:effectRef idx="2">
-            <a:schemeClr val="accent1"/>
-          </a:effectRef>
-          <a:fontRef idx="minor">
-            <a:schemeClr val="lt1"/>
-          </a:fontRef>
-        </p:style>
-        <p:txBody>
-          <a:bodyPr rtlCol="0" anchor="ctr"/>
-          <a:lstStyle/>
-          <a:p>
-            <a:pPr algn="ctr"/>
-          </a:p>
-        </p:txBody>
-      </p:sp>
-      <p:sp>
-        <p:nvSpPr>
-          <p:cNvPr id="33" name="Rectangle 32"/>
-          <p:cNvSpPr/>
-          <p:nvPr/>
-        </p:nvSpPr>
-        <p:spPr>
-          <a:xfrm>
-            <a:off x="9646920" y="164592"/>
-            <a:ext cx="73152" cy="868680"/>
-          </a:xfrm>
-          <a:prstGeom prst="rect">
-            <a:avLst/>
-          </a:prstGeom>
-          <a:solidFill>
-            <a:srgbClr val="D4A853"/>
-          </a:solidFill>
-          <a:ln>
-            <a:noFill/>
-          </a:ln>
-        </p:spPr>
-        <p:style>
-          <a:lnRef idx="1">
-            <a:schemeClr val="accent1"/>
-          </a:lnRef>
-          <a:fillRef idx="3">
-            <a:schemeClr val="accent1"/>
-          </a:fillRef>
-          <a:effectRef idx="2">
-            <a:schemeClr val="accent1"/>
-          </a:effectRef>
-          <a:fontRef idx="minor">
-            <a:schemeClr val="lt1"/>
-          </a:fontRef>
-        </p:style>
-        <p:txBody>
-          <a:bodyPr rtlCol="0" anchor="ctr"/>
-          <a:lstStyle/>
-          <a:p>
-            <a:pPr algn="ctr"/>
-          </a:p>
-        </p:txBody>
-      </p:sp>
-      <p:sp>
-        <p:nvSpPr>
-          <p:cNvPr id="34" name="TextBox 33"/>
-          <p:cNvSpPr txBox="1"/>
-          <p:nvPr/>
-        </p:nvSpPr>
-        <p:spPr>
-          <a:xfrm>
-            <a:off x="9811512" y="219456"/>
-            <a:ext cx="2075688" cy="777240"/>
-          </a:xfrm>
-          <a:prstGeom prst="rect">
-            <a:avLst/>
-          </a:prstGeom>
-          <a:noFill/>
-        </p:spPr>
-        <p:txBody>
-          <a:bodyPr wrap="square">
-            <a:spAutoFit/>
-          </a:bodyPr>
-          <a:lstStyle/>
-          <a:p>
-            <a:pPr algn="l">
-              <a:spcAft>
-                <a:spcPts val="0"/>
-              </a:spcAft>
-            </a:pPr>
-            <a:r>
-              <a:rPr sz="900" b="1">
-                <a:solidFill>
-                  <a:srgbClr val="8B9CB3"/>
-                </a:solidFill>
-                <a:latin typeface="Calibri"/>
-              </a:rPr>
-              <a:t>SLIDE BUDGET</a:t>
-            </a:r>
-          </a:p>
-          <a:p>
-            <a:pPr algn="l">
-              <a:spcAft>
-                <a:spcPts val="0"/>
-              </a:spcAft>
-            </a:pPr>
-            <a:r>
-              <a:rPr sz="2600" b="1">
-                <a:solidFill>
-                  <a:srgbClr val="D4A853"/>
-                </a:solidFill>
-                <a:latin typeface="Calibri"/>
-              </a:rPr>
-              <a:t>1:15</a:t>
-            </a:r>
-          </a:p>
-          <a:p>
-            <a:pPr algn="l">
-              <a:spcAft>
-                <a:spcPts val="0"/>
-              </a:spcAft>
-            </a:pPr>
-            <a:r>
-              <a:rPr sz="900" b="0">
-                <a:solidFill>
-                  <a:srgbClr val="8B9CB3"/>
-                </a:solidFill>
-                <a:latin typeface="Calibri"/>
-              </a:rPr>
-              <a:t>by end 10:00 · left 0:00</a:t>
-            </a:r>
-          </a:p>
-        </p:txBody>
-      </p:sp>
-      <p:sp>
-        <p:nvSpPr>
-          <p:cNvPr id="35" name="Rounded Rectangle 34"/>
-          <p:cNvSpPr/>
-          <p:nvPr/>
-        </p:nvSpPr>
-        <p:spPr>
-          <a:xfrm>
-            <a:off x="502920" y="5961888"/>
-            <a:ext cx="11155680" cy="109728"/>
-          </a:xfrm>
-          <a:prstGeom prst="roundRect">
-            <a:avLst>
-              <a:gd name="adj" fmla="val 50000"/>
-            </a:avLst>
-          </a:prstGeom>
-          <a:solidFill>
-            <a:srgbClr val="243044"/>
-          </a:solidFill>
-          <a:ln>
-            <a:noFill/>
-          </a:ln>
-        </p:spPr>
-        <p:style>
-          <a:lnRef idx="1">
-            <a:schemeClr val="accent1"/>
-          </a:lnRef>
-          <a:fillRef idx="3">
-            <a:schemeClr val="accent1"/>
-          </a:fillRef>
-          <a:effectRef idx="2">
-            <a:schemeClr val="accent1"/>
-          </a:effectRef>
-          <a:fontRef idx="minor">
-            <a:schemeClr val="lt1"/>
-          </a:fontRef>
-        </p:style>
-        <p:txBody>
-          <a:bodyPr rtlCol="0" anchor="ctr"/>
-          <a:lstStyle/>
-          <a:p>
-            <a:pPr algn="ctr"/>
-          </a:p>
-        </p:txBody>
-      </p:sp>
-      <p:sp>
-        <p:nvSpPr>
-          <p:cNvPr id="36" name="Rounded Rectangle 35"/>
-          <p:cNvSpPr/>
-          <p:nvPr/>
-        </p:nvSpPr>
-        <p:spPr>
-          <a:xfrm>
-            <a:off x="502920" y="5961888"/>
-            <a:ext cx="11155680" cy="109728"/>
-          </a:xfrm>
-          <a:prstGeom prst="roundRect">
-            <a:avLst>
-              <a:gd name="adj" fmla="val 50000"/>
-            </a:avLst>
-          </a:prstGeom>
-          <a:solidFill>
-            <a:srgbClr val="D4A853"/>
-          </a:solidFill>
-          <a:ln>
-            <a:noFill/>
-          </a:ln>
-        </p:spPr>
-        <p:style>
-          <a:lnRef idx="1">
-            <a:schemeClr val="accent1"/>
-          </a:lnRef>
-          <a:fillRef idx="3">
-            <a:schemeClr val="accent1"/>
-          </a:fillRef>
-          <a:effectRef idx="2">
-            <a:schemeClr val="accent1"/>
-          </a:effectRef>
-          <a:fontRef idx="minor">
-            <a:schemeClr val="lt1"/>
-          </a:fontRef>
-        </p:style>
-        <p:txBody>
-          <a:bodyPr rtlCol="0" anchor="ctr"/>
-          <a:lstStyle/>
-          <a:p>
-            <a:pPr algn="ctr"/>
-          </a:p>
-        </p:txBody>
-      </p:sp>
-      <p:sp>
-        <p:nvSpPr>
-          <p:cNvPr id="37" name="TextBox 36"/>
-          <p:cNvSpPr txBox="1"/>
-          <p:nvPr/>
-        </p:nvSpPr>
-        <p:spPr>
-          <a:xfrm>
-            <a:off x="502920" y="5760720"/>
-            <a:ext cx="5029200" cy="201168"/>
-          </a:xfrm>
-          <a:prstGeom prst="rect">
-            <a:avLst/>
-          </a:prstGeom>
-          <a:noFill/>
-        </p:spPr>
-        <p:txBody>
-          <a:bodyPr wrap="none">
-            <a:spAutoFit/>
-          </a:bodyPr>
-          <a:lstStyle/>
-          <a:p>
-            <a:pPr algn="l">
-              <a:spcAft>
-                <a:spcPts val="0"/>
-              </a:spcAft>
-            </a:pPr>
-            <a:r>
-              <a:rPr sz="800" b="0">
-                <a:solidFill>
-                  <a:srgbClr val="8B9CB3"/>
-                </a:solidFill>
-                <a:latin typeface="Calibri"/>
-              </a:rPr>
-              <a:t>Countdown starts in Slideshow · red MOVE ON appears when budget ends · does not auto-advance</a:t>
-            </a:r>
-          </a:p>
-        </p:txBody>
-      </p:sp>
-      <p:sp>
-        <p:nvSpPr>
-          <p:cNvPr id="38" name="Rounded Rectangle 37"/>
-          <p:cNvSpPr/>
-          <p:nvPr/>
-        </p:nvSpPr>
-        <p:spPr>
-          <a:xfrm>
-            <a:off x="9189720" y="5614416"/>
-            <a:ext cx="2468880" cy="292608"/>
-          </a:xfrm>
-          <a:prstGeom prst="roundRect">
-            <a:avLst>
-              <a:gd name="adj" fmla="val 20000"/>
-            </a:avLst>
-          </a:prstGeom>
-          <a:solidFill>
-            <a:srgbClr val="F87171"/>
-          </a:solidFill>
-          <a:ln>
-            <a:noFill/>
-          </a:ln>
-        </p:spPr>
-        <p:style>
-          <a:lnRef idx="1">
-            <a:schemeClr val="accent1"/>
-          </a:lnRef>
-          <a:fillRef idx="3">
-            <a:schemeClr val="accent1"/>
-          </a:fillRef>
-          <a:effectRef idx="2">
-            <a:schemeClr val="accent1"/>
-          </a:effectRef>
-          <a:fontRef idx="minor">
-            <a:schemeClr val="lt1"/>
-          </a:fontRef>
-        </p:style>
-        <p:txBody>
-          <a:bodyPr rtlCol="0" anchor="ctr" wrap="none"/>
-          <a:lstStyle/>
-          <a:p>
-            <a:pPr algn="ctr"/>
-            <a:r>
-              <a:rPr sz="1200" b="1">
-                <a:solidFill>
-                  <a:srgbClr val="E6EDF3"/>
-                </a:solidFill>
-                <a:latin typeface="Calibri"/>
-              </a:rPr>
-              <a:t>MOVE ON  →</a:t>
-            </a:r>
-          </a:p>
-        </p:txBody>
-      </p:sp>
     </p:spTree>
   </p:cSld>
   <p:clrMapOvr>
     <a:masterClrMapping/>
   </p:clrMapOvr>
-  <p:timing>
-    <p:tnLst>
-      <p:par>
-        <p:cTn id="1" dur="indefinite" restart="never" nodeType="tmRoot">
-          <p:childTnLst>
-            <p:seq concurrent="1" nextAc="seek">
-              <p:cTn id="2" dur="indefinite" nodeType="mainSeq">
-                <p:childTnLst>
-                  <p:par>
-                    <p:cTn id="3" fill="hold">
-                      <p:stCondLst>
-                        <p:cond delay="0"/>
-                      </p:stCondLst>
-                      <p:childTnLst>
-                        <p:par>
-                          <p:cTn id="4" fill="hold">
-                            <p:stCondLst>
-                              <p:cond delay="0"/>
-                            </p:stCondLst>
-                            <p:childTnLst>
-                              <p:set>
-                                <p:cBhvr>
-                                  <p:cTn id="5" dur="1" fill="hold"/>
-                                  <p:tgtEl>
-                                    <p:spTgt spid="38"/>
-                                  </p:tgtEl>
-                                  <p:attrNameLst>
-                                    <p:attrName>style.visibility</p:attrName>
-                                  </p:attrNameLst>
-                                </p:cBhvr>
-                                <p:to>
-                                  <p:strVal val="hidden"/>
-                                </p:to>
-                              </p:set>
-                              <p:animEffect transition="out" filter="wipe(left)">
-                                <p:cBhvr>
-                                  <p:cTn id="6" dur="75000" fill="hold"/>
-                                  <p:tgtEl>
-                                    <p:spTgt spid="36"/>
-                                  </p:tgtEl>
-                                </p:cBhvr>
-                              </p:animEffect>
-                              <p:animEffect transition="in" filter="fade">
-                                <p:cBhvr>
-                                  <p:cTn id="7" dur="400" fill="hold">
-                                    <p:stCondLst>
-                                      <p:cond delay="75000"/>
-                                    </p:stCondLst>
-                                  </p:cTn>
-                                  <p:tgtEl>
-                                    <p:spTgt spid="38"/>
-                                  </p:tgtEl>
-                                </p:cBhvr>
-                              </p:animEffect>
-                              <p:set>
-                                <p:cBhvr>
-                                  <p:cTn id="8" dur="1" fill="hold">
-                                    <p:stCondLst>
-                                      <p:cond delay="75000"/>
-                                    </p:stCondLst>
-                                  </p:cTn>
-                                  <p:tgtEl>
-                                    <p:spTgt spid="38"/>
-                                  </p:tgtEl>
-                                  <p:attrNameLst>
-                                    <p:attrName>style.visibility</p:attrName>
-                                  </p:attrNameLst>
-                                </p:cBhvr>
-                                <p:to>
-                                  <p:strVal val="visible"/>
-                                </p:to>
-                              </p:set>
-                            </p:childTnLst>
-                          </p:cTn>
-                        </p:par>
-                      </p:childTnLst>
-                    </p:cTn>
-                  </p:par>
-                </p:childTnLst>
-              </p:cTn>
-              <p:prevCondLst>
-                <p:cond evt="onPrev" delay="0">
-                  <p:tgtEl>
-                    <p:sldTgt/>
-                  </p:tgtEl>
-                </p:cond>
-              </p:prevCondLst>
-              <p:nextCondLst>
-                <p:cond evt="onNext" delay="0">
-                  <p:tgtEl>
-                    <p:sldTgt/>
-                  </p:tgtEl>
-                </p:cond>
-              </p:nextCondLst>
-            </p:seq>
-          </p:childTnLst>
-        </p:cTn>
-      </p:par>
-    </p:tnLst>
-  </p:timing>
 </p:sld>
 </file>
 

--- a/case-study-2-ao-offering-executive.pptx
+++ b/case-study-2-ao-offering-executive.pptx
@@ -1114,7 +1114,22 @@
           <a:p/>
           <a:p>
             <a:r>
-              <a:t>Two proof anchors then recommendation sentence. Invite depth on CPIs, five-year economics, or enablement.</a:t>
+              <a:t>Two proof anchors (genericized — no client names / precise $ out loud unless you choose to). Then recommendation.</a:t>
+            </a:r>
+          </a:p>
+          <a:p>
+            <a:r>
+              <a:t>Say explicitly: this answers multivendor managed IT / ADM-style deal priorities — single accountability under MS.</a:t>
+            </a:r>
+          </a:p>
+          <a:p>
+            <a:r>
+              <a:t>Bridge: “This is the kind of trade-off conversation I’d bring to this role.”</a:t>
+            </a:r>
+          </a:p>
+          <a:p>
+            <a:r>
+              <a:t>HTML is leave-behind — not the live walkthrough. On P&amp;L slide hit 2–3 numbers only.</a:t>
             </a:r>
           </a:p>
           <a:p/>
@@ -4701,7 +4716,7 @@
                 </a:solidFill>
                 <a:latin typeface="Calibri"/>
               </a:rPr>
-              <a:t>Telefónica Argentina renewal · Three UK consolidation &amp; autonomy economics</a:t>
+              <a:t>LATAM Tier-1 renewal · Tier-1 UK consolidation &amp; autonomy economics</a:t>
             </a:r>
           </a:p>
         </p:txBody>
@@ -15943,7 +15958,7 @@
                 </a:solidFill>
                 <a:latin typeface="Calibri"/>
               </a:rPr>
-              <a:t>TELEFÓNICA ARGENTINA — ~$100m RENEWAL</a:t>
+              <a:t>LATAM TIER-1 — NINE-FIGURE MGS RENEWAL</a:t>
             </a:r>
           </a:p>
           <a:p>
@@ -15959,7 +15974,7 @@
                 </a:solidFill>
                 <a:latin typeface="Calibri"/>
               </a:rPr>
-              <a:t>3,000+ backlog · ~500/day → offender taxonomy</a:t>
+              <a:t>Thousands of backlog items · high daily volume → offender taxonomy</a:t>
             </a:r>
           </a:p>
           <a:p>
@@ -16075,7 +16090,7 @@
                 </a:solidFill>
                 <a:latin typeface="Calibri"/>
               </a:rPr>
-              <a:t>THREE UK — ~$125m VENDOR CONSOLIDATION</a:t>
+              <a:t>TIER-1 UK — NINE-FIGURE VENDOR CONSOLIDATION</a:t>
             </a:r>
           </a:p>
           <a:p>
@@ -16091,7 +16106,7 @@
                 </a:solidFill>
                 <a:latin typeface="Calibri"/>
               </a:rPr>
-              <a:t>Four vendors · 400+ components · ~75 contractual performance indicators</a:t>
+              <a:t>Multi-vendor estate · 400+ components · ~75 contractual performance indicators</a:t>
             </a:r>
           </a:p>
           <a:p>
@@ -16123,7 +16138,7 @@
                 </a:solidFill>
                 <a:latin typeface="Calibri"/>
               </a:rPr>
-              <a:t>474→336 full-time-equivalent economics · lowest Priority-1s</a:t>
+              <a:t>~30% FTE right-size · lowest Priority-1s after transition</a:t>
             </a:r>
           </a:p>
         </p:txBody>
@@ -16223,7 +16238,7 @@
                 </a:solidFill>
                 <a:latin typeface="Calibri"/>
               </a:rPr>
-              <a:t>Launch a reusable Autonomous Operations managed-services offering (Ericsson + third-party under Managed Services) that sells autonomy maturity + unified observability + outcome key performance indicators as one productized journey — with enablement for customer operations and Ericsson regions, and pilots that validate total cost of ownership, soft-ramp, and library reuse before scaling. Enablement: Reverse shadow M6–M9 · Auto classes M12–M15.</a:t>
+              <a:t>Launch a reusable Autonomous Operations managed-services offering (Ericsson + third-party under Managed Services) that sells autonomy maturity + unified observability + outcome key performance indicators as one productized journey — the commercial answer to multivendor managed IT / application development &amp; maintenance style deals under one MS umbrella. Enablement: Reverse shadow M6–M9 · Auto classes M12–M15. Pilots validate TCO, soft-ramp, and library reuse before scale.</a:t>
             </a:r>
           </a:p>
         </p:txBody>
